--- a/docs/training/Otta training 2 - The admin portal.pptx
+++ b/docs/training/Otta training 2 - The admin portal.pptx
@@ -27,9 +27,14 @@
     <p:sldId id="275" r:id="rId21"/>
     <p:sldId id="276" r:id="rId22"/>
     <p:sldId id="277" r:id="rId23"/>
+    <p:sldId id="278" r:id="rId24"/>
+    <p:sldId id="279" r:id="rId25"/>
+    <p:sldId id="280" r:id="rId26"/>
+    <p:sldId id="281" r:id="rId27"/>
+    <p:sldId id="282" r:id="rId28"/>
   </p:sldIdLst>
   <p:notesMasterIdLst>
-    <p:notesMasterId r:id="rId24"/>
+    <p:notesMasterId r:id="rId29"/>
   </p:notesMasterIdLst>
   <p:sldSz cx="12192000" cy="6858000"/>
   <p:notesSz cx="6858000" cy="12192000"/>
@@ -128,12 +133,12 @@
   <p:extLst>
     <p:ext uri="{521415D9-36F7-43E2-AB2F-B90AF26B5E84}">
       <p14:sectionLst xmlns:p14="http://schemas.microsoft.com/office/powerpoint/2010/main">
-        <p14:section name="Introduction" id="{6eca5261-cbe3-888a-bfb3-171df74552d7}">
+        <p14:section name="Introduction" id="{b3740ab9-0abd-4a50-eb60-ccbd8b945b8e}">
           <p14:sldIdLst>
             <p14:sldId id="257"/>
           </p14:sldIdLst>
         </p14:section>
-        <p14:section name="Signing in and the overview" id="{67854cd6-3587-43f8-0dbe-74250f32a4a9}">
+        <p14:section name="Signing in and the overview" id="{a80aae0d-6ff0-6084-3769-977239e6ff94}">
           <p14:sldIdLst>
             <p14:sldId id="258"/>
             <p14:sldId id="259"/>
@@ -142,35 +147,44 @@
             <p14:sldId id="262"/>
           </p14:sldIdLst>
         </p14:section>
-        <p14:section name="Applications and underwriting" id="{70760c71-41d9-223a-0540-14625a9633cd}">
+        <p14:section name="Reporting" id="{da6ba71e-6384-2ebe-98b7-3fe98fe3fc93}">
           <p14:sldIdLst>
             <p14:sldId id="263"/>
             <p14:sldId id="264"/>
             <p14:sldId id="265"/>
             <p14:sldId id="266"/>
             <p14:sldId id="267"/>
-            <p14:sldId id="268"/>
           </p14:sldIdLst>
         </p14:section>
-        <p14:section name="Enquiries and brokers" id="{bf8ba971-3128-fa3f-2735-9d04e2e5e4bb}">
+        <p14:section name="Applications and underwriting" id="{5525d131-589f-b282-7749-d8fa9652f02d}">
           <p14:sldIdLst>
+            <p14:sldId id="268"/>
             <p14:sldId id="269"/>
             <p14:sldId id="270"/>
             <p14:sldId id="271"/>
             <p14:sldId id="272"/>
+            <p14:sldId id="273"/>
           </p14:sldIdLst>
         </p14:section>
-        <p14:section name="Quotes, policies and email" id="{51dcf5b9-8993-fe86-bbaa-5f6f9eb7e54d}">
+        <p14:section name="Enquiries and brokers" id="{2ab45032-be48-e79a-c507-c68b8ded54f2}">
           <p14:sldIdLst>
-            <p14:sldId id="273"/>
             <p14:sldId id="274"/>
             <p14:sldId id="275"/>
             <p14:sldId id="276"/>
+            <p14:sldId id="277"/>
           </p14:sldIdLst>
         </p14:section>
-        <p14:section name="Summary" id="{c8e902ae-1444-2a3d-030d-f8a92b16f1ab}">
+        <p14:section name="Quotes, policies and email" id="{185096fc-d9a3-6d84-06bb-86b74a383924}">
           <p14:sldIdLst>
-            <p14:sldId id="277"/>
+            <p14:sldId id="278"/>
+            <p14:sldId id="279"/>
+            <p14:sldId id="280"/>
+            <p14:sldId id="281"/>
+          </p14:sldIdLst>
+        </p14:section>
+        <p14:section name="Summary" id="{dff14932-90de-2a36-506d-093ed1877653}">
+          <p14:sldIdLst>
+            <p14:sldId id="282"/>
           </p14:sldIdLst>
         </p14:section>
       </p14:sectionLst>
@@ -665,7 +679,7 @@
           <a:p>
             <a:r>
               <a:rPr lang="en-US" dirty="0"/>
-              <a:t>At the top of each application is the insured name and reference, with buttons to download the filled V13 worksheet and the application PDF.</a:t>
+              <a:t>This chart shows how many quotes we issued each month, how many were bound, and the conversion rate. Conversion counts only decided quotes, so quotes still waiting on the broker don't drag the rate down. The list on the right compares conversion by product.</a:t>
             </a:r>
             <a:endParaRPr lang="en-US" dirty="0"/>
           </a:p>
@@ -753,7 +767,7 @@
           <a:p>
             <a:r>
               <a:rPr lang="en-US" dirty="0"/>
-              <a:t>The underwriting assistant reads each application against the Property and Landlord Underwriting Guide. It gives a headline recommendation, lists any red flags, and suggests excesses, premiums and endorsements, each with the guide section it relies on. It is a first read only. The underwriter makes every decision.</a:t>
+              <a:t>Renewals shows, month by month, how many policies were due, how many renewed and how many lapsed, with the retention rate as a line. Retention by product shows where we keep business best, and the average premium change shows the rate movement at renewal.</a:t>
             </a:r>
             <a:endParaRPr lang="en-US" dirty="0"/>
           </a:p>
@@ -841,7 +855,7 @@
           <a:p>
             <a:r>
               <a:rPr lang="en-US" dirty="0"/>
-              <a:t>The assistant also drafts a follow up email to the broker. Read it, change anything you like, then copy it or open it straight in your email.</a:t>
+              <a:t>The last chart shows the premium due to renew in each of the next 12 months, so the team can plan ahead for busy months.</a:t>
             </a:r>
             <a:endParaRPr lang="en-US" dirty="0"/>
           </a:p>
@@ -929,7 +943,7 @@
           <a:p>
             <a:r>
               <a:rPr lang="en-US" dirty="0"/>
-              <a:t>Copy into the V13 worksheet lets you fill the rating spreadsheet without retyping. Check the rating region first: it is suggested from the address but you can change it. Then copy each block and paste it into the first matching yellow cell in V13. Only the values go in, so the worksheet's own formulas and dropdowns stay as they are.</a:t>
+              <a:t>Applications and underwriting. Every online application and claim lands here, with a first read from the underwriting assistant.</a:t>
             </a:r>
             <a:endParaRPr lang="en-US" dirty="0"/>
           </a:p>
@@ -1017,7 +1031,7 @@
           <a:p>
             <a:r>
               <a:rPr lang="en-US" dirty="0"/>
-              <a:t>Enquiries and brokers. Website enquiries, new broker sign ups and the brokerages we work with.</a:t>
+              <a:t>Applications lists every online form submitted by brokers or by their clients through a secure link. Each row shows the insured, the product, the broker and the status. Select a row to open it.</a:t>
             </a:r>
             <a:endParaRPr lang="en-US" dirty="0"/>
           </a:p>
@@ -1105,7 +1119,7 @@
           <a:p>
             <a:r>
               <a:rPr lang="en-US" dirty="0"/>
-              <a:t>Every enquiry from the website Contact Us form appears here as well as by email. Reply to the visitor, then select Mark handled so the team knows it is done.</a:t>
+              <a:t>At the top of each application is the insured name and reference, with buttons to download the filled V13 worksheet and the application PDF.</a:t>
             </a:r>
             <a:endParaRPr lang="en-US" dirty="0"/>
           </a:p>
@@ -1193,7 +1207,7 @@
           <a:p>
             <a:r>
               <a:rPr lang="en-US" dirty="0"/>
-              <a:t>When a broker asks for portal access, they appear under Access requests. Check their details, choose the brokerage they belong to, and approve. They receive a welcome email with a link to set their password and the broker guide. The link lasts 7 days. You can also invite a broker directly with the form on the right.</a:t>
+              <a:t>The underwriting assistant reads each application against the Property and Landlord Underwriting Guide. It gives a headline recommendation, lists any red flags, and suggests excesses, premiums and endorsements, each with the guide section it relies on. It is a first read only. The underwriter makes every decision.</a:t>
             </a:r>
             <a:endParaRPr lang="en-US" dirty="0"/>
           </a:p>
@@ -1281,7 +1295,7 @@
           <a:p>
             <a:r>
               <a:rPr lang="en-US" dirty="0"/>
-              <a:t>Brokers lists every brokerage and its people. Broker view is useful when a broker calls with a question: you see exactly what they see.</a:t>
+              <a:t>The assistant also drafts a follow up email to the broker. Read it, change anything you like, then copy it or open it straight in your email.</a:t>
             </a:r>
             <a:endParaRPr lang="en-US" dirty="0"/>
           </a:p>
@@ -1369,7 +1383,7 @@
           <a:p>
             <a:r>
               <a:rPr lang="en-US" dirty="0"/>
-              <a:t>Quotes, policies and email. From quote to bound policy, and making sure our emails arrive.</a:t>
+              <a:t>Copy into the V13 worksheet lets you fill the rating spreadsheet without retyping. Check the rating region first: it is suggested from the address but you can change it. Then copy each block and paste it into the first matching yellow cell in V13. Only the values go in, so the worksheet's own formulas and dropdowns stay as they are.</a:t>
             </a:r>
             <a:endParaRPr lang="en-US" dirty="0"/>
           </a:p>
@@ -1457,7 +1471,7 @@
           <a:p>
             <a:r>
               <a:rPr lang="en-US" dirty="0"/>
-              <a:t>When a broker accepts a quote in the portal and instructs Otta to bind, the quote shows a bind instruction banner, and you'll see a celebration on the overview. Bind the policy in the usual way, then update the quote.</a:t>
+              <a:t>Enquiries and brokers. Website enquiries, new broker sign ups and the brokerages we work with.</a:t>
             </a:r>
             <a:endParaRPr lang="en-US" dirty="0"/>
           </a:p>
@@ -1545,7 +1559,7 @@
           <a:p>
             <a:r>
               <a:rPr lang="en-US" dirty="0"/>
-              <a:t>What this module covers. Signing in and the overview: The dashboard, live activity and what needs attention. Applications and underwriting: Reading an application with the underwriting assistant and filling the V13 worksheet. Enquiries and brokers: Website enquiries, approving portal access and managing brokers. Quotes, policies and email: Bind instructions, the policy book and checking email delivery.</a:t>
+              <a:t>What this module covers. Signing in and the overview: The dashboard, live activity and what needs attention. Reporting: Premium in force by product, quote conversion and renewal retention. Applications and underwriting: Reading an application with the underwriting assistant and filling the V13 worksheet. Enquiries and brokers: Website enquiries, approving portal access and managing brokers. Quotes, policies and email: Bind instructions, the policy book and checking email delivery.</a:t>
             </a:r>
             <a:endParaRPr lang="en-US" dirty="0"/>
           </a:p>
@@ -1633,7 +1647,7 @@
           <a:p>
             <a:r>
               <a:rPr lang="en-US" dirty="0"/>
-              <a:t>Policies holds every policy across all brokers, from manual entry and InsuredHQ. Search, filter by product or status, and select a policy to open it.</a:t>
+              <a:t>Every enquiry from the website Contact Us form appears here as well as by email. Reply to the visitor, then select Mark handled so the team knows it is done.</a:t>
             </a:r>
             <a:endParaRPr lang="en-US" dirty="0"/>
           </a:p>
@@ -1721,7 +1735,7 @@
           <a:p>
             <a:r>
               <a:rPr lang="en-US" dirty="0"/>
-              <a:t>If emails aren't arriving, start here. Email check shows whether sending is switched on, lets you send yourself a test email, and lists the sender addresses that must be verified in Brevo, our email service. If the test fails, the page shows the reason Brevo gave.</a:t>
+              <a:t>When a broker asks for portal access, they appear under Access requests. Check their details, choose the brokerage they belong to, and approve. They receive a welcome email with a link to set their password and the broker guide. The link lasts 7 days. You can also invite a broker directly with the form on the right.</a:t>
             </a:r>
             <a:endParaRPr lang="en-US" dirty="0"/>
           </a:p>
@@ -1809,7 +1823,7 @@
           <a:p>
             <a:r>
               <a:rPr lang="en-US" dirty="0"/>
-              <a:t>Key points. Start each day on the overview: banners show what's waiting, Live activity shows what's new. The underwriting assistant gives a first read. The underwriter makes every decision. Copy into V13 fills the rating worksheet without retyping. Approve broker access from Access requests; the broker gets a welcome email and the guide.</a:t>
+              <a:t>Brokers lists every brokerage and its people. Broker view is useful when a broker calls with a question: you see exactly what they see.</a:t>
             </a:r>
             <a:endParaRPr lang="en-US" dirty="0"/>
           </a:p>
@@ -1833,6 +1847,446 @@
             <a:fld id="{F7021451-1387-4CA6-816F-3879F97B5CBC}" type="slidenum">
               <a:rPr lang="en-US"/>
               <a:t>22</a:t>
+            </a:fld>
+            <a:endParaRPr lang="en-US"/>
+          </a:p>
+        </p:txBody>
+      </p:sp>
+    </p:spTree>
+    <p:extLst>
+      <p:ext uri="{BB962C8B-B14F-4D97-AF65-F5344CB8AC3E}">
+        <p14:creationId xmlns:p14="http://schemas.microsoft.com/office/powerpoint/2010/main" val="1024086991"/>
+      </p:ext>
+    </p:extLst>
+  </p:cSld>
+  <p:clrMapOvr>
+    <a:masterClrMapping/>
+  </p:clrMapOvr>
+</p:notes>
+</file>
+
+<file path=ppt/notesSlides/notesSlide23.xml><?xml version="1.0" encoding="utf-8"?>
+<p:notes xmlns:a="http://schemas.openxmlformats.org/drawingml/2006/main" xmlns:r="http://schemas.openxmlformats.org/officeDocument/2006/relationships" xmlns:p="http://schemas.openxmlformats.org/presentationml/2006/main">
+  <p:cSld>
+    <p:spTree>
+      <p:nvGrpSpPr>
+        <p:cNvPr id="1" name=""/>
+        <p:cNvGrpSpPr/>
+        <p:nvPr/>
+      </p:nvGrpSpPr>
+      <p:grpSpPr>
+        <a:xfrm>
+          <a:off x="0" y="0"/>
+          <a:ext cx="0" cy="0"/>
+          <a:chOff x="0" y="0"/>
+          <a:chExt cx="0" cy="0"/>
+        </a:xfrm>
+      </p:grpSpPr>
+      <p:sp>
+        <p:nvSpPr>
+          <p:cNvPr id="2" name="Slide Image Placeholder 1"/>
+          <p:cNvSpPr>
+            <a:spLocks noGrp="1" noRot="1" noChangeAspect="1"/>
+          </p:cNvSpPr>
+          <p:nvPr>
+            <p:ph type="sldImg"/>
+          </p:nvPr>
+        </p:nvSpPr>
+        <p:spPr/>
+      </p:sp>
+      <p:sp>
+        <p:nvSpPr>
+          <p:cNvPr id="3" name="Notes Placeholder 2"/>
+          <p:cNvSpPr>
+            <a:spLocks noGrp="1"/>
+          </p:cNvSpPr>
+          <p:nvPr>
+            <p:ph type="body" idx="1"/>
+          </p:nvPr>
+        </p:nvSpPr>
+        <p:spPr/>
+        <p:txBody>
+          <a:bodyPr/>
+          <a:lstStyle/>
+          <a:p>
+            <a:r>
+              <a:rPr lang="en-US" dirty="0"/>
+              <a:t>Quotes, policies and email. From quote to bound policy, and making sure our emails arrive.</a:t>
+            </a:r>
+            <a:endParaRPr lang="en-US" dirty="0"/>
+          </a:p>
+        </p:txBody>
+      </p:sp>
+      <p:sp>
+        <p:nvSpPr>
+          <p:cNvPr id="4" name="Slide Number Placeholder 3"/>
+          <p:cNvSpPr>
+            <a:spLocks noGrp="1"/>
+          </p:cNvSpPr>
+          <p:nvPr>
+            <p:ph type="sldNum" sz="quarter" idx="10"/>
+          </p:nvPr>
+        </p:nvSpPr>
+        <p:spPr/>
+        <p:txBody>
+          <a:bodyPr/>
+          <a:lstStyle/>
+          <a:p>
+            <a:fld id="{F7021451-1387-4CA6-816F-3879F97B5CBC}" type="slidenum">
+              <a:rPr lang="en-US"/>
+              <a:t>23</a:t>
+            </a:fld>
+            <a:endParaRPr lang="en-US"/>
+          </a:p>
+        </p:txBody>
+      </p:sp>
+    </p:spTree>
+    <p:extLst>
+      <p:ext uri="{BB962C8B-B14F-4D97-AF65-F5344CB8AC3E}">
+        <p14:creationId xmlns:p14="http://schemas.microsoft.com/office/powerpoint/2010/main" val="1024086991"/>
+      </p:ext>
+    </p:extLst>
+  </p:cSld>
+  <p:clrMapOvr>
+    <a:masterClrMapping/>
+  </p:clrMapOvr>
+</p:notes>
+</file>
+
+<file path=ppt/notesSlides/notesSlide24.xml><?xml version="1.0" encoding="utf-8"?>
+<p:notes xmlns:a="http://schemas.openxmlformats.org/drawingml/2006/main" xmlns:r="http://schemas.openxmlformats.org/officeDocument/2006/relationships" xmlns:p="http://schemas.openxmlformats.org/presentationml/2006/main">
+  <p:cSld>
+    <p:spTree>
+      <p:nvGrpSpPr>
+        <p:cNvPr id="1" name=""/>
+        <p:cNvGrpSpPr/>
+        <p:nvPr/>
+      </p:nvGrpSpPr>
+      <p:grpSpPr>
+        <a:xfrm>
+          <a:off x="0" y="0"/>
+          <a:ext cx="0" cy="0"/>
+          <a:chOff x="0" y="0"/>
+          <a:chExt cx="0" cy="0"/>
+        </a:xfrm>
+      </p:grpSpPr>
+      <p:sp>
+        <p:nvSpPr>
+          <p:cNvPr id="2" name="Slide Image Placeholder 1"/>
+          <p:cNvSpPr>
+            <a:spLocks noGrp="1" noRot="1" noChangeAspect="1"/>
+          </p:cNvSpPr>
+          <p:nvPr>
+            <p:ph type="sldImg"/>
+          </p:nvPr>
+        </p:nvSpPr>
+        <p:spPr/>
+      </p:sp>
+      <p:sp>
+        <p:nvSpPr>
+          <p:cNvPr id="3" name="Notes Placeholder 2"/>
+          <p:cNvSpPr>
+            <a:spLocks noGrp="1"/>
+          </p:cNvSpPr>
+          <p:nvPr>
+            <p:ph type="body" idx="1"/>
+          </p:nvPr>
+        </p:nvSpPr>
+        <p:spPr/>
+        <p:txBody>
+          <a:bodyPr/>
+          <a:lstStyle/>
+          <a:p>
+            <a:r>
+              <a:rPr lang="en-US" dirty="0"/>
+              <a:t>When a broker accepts a quote in the portal and instructs Otta to bind, the quote shows a bind instruction banner, and you'll see a celebration on the overview. Bind the policy in the usual way, then update the quote.</a:t>
+            </a:r>
+            <a:endParaRPr lang="en-US" dirty="0"/>
+          </a:p>
+        </p:txBody>
+      </p:sp>
+      <p:sp>
+        <p:nvSpPr>
+          <p:cNvPr id="4" name="Slide Number Placeholder 3"/>
+          <p:cNvSpPr>
+            <a:spLocks noGrp="1"/>
+          </p:cNvSpPr>
+          <p:nvPr>
+            <p:ph type="sldNum" sz="quarter" idx="10"/>
+          </p:nvPr>
+        </p:nvSpPr>
+        <p:spPr/>
+        <p:txBody>
+          <a:bodyPr/>
+          <a:lstStyle/>
+          <a:p>
+            <a:fld id="{F7021451-1387-4CA6-816F-3879F97B5CBC}" type="slidenum">
+              <a:rPr lang="en-US"/>
+              <a:t>24</a:t>
+            </a:fld>
+            <a:endParaRPr lang="en-US"/>
+          </a:p>
+        </p:txBody>
+      </p:sp>
+    </p:spTree>
+    <p:extLst>
+      <p:ext uri="{BB962C8B-B14F-4D97-AF65-F5344CB8AC3E}">
+        <p14:creationId xmlns:p14="http://schemas.microsoft.com/office/powerpoint/2010/main" val="1024086991"/>
+      </p:ext>
+    </p:extLst>
+  </p:cSld>
+  <p:clrMapOvr>
+    <a:masterClrMapping/>
+  </p:clrMapOvr>
+</p:notes>
+</file>
+
+<file path=ppt/notesSlides/notesSlide25.xml><?xml version="1.0" encoding="utf-8"?>
+<p:notes xmlns:a="http://schemas.openxmlformats.org/drawingml/2006/main" xmlns:r="http://schemas.openxmlformats.org/officeDocument/2006/relationships" xmlns:p="http://schemas.openxmlformats.org/presentationml/2006/main">
+  <p:cSld>
+    <p:spTree>
+      <p:nvGrpSpPr>
+        <p:cNvPr id="1" name=""/>
+        <p:cNvGrpSpPr/>
+        <p:nvPr/>
+      </p:nvGrpSpPr>
+      <p:grpSpPr>
+        <a:xfrm>
+          <a:off x="0" y="0"/>
+          <a:ext cx="0" cy="0"/>
+          <a:chOff x="0" y="0"/>
+          <a:chExt cx="0" cy="0"/>
+        </a:xfrm>
+      </p:grpSpPr>
+      <p:sp>
+        <p:nvSpPr>
+          <p:cNvPr id="2" name="Slide Image Placeholder 1"/>
+          <p:cNvSpPr>
+            <a:spLocks noGrp="1" noRot="1" noChangeAspect="1"/>
+          </p:cNvSpPr>
+          <p:nvPr>
+            <p:ph type="sldImg"/>
+          </p:nvPr>
+        </p:nvSpPr>
+        <p:spPr/>
+      </p:sp>
+      <p:sp>
+        <p:nvSpPr>
+          <p:cNvPr id="3" name="Notes Placeholder 2"/>
+          <p:cNvSpPr>
+            <a:spLocks noGrp="1"/>
+          </p:cNvSpPr>
+          <p:nvPr>
+            <p:ph type="body" idx="1"/>
+          </p:nvPr>
+        </p:nvSpPr>
+        <p:spPr/>
+        <p:txBody>
+          <a:bodyPr/>
+          <a:lstStyle/>
+          <a:p>
+            <a:r>
+              <a:rPr lang="en-US" dirty="0"/>
+              <a:t>Policies holds every policy across all brokers, from manual entry and InsuredHQ. Search, filter by product or status, and select a policy to open it.</a:t>
+            </a:r>
+            <a:endParaRPr lang="en-US" dirty="0"/>
+          </a:p>
+        </p:txBody>
+      </p:sp>
+      <p:sp>
+        <p:nvSpPr>
+          <p:cNvPr id="4" name="Slide Number Placeholder 3"/>
+          <p:cNvSpPr>
+            <a:spLocks noGrp="1"/>
+          </p:cNvSpPr>
+          <p:nvPr>
+            <p:ph type="sldNum" sz="quarter" idx="10"/>
+          </p:nvPr>
+        </p:nvSpPr>
+        <p:spPr/>
+        <p:txBody>
+          <a:bodyPr/>
+          <a:lstStyle/>
+          <a:p>
+            <a:fld id="{F7021451-1387-4CA6-816F-3879F97B5CBC}" type="slidenum">
+              <a:rPr lang="en-US"/>
+              <a:t>25</a:t>
+            </a:fld>
+            <a:endParaRPr lang="en-US"/>
+          </a:p>
+        </p:txBody>
+      </p:sp>
+    </p:spTree>
+    <p:extLst>
+      <p:ext uri="{BB962C8B-B14F-4D97-AF65-F5344CB8AC3E}">
+        <p14:creationId xmlns:p14="http://schemas.microsoft.com/office/powerpoint/2010/main" val="1024086991"/>
+      </p:ext>
+    </p:extLst>
+  </p:cSld>
+  <p:clrMapOvr>
+    <a:masterClrMapping/>
+  </p:clrMapOvr>
+</p:notes>
+</file>
+
+<file path=ppt/notesSlides/notesSlide26.xml><?xml version="1.0" encoding="utf-8"?>
+<p:notes xmlns:a="http://schemas.openxmlformats.org/drawingml/2006/main" xmlns:r="http://schemas.openxmlformats.org/officeDocument/2006/relationships" xmlns:p="http://schemas.openxmlformats.org/presentationml/2006/main">
+  <p:cSld>
+    <p:spTree>
+      <p:nvGrpSpPr>
+        <p:cNvPr id="1" name=""/>
+        <p:cNvGrpSpPr/>
+        <p:nvPr/>
+      </p:nvGrpSpPr>
+      <p:grpSpPr>
+        <a:xfrm>
+          <a:off x="0" y="0"/>
+          <a:ext cx="0" cy="0"/>
+          <a:chOff x="0" y="0"/>
+          <a:chExt cx="0" cy="0"/>
+        </a:xfrm>
+      </p:grpSpPr>
+      <p:sp>
+        <p:nvSpPr>
+          <p:cNvPr id="2" name="Slide Image Placeholder 1"/>
+          <p:cNvSpPr>
+            <a:spLocks noGrp="1" noRot="1" noChangeAspect="1"/>
+          </p:cNvSpPr>
+          <p:nvPr>
+            <p:ph type="sldImg"/>
+          </p:nvPr>
+        </p:nvSpPr>
+        <p:spPr/>
+      </p:sp>
+      <p:sp>
+        <p:nvSpPr>
+          <p:cNvPr id="3" name="Notes Placeholder 2"/>
+          <p:cNvSpPr>
+            <a:spLocks noGrp="1"/>
+          </p:cNvSpPr>
+          <p:nvPr>
+            <p:ph type="body" idx="1"/>
+          </p:nvPr>
+        </p:nvSpPr>
+        <p:spPr/>
+        <p:txBody>
+          <a:bodyPr/>
+          <a:lstStyle/>
+          <a:p>
+            <a:r>
+              <a:rPr lang="en-US" dirty="0"/>
+              <a:t>If emails aren't arriving, start here. Email check shows whether sending is switched on, lets you send yourself a test email, and lists the sender addresses that must be verified in Brevo, our email service. If the test fails, the page shows the reason Brevo gave.</a:t>
+            </a:r>
+            <a:endParaRPr lang="en-US" dirty="0"/>
+          </a:p>
+        </p:txBody>
+      </p:sp>
+      <p:sp>
+        <p:nvSpPr>
+          <p:cNvPr id="4" name="Slide Number Placeholder 3"/>
+          <p:cNvSpPr>
+            <a:spLocks noGrp="1"/>
+          </p:cNvSpPr>
+          <p:nvPr>
+            <p:ph type="sldNum" sz="quarter" idx="10"/>
+          </p:nvPr>
+        </p:nvSpPr>
+        <p:spPr/>
+        <p:txBody>
+          <a:bodyPr/>
+          <a:lstStyle/>
+          <a:p>
+            <a:fld id="{F7021451-1387-4CA6-816F-3879F97B5CBC}" type="slidenum">
+              <a:rPr lang="en-US"/>
+              <a:t>26</a:t>
+            </a:fld>
+            <a:endParaRPr lang="en-US"/>
+          </a:p>
+        </p:txBody>
+      </p:sp>
+    </p:spTree>
+    <p:extLst>
+      <p:ext uri="{BB962C8B-B14F-4D97-AF65-F5344CB8AC3E}">
+        <p14:creationId xmlns:p14="http://schemas.microsoft.com/office/powerpoint/2010/main" val="1024086991"/>
+      </p:ext>
+    </p:extLst>
+  </p:cSld>
+  <p:clrMapOvr>
+    <a:masterClrMapping/>
+  </p:clrMapOvr>
+</p:notes>
+</file>
+
+<file path=ppt/notesSlides/notesSlide27.xml><?xml version="1.0" encoding="utf-8"?>
+<p:notes xmlns:a="http://schemas.openxmlformats.org/drawingml/2006/main" xmlns:r="http://schemas.openxmlformats.org/officeDocument/2006/relationships" xmlns:p="http://schemas.openxmlformats.org/presentationml/2006/main">
+  <p:cSld>
+    <p:spTree>
+      <p:nvGrpSpPr>
+        <p:cNvPr id="1" name=""/>
+        <p:cNvGrpSpPr/>
+        <p:nvPr/>
+      </p:nvGrpSpPr>
+      <p:grpSpPr>
+        <a:xfrm>
+          <a:off x="0" y="0"/>
+          <a:ext cx="0" cy="0"/>
+          <a:chOff x="0" y="0"/>
+          <a:chExt cx="0" cy="0"/>
+        </a:xfrm>
+      </p:grpSpPr>
+      <p:sp>
+        <p:nvSpPr>
+          <p:cNvPr id="2" name="Slide Image Placeholder 1"/>
+          <p:cNvSpPr>
+            <a:spLocks noGrp="1" noRot="1" noChangeAspect="1"/>
+          </p:cNvSpPr>
+          <p:nvPr>
+            <p:ph type="sldImg"/>
+          </p:nvPr>
+        </p:nvSpPr>
+        <p:spPr/>
+      </p:sp>
+      <p:sp>
+        <p:nvSpPr>
+          <p:cNvPr id="3" name="Notes Placeholder 2"/>
+          <p:cNvSpPr>
+            <a:spLocks noGrp="1"/>
+          </p:cNvSpPr>
+          <p:nvPr>
+            <p:ph type="body" idx="1"/>
+          </p:nvPr>
+        </p:nvSpPr>
+        <p:spPr/>
+        <p:txBody>
+          <a:bodyPr/>
+          <a:lstStyle/>
+          <a:p>
+            <a:r>
+              <a:rPr lang="en-US" dirty="0"/>
+              <a:t>Key points. Start each day on the overview: banners show what's waiting, Live activity shows what's new. Reporting tracks premium in force, quote conversion and renewal retention. The underwriting assistant gives a first read. The underwriter makes every decision. Copy into V13 fills the rating worksheet without retyping. Approve broker access from Access requests; the broker gets a welcome email and the guide.</a:t>
+            </a:r>
+            <a:endParaRPr lang="en-US" dirty="0"/>
+          </a:p>
+        </p:txBody>
+      </p:sp>
+      <p:sp>
+        <p:nvSpPr>
+          <p:cNvPr id="4" name="Slide Number Placeholder 3"/>
+          <p:cNvSpPr>
+            <a:spLocks noGrp="1"/>
+          </p:cNvSpPr>
+          <p:nvPr>
+            <p:ph type="sldNum" sz="quarter" idx="10"/>
+          </p:nvPr>
+        </p:nvSpPr>
+        <p:spPr/>
+        <p:txBody>
+          <a:bodyPr/>
+          <a:lstStyle/>
+          <a:p>
+            <a:fld id="{F7021451-1387-4CA6-816F-3879F97B5CBC}" type="slidenum">
+              <a:rPr lang="en-US"/>
+              <a:t>27</a:t>
             </a:fld>
             <a:endParaRPr lang="en-US"/>
           </a:p>
@@ -2337,7 +2791,7 @@
           <a:p>
             <a:r>
               <a:rPr lang="en-US" dirty="0"/>
-              <a:t>Applications and underwriting. Every online application and claim lands here, with a first read from the underwriting assistant.</a:t>
+              <a:t>Reporting. How the book is growing: premium in force, quotes turned into policies, and renewals kept.</a:t>
             </a:r>
             <a:endParaRPr lang="en-US" dirty="0"/>
           </a:p>
@@ -2425,7 +2879,7 @@
           <a:p>
             <a:r>
               <a:rPr lang="en-US" dirty="0"/>
-              <a:t>Applications lists every online form submitted by brokers or by their clients through a secure link. Each row shows the insured, the product, the broker and the status. Select a row to open it.</a:t>
+              <a:t>Reporting is under Overview in the menu. Use the product and brokerage filters at the top to narrow every figure on the page. The tiles show premium in force, quote conversion and renewal retention over the last 12 months, and the premium due to renew in the next 90 days. Below, the active book is broken down by product and by brokerage.</a:t>
             </a:r>
             <a:endParaRPr lang="en-US" dirty="0"/>
           </a:p>
@@ -3594,7 +4048,7 @@
                   <a:schemeClr val="tx2"/>
                 </a:solidFill>
               </a:rPr>
-              <a:t>Opening an application</a:t>
+              <a:t>Quoted to bound conversion</a:t>
             </a:r>
             <a:endParaRPr lang="en-US" sz="2800" dirty="0"/>
           </a:p>
@@ -3634,7 +4088,7 @@
       </p:sp>
       <p:pic>
         <p:nvPicPr>
-          <p:cNvPr id="4" name="Screenshot" descr="Opening an application: screenshot with numbered callouts">    </p:cNvPr>
+          <p:cNvPr id="4" name="Screenshot" descr="Quoted to bound conversion: screenshot with numbered callouts">    </p:cNvPr>
           <p:cNvPicPr>
             <a:picLocks noChangeAspect="1"/>
           </p:cNvPicPr>
@@ -3747,7 +4201,7 @@
                   <a:schemeClr val="tx1"/>
                 </a:solidFill>
               </a:rPr>
-              <a:t>The insured and the reference.</a:t>
+              <a:t>Quotes issued and bound each month, with the conversion rate as a line.</a:t>
             </a:r>
             <a:endParaRPr lang="en-US" sz="1350" dirty="0"/>
           </a:p>
@@ -3844,7 +4298,7 @@
                   <a:schemeClr val="tx1"/>
                 </a:solidFill>
               </a:rPr>
-              <a:t>V13 worksheet downloads the spreadsheet, already filled in.</a:t>
+              <a:t>Conversion by product: bound as a share of decided quotes.</a:t>
             </a:r>
             <a:endParaRPr lang="en-US" sz="1350" dirty="0"/>
           </a:p>
@@ -3941,7 +4395,7 @@
                   <a:schemeClr val="tx1"/>
                 </a:solidFill>
               </a:rPr>
-              <a:t>Download PDF saves the application as submitted.</a:t>
+              <a:t>The average bound premium, and how many quotes are still open.</a:t>
             </a:r>
             <a:endParaRPr lang="en-US" sz="1350" dirty="0"/>
           </a:p>
@@ -4049,7 +4503,7 @@
                   <a:schemeClr val="tx2"/>
                 </a:solidFill>
               </a:rPr>
-              <a:t>The underwriting assistant</a:t>
+              <a:t>Renewal retention</a:t>
             </a:r>
             <a:endParaRPr lang="en-US" sz="2800" dirty="0"/>
           </a:p>
@@ -4089,7 +4543,7 @@
       </p:sp>
       <p:pic>
         <p:nvPicPr>
-          <p:cNvPr id="4" name="Screenshot" descr="The underwriting assistant: screenshot with numbered callouts">    </p:cNvPr>
+          <p:cNvPr id="4" name="Screenshot" descr="Renewal retention: screenshot with numbered callouts">    </p:cNvPr>
           <p:cNvPicPr>
             <a:picLocks noChangeAspect="1"/>
           </p:cNvPicPr>
@@ -4202,7 +4656,7 @@
                   <a:schemeClr val="tx1"/>
                 </a:solidFill>
               </a:rPr>
-              <a:t>The headline: accept, refer or decline, with the main reason.</a:t>
+              <a:t>Policies due each month: renewed and lapsed, with the retention rate.</a:t>
             </a:r>
             <a:endParaRPr lang="en-US" sz="1350" dirty="0"/>
           </a:p>
@@ -4299,7 +4753,7 @@
                   <a:schemeClr val="tx1"/>
                 </a:solidFill>
               </a:rPr>
-              <a:t>Red flags against the Property and Landlord Underwriting Guide.</a:t>
+              <a:t>Retention by product.</a:t>
             </a:r>
             <a:endParaRPr lang="en-US" sz="1350" dirty="0"/>
           </a:p>
@@ -4396,104 +4850,7 @@
                   <a:schemeClr val="tx1"/>
                 </a:solidFill>
               </a:rPr>
-              <a:t>Suggested terms, each linked to the section of the guide it comes from.</a:t>
-            </a:r>
-            <a:endParaRPr lang="en-US" sz="1350" dirty="0"/>
-          </a:p>
-        </p:txBody>
-      </p:sp>
-      <p:sp>
-        <p:nvSpPr>
-          <p:cNvPr id="14" name="Step 4 marker"/>
-          <p:cNvSpPr/>
-          <p:nvPr/>
-        </p:nvSpPr>
-        <p:spPr>
-          <a:xfrm>
-            <a:off x="8503920" y="4773168"/>
-            <a:ext cx="347472" cy="347472"/>
-          </a:xfrm>
-          <a:prstGeom prst="ellipse">
-            <a:avLst/>
-          </a:prstGeom>
-          <a:solidFill>
-            <a:schemeClr val="accent3"/>
-          </a:solidFill>
-          <a:ln w="12700">
-            <a:solidFill>
-              <a:schemeClr val="accent3"/>
-            </a:solidFill>
-            <a:prstDash val="solid"/>
-          </a:ln>
-        </p:spPr>
-      </p:sp>
-      <p:sp>
-        <p:nvSpPr>
-          <p:cNvPr id="15" name="Step 4 number"/>
-          <p:cNvSpPr txBox="1"/>
-          <p:nvPr/>
-        </p:nvSpPr>
-        <p:spPr>
-          <a:xfrm>
-            <a:off x="8503920" y="4773168"/>
-            <a:ext cx="347472" cy="347472"/>
-          </a:xfrm>
-          <a:prstGeom prst="rect">
-            <a:avLst/>
-          </a:prstGeom>
-          <a:noFill/>
-          <a:ln/>
-        </p:spPr>
-        <p:txBody>
-          <a:bodyPr wrap="square" lIns="0" tIns="0" rIns="0" bIns="0" rtlCol="0" anchor="ctr"/>
-          <a:lstStyle/>
-          <a:p>
-            <a:pPr algn="ctr" indent="0" marL="0">
-              <a:buNone/>
-            </a:pPr>
-            <a:r>
-              <a:rPr lang="en-US" sz="1300" b="1" dirty="0">
-                <a:solidFill>
-                  <a:schemeClr val="bg1"/>
-                </a:solidFill>
-              </a:rPr>
-              <a:t>4</a:t>
-            </a:r>
-            <a:endParaRPr lang="en-US" sz="1300" dirty="0"/>
-          </a:p>
-        </p:txBody>
-      </p:sp>
-      <p:sp>
-        <p:nvSpPr>
-          <p:cNvPr id="16" name="Step 4 text"/>
-          <p:cNvSpPr txBox="1"/>
-          <p:nvPr/>
-        </p:nvSpPr>
-        <p:spPr>
-          <a:xfrm>
-            <a:off x="8979408" y="4754880"/>
-            <a:ext cx="2770632" cy="1115568"/>
-          </a:xfrm>
-          <a:prstGeom prst="rect">
-            <a:avLst/>
-          </a:prstGeom>
-          <a:noFill/>
-          <a:ln/>
-        </p:spPr>
-        <p:txBody>
-          <a:bodyPr wrap="square" lIns="0" tIns="0" rIns="0" bIns="0" rtlCol="0" anchor="t"/>
-          <a:lstStyle/>
-          <a:p>
-            <a:pPr indent="0" marL="0">
-              <a:buNone/>
-            </a:pPr>
-            <a:r>
-              <a:rPr lang="en-US" sz="1350" dirty="0">
-                <a:solidFill>
-                  <a:schemeClr val="tx1"/>
-                </a:solidFill>
-              </a:rPr>
-              <a:t>Write again refreshes the brief after changes.</a:t>
+              <a:t>The average premium change at renewal.</a:t>
             </a:r>
             <a:endParaRPr lang="en-US" sz="1350" dirty="0"/>
           </a:p>
@@ -4601,7 +4958,7 @@
                   <a:schemeClr val="tx2"/>
                 </a:solidFill>
               </a:rPr>
-              <a:t>Following up with the broker</a:t>
+              <a:t>Renewals coming up</a:t>
             </a:r>
             <a:endParaRPr lang="en-US" sz="2800" dirty="0"/>
           </a:p>
@@ -4641,7 +4998,7 @@
       </p:sp>
       <p:pic>
         <p:nvPicPr>
-          <p:cNvPr id="4" name="Screenshot" descr="Following up with the broker: screenshot with numbered callouts">    </p:cNvPr>
+          <p:cNvPr id="4" name="Screenshot" descr="Renewals coming up: screenshot with numbered callouts">    </p:cNvPr>
           <p:cNvPicPr>
             <a:picLocks noChangeAspect="1"/>
           </p:cNvPicPr>
@@ -4754,7 +5111,7 @@
                   <a:schemeClr val="tx1"/>
                 </a:solidFill>
               </a:rPr>
-              <a:t>A draft email to the broker, asking for anything still missing.</a:t>
+              <a:t>Renewal premium due in each of the next 12 months.</a:t>
             </a:r>
             <a:endParaRPr lang="en-US" sz="1350" dirty="0"/>
           </a:p>
@@ -4851,104 +5208,7 @@
                   <a:schemeClr val="tx1"/>
                 </a:solidFill>
               </a:rPr>
-              <a:t>Copy email to paste it into your own email.</a:t>
-            </a:r>
-            <a:endParaRPr lang="en-US" sz="1350" dirty="0"/>
-          </a:p>
-        </p:txBody>
-      </p:sp>
-      <p:sp>
-        <p:nvSpPr>
-          <p:cNvPr id="11" name="Step 3 marker"/>
-          <p:cNvSpPr/>
-          <p:nvPr/>
-        </p:nvSpPr>
-        <p:spPr>
-          <a:xfrm>
-            <a:off x="8503920" y="3584448"/>
-            <a:ext cx="347472" cy="347472"/>
-          </a:xfrm>
-          <a:prstGeom prst="ellipse">
-            <a:avLst/>
-          </a:prstGeom>
-          <a:solidFill>
-            <a:schemeClr val="accent3"/>
-          </a:solidFill>
-          <a:ln w="12700">
-            <a:solidFill>
-              <a:schemeClr val="accent3"/>
-            </a:solidFill>
-            <a:prstDash val="solid"/>
-          </a:ln>
-        </p:spPr>
-      </p:sp>
-      <p:sp>
-        <p:nvSpPr>
-          <p:cNvPr id="12" name="Step 3 number"/>
-          <p:cNvSpPr txBox="1"/>
-          <p:nvPr/>
-        </p:nvSpPr>
-        <p:spPr>
-          <a:xfrm>
-            <a:off x="8503920" y="3584448"/>
-            <a:ext cx="347472" cy="347472"/>
-          </a:xfrm>
-          <a:prstGeom prst="rect">
-            <a:avLst/>
-          </a:prstGeom>
-          <a:noFill/>
-          <a:ln/>
-        </p:spPr>
-        <p:txBody>
-          <a:bodyPr wrap="square" lIns="0" tIns="0" rIns="0" bIns="0" rtlCol="0" anchor="ctr"/>
-          <a:lstStyle/>
-          <a:p>
-            <a:pPr algn="ctr" indent="0" marL="0">
-              <a:buNone/>
-            </a:pPr>
-            <a:r>
-              <a:rPr lang="en-US" sz="1300" b="1" dirty="0">
-                <a:solidFill>
-                  <a:schemeClr val="bg1"/>
-                </a:solidFill>
-              </a:rPr>
-              <a:t>3</a:t>
-            </a:r>
-            <a:endParaRPr lang="en-US" sz="1300" dirty="0"/>
-          </a:p>
-        </p:txBody>
-      </p:sp>
-      <p:sp>
-        <p:nvSpPr>
-          <p:cNvPr id="13" name="Step 3 text"/>
-          <p:cNvSpPr txBox="1"/>
-          <p:nvPr/>
-        </p:nvSpPr>
-        <p:spPr>
-          <a:xfrm>
-            <a:off x="8979408" y="3566160"/>
-            <a:ext cx="2770632" cy="1115568"/>
-          </a:xfrm>
-          <a:prstGeom prst="rect">
-            <a:avLst/>
-          </a:prstGeom>
-          <a:noFill/>
-          <a:ln/>
-        </p:spPr>
-        <p:txBody>
-          <a:bodyPr wrap="square" lIns="0" tIns="0" rIns="0" bIns="0" rtlCol="0" anchor="t"/>
-          <a:lstStyle/>
-          <a:p>
-            <a:pPr indent="0" marL="0">
-              <a:buNone/>
-            </a:pPr>
-            <a:r>
-              <a:rPr lang="en-US" sz="1350" dirty="0">
-                <a:solidFill>
-                  <a:schemeClr val="tx1"/>
-                </a:solidFill>
-              </a:rPr>
-              <a:t>Open in email starts a new message with it filled in.</a:t>
+              <a:t>Plan renewal work for the busy months ahead.</a:t>
             </a:r>
             <a:endParaRPr lang="en-US" sz="1350" dirty="0"/>
           </a:p>
@@ -5026,7 +5286,43 @@
       </p:grpSpPr>
       <p:sp>
         <p:nvSpPr>
-          <p:cNvPr id="2" name="Text 0"/>
+          <p:cNvPr id="2" name="Section number"/>
+          <p:cNvSpPr txBox="1"/>
+          <p:nvPr/>
+        </p:nvSpPr>
+        <p:spPr>
+          <a:xfrm>
+            <a:off x="731520" y="1463040"/>
+            <a:ext cx="1828800" cy="1097280"/>
+          </a:xfrm>
+          <a:prstGeom prst="rect">
+            <a:avLst/>
+          </a:prstGeom>
+          <a:noFill/>
+          <a:ln/>
+        </p:spPr>
+        <p:txBody>
+          <a:bodyPr wrap="square" lIns="0" tIns="0" rIns="0" bIns="0" rtlCol="0" anchor="ctr"/>
+          <a:lstStyle/>
+          <a:p>
+            <a:pPr indent="0" marL="0">
+              <a:buNone/>
+            </a:pPr>
+            <a:r>
+              <a:rPr lang="en-US" sz="6600" b="1" dirty="0">
+                <a:solidFill>
+                  <a:schemeClr val="accent2"/>
+                </a:solidFill>
+              </a:rPr>
+              <a:t>03</a:t>
+            </a:r>
+            <a:endParaRPr lang="en-US" sz="6600" dirty="0"/>
+          </a:p>
+        </p:txBody>
+      </p:sp>
+      <p:sp>
+        <p:nvSpPr>
+          <p:cNvPr id="3" name="Text 0"/>
           <p:cNvSpPr/>
           <p:nvPr>
             <p:ph idx="101" type="title" hasCustomPrompt="1"/>
@@ -5034,378 +5330,69 @@
         </p:nvSpPr>
         <p:spPr>
           <a:xfrm>
-            <a:off x="457200" y="274320"/>
-            <a:ext cx="10058400" cy="685800"/>
-          </a:xfrm>
-          <a:prstGeom prst="rect">
-            <a:avLst/>
-          </a:prstGeom>
-          <a:noFill/>
-          <a:ln/>
-        </p:spPr>
-        <p:txBody>
-          <a:bodyPr wrap="square" lIns="0" tIns="0" rIns="0" bIns="0" rtlCol="0" anchor="ctr"/>
+            <a:off x="731520" y="2743200"/>
+            <a:ext cx="10058400" cy="1005840"/>
+          </a:xfrm>
+          <a:prstGeom prst="rect">
+            <a:avLst/>
+          </a:prstGeom>
+          <a:noFill/>
+          <a:ln/>
+        </p:spPr>
+        <p:txBody>
+          <a:bodyPr wrap="square" lIns="0" tIns="0" rIns="0" bIns="0" rtlCol="0" anchor="t"/>
           <a:lstStyle/>
           <a:p>
             <a:pPr algn="l" indent="0" marL="0">
               <a:buNone/>
             </a:pPr>
             <a:r>
-              <a:rPr lang="en-US" sz="2800" b="1" dirty="0">
-                <a:solidFill>
-                  <a:schemeClr val="tx2"/>
-                </a:solidFill>
-              </a:rPr>
-              <a:t>Copying into the V13 worksheet</a:t>
-            </a:r>
-            <a:endParaRPr lang="en-US" sz="2800" dirty="0"/>
-          </a:p>
-        </p:txBody>
-      </p:sp>
-      <p:sp>
-        <p:nvSpPr>
-          <p:cNvPr id="3" name="Screenshot frame"/>
+              <a:rPr lang="en-US" sz="4000" b="1" dirty="0">
+                <a:solidFill>
+                  <a:schemeClr val="bg1"/>
+                </a:solidFill>
+              </a:rPr>
+              <a:t>Applications and underwriting</a:t>
+            </a:r>
+            <a:endParaRPr lang="en-US" sz="4000" dirty="0"/>
+          </a:p>
+        </p:txBody>
+      </p:sp>
+      <p:sp>
+        <p:nvSpPr>
+          <p:cNvPr id="4" name="Text 0"/>
           <p:cNvSpPr/>
-          <p:nvPr/>
-        </p:nvSpPr>
-        <p:spPr>
-          <a:xfrm>
-            <a:off x="402336" y="1133856"/>
-            <a:ext cx="7790688" cy="4910328"/>
-          </a:xfrm>
-          <a:prstGeom prst="rect">
-            <a:avLst/>
-          </a:prstGeom>
-          <a:solidFill>
-            <a:schemeClr val="bg1"/>
-          </a:solidFill>
-          <a:ln w="12700">
-            <a:solidFill>
-              <a:srgbClr val="D5DFDD"/>
-            </a:solidFill>
-            <a:prstDash val="solid"/>
-          </a:ln>
-          <a:effectLst>
-            <a:outerShdw sx="100000" sy="100000" kx="0" ky="0" algn="bl" rotWithShape="0" blurRad="76200" dist="25400" dir="5400000">
-              <a:srgbClr val="000000">
-                <a:alpha val="12000"/>
-              </a:srgbClr>
-            </a:outerShdw>
-          </a:effectLst>
-        </p:spPr>
-      </p:sp>
-      <p:pic>
-        <p:nvPicPr>
-          <p:cNvPr id="4" name="Screenshot" descr="Copying into the V13 worksheet: screenshot with numbered callouts">    </p:cNvPr>
-          <p:cNvPicPr>
-            <a:picLocks noChangeAspect="1"/>
-          </p:cNvPicPr>
-          <p:nvPr/>
-        </p:nvPicPr>
-        <p:blipFill>
-          <a:blip r:embed="rId1"/>
-          <a:stretch>
-            <a:fillRect/>
-          </a:stretch>
-        </p:blipFill>
-        <p:spPr>
-          <a:xfrm>
-            <a:off x="457200" y="1188720"/>
-            <a:ext cx="7680960" cy="4800600"/>
-          </a:xfrm>
-          <a:prstGeom prst="rect">
-            <a:avLst/>
-          </a:prstGeom>
-        </p:spPr>
-      </p:pic>
-      <p:sp>
-        <p:nvSpPr>
-          <p:cNvPr id="5" name="Step 1 marker"/>
-          <p:cNvSpPr/>
-          <p:nvPr/>
-        </p:nvSpPr>
-        <p:spPr>
-          <a:xfrm>
-            <a:off x="8503920" y="1207008"/>
-            <a:ext cx="347472" cy="347472"/>
-          </a:xfrm>
-          <a:prstGeom prst="ellipse">
-            <a:avLst/>
-          </a:prstGeom>
-          <a:solidFill>
-            <a:schemeClr val="accent3"/>
-          </a:solidFill>
-          <a:ln w="12700">
-            <a:solidFill>
-              <a:schemeClr val="accent3"/>
-            </a:solidFill>
-            <a:prstDash val="solid"/>
-          </a:ln>
-        </p:spPr>
-      </p:sp>
-      <p:sp>
-        <p:nvSpPr>
-          <p:cNvPr id="6" name="Step 1 number"/>
-          <p:cNvSpPr txBox="1"/>
-          <p:nvPr/>
-        </p:nvSpPr>
-        <p:spPr>
-          <a:xfrm>
-            <a:off x="8503920" y="1207008"/>
-            <a:ext cx="347472" cy="347472"/>
-          </a:xfrm>
-          <a:prstGeom prst="rect">
-            <a:avLst/>
-          </a:prstGeom>
-          <a:noFill/>
-          <a:ln/>
-        </p:spPr>
-        <p:txBody>
-          <a:bodyPr wrap="square" lIns="0" tIns="0" rIns="0" bIns="0" rtlCol="0" anchor="ctr"/>
-          <a:lstStyle/>
-          <a:p>
-            <a:pPr algn="ctr" indent="0" marL="0">
-              <a:buNone/>
-            </a:pPr>
-            <a:r>
-              <a:rPr lang="en-US" sz="1300" b="1" dirty="0">
+          <p:nvPr>
+            <p:ph idx="102" type="body" hasCustomPrompt="1"/>
+          </p:nvPr>
+        </p:nvSpPr>
+        <p:spPr>
+          <a:xfrm>
+            <a:off x="731520" y="3794760"/>
+            <a:ext cx="8686800" cy="1097280"/>
+          </a:xfrm>
+          <a:prstGeom prst="rect">
+            <a:avLst/>
+          </a:prstGeom>
+          <a:noFill/>
+          <a:ln/>
+        </p:spPr>
+        <p:txBody>
+          <a:bodyPr wrap="square" lIns="0" tIns="0" rIns="0" bIns="0" rtlCol="0" anchor="t"/>
+          <a:lstStyle/>
+          <a:p>
+            <a:pPr algn="l" indent="0" marL="0">
+              <a:buNone/>
+            </a:pPr>
+            <a:r>
+              <a:rPr lang="en-US" sz="2000" dirty="0">
                 <a:solidFill>
                   <a:schemeClr val="bg1"/>
                 </a:solidFill>
               </a:rPr>
-              <a:t>1</a:t>
-            </a:r>
-            <a:endParaRPr lang="en-US" sz="1300" dirty="0"/>
-          </a:p>
-        </p:txBody>
-      </p:sp>
-      <p:sp>
-        <p:nvSpPr>
-          <p:cNvPr id="7" name="Step 1 text"/>
-          <p:cNvSpPr txBox="1"/>
-          <p:nvPr/>
-        </p:nvSpPr>
-        <p:spPr>
-          <a:xfrm>
-            <a:off x="8979408" y="1188720"/>
-            <a:ext cx="2770632" cy="1115568"/>
-          </a:xfrm>
-          <a:prstGeom prst="rect">
-            <a:avLst/>
-          </a:prstGeom>
-          <a:noFill/>
-          <a:ln/>
-        </p:spPr>
-        <p:txBody>
-          <a:bodyPr wrap="square" lIns="0" tIns="0" rIns="0" bIns="0" rtlCol="0" anchor="t"/>
-          <a:lstStyle/>
-          <a:p>
-            <a:pPr indent="0" marL="0">
-              <a:buNone/>
-            </a:pPr>
-            <a:r>
-              <a:rPr lang="en-US" sz="1350" dirty="0">
-                <a:solidFill>
-                  <a:schemeClr val="tx1"/>
-                </a:solidFill>
-              </a:rPr>
-              <a:t>Choose the rating region. The suggested one comes from the suburb or town.</a:t>
-            </a:r>
-            <a:endParaRPr lang="en-US" sz="1350" dirty="0"/>
-          </a:p>
-        </p:txBody>
-      </p:sp>
-      <p:sp>
-        <p:nvSpPr>
-          <p:cNvPr id="8" name="Step 2 marker"/>
-          <p:cNvSpPr/>
-          <p:nvPr/>
-        </p:nvSpPr>
-        <p:spPr>
-          <a:xfrm>
-            <a:off x="8503920" y="2395728"/>
-            <a:ext cx="347472" cy="347472"/>
-          </a:xfrm>
-          <a:prstGeom prst="ellipse">
-            <a:avLst/>
-          </a:prstGeom>
-          <a:solidFill>
-            <a:schemeClr val="accent3"/>
-          </a:solidFill>
-          <a:ln w="12700">
-            <a:solidFill>
-              <a:schemeClr val="accent3"/>
-            </a:solidFill>
-            <a:prstDash val="solid"/>
-          </a:ln>
-        </p:spPr>
-      </p:sp>
-      <p:sp>
-        <p:nvSpPr>
-          <p:cNvPr id="9" name="Step 2 number"/>
-          <p:cNvSpPr txBox="1"/>
-          <p:nvPr/>
-        </p:nvSpPr>
-        <p:spPr>
-          <a:xfrm>
-            <a:off x="8503920" y="2395728"/>
-            <a:ext cx="347472" cy="347472"/>
-          </a:xfrm>
-          <a:prstGeom prst="rect">
-            <a:avLst/>
-          </a:prstGeom>
-          <a:noFill/>
-          <a:ln/>
-        </p:spPr>
-        <p:txBody>
-          <a:bodyPr wrap="square" lIns="0" tIns="0" rIns="0" bIns="0" rtlCol="0" anchor="ctr"/>
-          <a:lstStyle/>
-          <a:p>
-            <a:pPr algn="ctr" indent="0" marL="0">
-              <a:buNone/>
-            </a:pPr>
-            <a:r>
-              <a:rPr lang="en-US" sz="1300" b="1" dirty="0">
-                <a:solidFill>
-                  <a:schemeClr val="bg1"/>
-                </a:solidFill>
-              </a:rPr>
-              <a:t>2</a:t>
-            </a:r>
-            <a:endParaRPr lang="en-US" sz="1300" dirty="0"/>
-          </a:p>
-        </p:txBody>
-      </p:sp>
-      <p:sp>
-        <p:nvSpPr>
-          <p:cNvPr id="10" name="Step 2 text"/>
-          <p:cNvSpPr txBox="1"/>
-          <p:nvPr/>
-        </p:nvSpPr>
-        <p:spPr>
-          <a:xfrm>
-            <a:off x="8979408" y="2377440"/>
-            <a:ext cx="2770632" cy="1115568"/>
-          </a:xfrm>
-          <a:prstGeom prst="rect">
-            <a:avLst/>
-          </a:prstGeom>
-          <a:noFill/>
-          <a:ln/>
-        </p:spPr>
-        <p:txBody>
-          <a:bodyPr wrap="square" lIns="0" tIns="0" rIns="0" bIns="0" rtlCol="0" anchor="t"/>
-          <a:lstStyle/>
-          <a:p>
-            <a:pPr indent="0" marL="0">
-              <a:buNone/>
-            </a:pPr>
-            <a:r>
-              <a:rPr lang="en-US" sz="1350" dirty="0">
-                <a:solidFill>
-                  <a:schemeClr val="tx1"/>
-                </a:solidFill>
-              </a:rPr>
-              <a:t>Each block lines up with the yellow boxes in V13.</a:t>
-            </a:r>
-            <a:endParaRPr lang="en-US" sz="1350" dirty="0"/>
-          </a:p>
-        </p:txBody>
-      </p:sp>
-      <p:sp>
-        <p:nvSpPr>
-          <p:cNvPr id="11" name="Step 3 marker"/>
-          <p:cNvSpPr/>
-          <p:nvPr/>
-        </p:nvSpPr>
-        <p:spPr>
-          <a:xfrm>
-            <a:off x="8503920" y="3584448"/>
-            <a:ext cx="347472" cy="347472"/>
-          </a:xfrm>
-          <a:prstGeom prst="ellipse">
-            <a:avLst/>
-          </a:prstGeom>
-          <a:solidFill>
-            <a:schemeClr val="accent3"/>
-          </a:solidFill>
-          <a:ln w="12700">
-            <a:solidFill>
-              <a:schemeClr val="accent3"/>
-            </a:solidFill>
-            <a:prstDash val="solid"/>
-          </a:ln>
-        </p:spPr>
-      </p:sp>
-      <p:sp>
-        <p:nvSpPr>
-          <p:cNvPr id="12" name="Step 3 number"/>
-          <p:cNvSpPr txBox="1"/>
-          <p:nvPr/>
-        </p:nvSpPr>
-        <p:spPr>
-          <a:xfrm>
-            <a:off x="8503920" y="3584448"/>
-            <a:ext cx="347472" cy="347472"/>
-          </a:xfrm>
-          <a:prstGeom prst="rect">
-            <a:avLst/>
-          </a:prstGeom>
-          <a:noFill/>
-          <a:ln/>
-        </p:spPr>
-        <p:txBody>
-          <a:bodyPr wrap="square" lIns="0" tIns="0" rIns="0" bIns="0" rtlCol="0" anchor="ctr"/>
-          <a:lstStyle/>
-          <a:p>
-            <a:pPr algn="ctr" indent="0" marL="0">
-              <a:buNone/>
-            </a:pPr>
-            <a:r>
-              <a:rPr lang="en-US" sz="1300" b="1" dirty="0">
-                <a:solidFill>
-                  <a:schemeClr val="bg1"/>
-                </a:solidFill>
-              </a:rPr>
-              <a:t>3</a:t>
-            </a:r>
-            <a:endParaRPr lang="en-US" sz="1300" dirty="0"/>
-          </a:p>
-        </p:txBody>
-      </p:sp>
-      <p:sp>
-        <p:nvSpPr>
-          <p:cNvPr id="13" name="Step 3 text"/>
-          <p:cNvSpPr txBox="1"/>
-          <p:nvPr/>
-        </p:nvSpPr>
-        <p:spPr>
-          <a:xfrm>
-            <a:off x="8979408" y="3566160"/>
-            <a:ext cx="2770632" cy="1115568"/>
-          </a:xfrm>
-          <a:prstGeom prst="rect">
-            <a:avLst/>
-          </a:prstGeom>
-          <a:noFill/>
-          <a:ln/>
-        </p:spPr>
-        <p:txBody>
-          <a:bodyPr wrap="square" lIns="0" tIns="0" rIns="0" bIns="0" rtlCol="0" anchor="t"/>
-          <a:lstStyle/>
-          <a:p>
-            <a:pPr indent="0" marL="0">
-              <a:buNone/>
-            </a:pPr>
-            <a:r>
-              <a:rPr lang="en-US" sz="1350" dirty="0">
-                <a:solidFill>
-                  <a:schemeClr val="tx1"/>
-                </a:solidFill>
-              </a:rPr>
-              <a:t>Copy, then click the first cell in V13 and paste.</a:t>
-            </a:r>
-            <a:endParaRPr lang="en-US" sz="1350" dirty="0"/>
+              <a:t>Every online application and claim lands here, with a first read from the underwriting assistant.</a:t>
+            </a:r>
+            <a:endParaRPr lang="en-US" sz="2000" dirty="0"/>
           </a:p>
         </p:txBody>
       </p:sp>
@@ -5421,7 +5408,7 @@
         </p:nvSpPr>
         <p:spPr>
           <a:xfrm>
-            <a:off x="11201400" y="6446520"/>
+            <a:off x="11155680" y="6263640"/>
             <a:ext cx="548640" cy="274320"/>
           </a:xfrm>
           <a:prstGeom prst="rect">
@@ -5439,7 +5426,7 @@
             <a:lvl1pPr>
               <a:defRPr sz="1000">
                 <a:solidFill>
-                  <a:srgbClr val="6B6E72"/>
+                  <a:srgbClr val="FFFFFF"/>
                 </a:solidFill>
               </a:defRPr>
             </a:lvl1pPr>
@@ -5481,14 +5468,133 @@
       </p:grpSpPr>
       <p:sp>
         <p:nvSpPr>
-          <p:cNvPr id="2" name="Section number"/>
+          <p:cNvPr id="2" name="Text 0"/>
+          <p:cNvSpPr/>
+          <p:nvPr>
+            <p:ph idx="101" type="title" hasCustomPrompt="1"/>
+          </p:nvPr>
+        </p:nvSpPr>
+        <p:spPr>
+          <a:xfrm>
+            <a:off x="457200" y="274320"/>
+            <a:ext cx="10058400" cy="685800"/>
+          </a:xfrm>
+          <a:prstGeom prst="rect">
+            <a:avLst/>
+          </a:prstGeom>
+          <a:noFill/>
+          <a:ln/>
+        </p:spPr>
+        <p:txBody>
+          <a:bodyPr wrap="square" lIns="0" tIns="0" rIns="0" bIns="0" rtlCol="0" anchor="ctr"/>
+          <a:lstStyle/>
+          <a:p>
+            <a:pPr algn="l" indent="0" marL="0">
+              <a:buNone/>
+            </a:pPr>
+            <a:r>
+              <a:rPr lang="en-US" sz="2800" b="1" dirty="0">
+                <a:solidFill>
+                  <a:schemeClr val="tx2"/>
+                </a:solidFill>
+              </a:rPr>
+              <a:t>The applications list</a:t>
+            </a:r>
+            <a:endParaRPr lang="en-US" sz="2800" dirty="0"/>
+          </a:p>
+        </p:txBody>
+      </p:sp>
+      <p:sp>
+        <p:nvSpPr>
+          <p:cNvPr id="3" name="Screenshot frame"/>
+          <p:cNvSpPr/>
+          <p:nvPr/>
+        </p:nvSpPr>
+        <p:spPr>
+          <a:xfrm>
+            <a:off x="402336" y="1133856"/>
+            <a:ext cx="7790688" cy="4910328"/>
+          </a:xfrm>
+          <a:prstGeom prst="rect">
+            <a:avLst/>
+          </a:prstGeom>
+          <a:solidFill>
+            <a:schemeClr val="bg1"/>
+          </a:solidFill>
+          <a:ln w="12700">
+            <a:solidFill>
+              <a:srgbClr val="D5DFDD"/>
+            </a:solidFill>
+            <a:prstDash val="solid"/>
+          </a:ln>
+          <a:effectLst>
+            <a:outerShdw sx="100000" sy="100000" kx="0" ky="0" algn="bl" rotWithShape="0" blurRad="76200" dist="25400" dir="5400000">
+              <a:srgbClr val="000000">
+                <a:alpha val="12000"/>
+              </a:srgbClr>
+            </a:outerShdw>
+          </a:effectLst>
+        </p:spPr>
+      </p:sp>
+      <p:pic>
+        <p:nvPicPr>
+          <p:cNvPr id="4" name="Screenshot" descr="The applications list: screenshot with numbered callouts">    </p:cNvPr>
+          <p:cNvPicPr>
+            <a:picLocks noChangeAspect="1"/>
+          </p:cNvPicPr>
+          <p:nvPr/>
+        </p:nvPicPr>
+        <p:blipFill>
+          <a:blip r:embed="rId1"/>
+          <a:stretch>
+            <a:fillRect/>
+          </a:stretch>
+        </p:blipFill>
+        <p:spPr>
+          <a:xfrm>
+            <a:off x="457200" y="1188720"/>
+            <a:ext cx="7680960" cy="4800600"/>
+          </a:xfrm>
+          <a:prstGeom prst="rect">
+            <a:avLst/>
+          </a:prstGeom>
+        </p:spPr>
+      </p:pic>
+      <p:sp>
+        <p:nvSpPr>
+          <p:cNvPr id="5" name="Step 1 marker"/>
+          <p:cNvSpPr/>
+          <p:nvPr/>
+        </p:nvSpPr>
+        <p:spPr>
+          <a:xfrm>
+            <a:off x="8503920" y="1207008"/>
+            <a:ext cx="347472" cy="347472"/>
+          </a:xfrm>
+          <a:prstGeom prst="ellipse">
+            <a:avLst/>
+          </a:prstGeom>
+          <a:solidFill>
+            <a:schemeClr val="accent3"/>
+          </a:solidFill>
+          <a:ln w="12700">
+            <a:solidFill>
+              <a:schemeClr val="accent3"/>
+            </a:solidFill>
+            <a:prstDash val="solid"/>
+          </a:ln>
+        </p:spPr>
+      </p:sp>
+      <p:sp>
+        <p:nvSpPr>
+          <p:cNvPr id="6" name="Step 1 number"/>
           <p:cNvSpPr txBox="1"/>
           <p:nvPr/>
         </p:nvSpPr>
         <p:spPr>
           <a:xfrm>
-            <a:off x="731520" y="1463040"/>
-            <a:ext cx="1828800" cy="1097280"/>
+            <a:off x="8503920" y="1207008"/>
+            <a:ext cx="347472" cy="347472"/>
           </a:xfrm>
           <a:prstGeom prst="rect">
             <a:avLst/>
@@ -5500,33 +5606,128 @@
           <a:bodyPr wrap="square" lIns="0" tIns="0" rIns="0" bIns="0" rtlCol="0" anchor="ctr"/>
           <a:lstStyle/>
           <a:p>
+            <a:pPr algn="ctr" indent="0" marL="0">
+              <a:buNone/>
+            </a:pPr>
+            <a:r>
+              <a:rPr lang="en-US" sz="1300" b="1" dirty="0">
+                <a:solidFill>
+                  <a:schemeClr val="bg1"/>
+                </a:solidFill>
+              </a:rPr>
+              <a:t>1</a:t>
+            </a:r>
+            <a:endParaRPr lang="en-US" sz="1300" dirty="0"/>
+          </a:p>
+        </p:txBody>
+      </p:sp>
+      <p:sp>
+        <p:nvSpPr>
+          <p:cNvPr id="7" name="Step 1 text"/>
+          <p:cNvSpPr txBox="1"/>
+          <p:nvPr/>
+        </p:nvSpPr>
+        <p:spPr>
+          <a:xfrm>
+            <a:off x="8979408" y="1188720"/>
+            <a:ext cx="2770632" cy="1115568"/>
+          </a:xfrm>
+          <a:prstGeom prst="rect">
+            <a:avLst/>
+          </a:prstGeom>
+          <a:noFill/>
+          <a:ln/>
+        </p:spPr>
+        <p:txBody>
+          <a:bodyPr wrap="square" lIns="0" tIns="0" rIns="0" bIns="0" rtlCol="0" anchor="t"/>
+          <a:lstStyle/>
+          <a:p>
             <a:pPr indent="0" marL="0">
               <a:buNone/>
             </a:pPr>
             <a:r>
-              <a:rPr lang="en-US" sz="6600" b="1" dirty="0">
-                <a:solidFill>
-                  <a:schemeClr val="accent2"/>
-                </a:solidFill>
-              </a:rPr>
-              <a:t>03</a:t>
-            </a:r>
-            <a:endParaRPr lang="en-US" sz="6600" dirty="0"/>
-          </a:p>
-        </p:txBody>
-      </p:sp>
-      <p:sp>
-        <p:nvSpPr>
-          <p:cNvPr id="3" name="Text 0"/>
+              <a:rPr lang="en-US" sz="1350" dirty="0">
+                <a:solidFill>
+                  <a:schemeClr val="tx1"/>
+                </a:solidFill>
+              </a:rPr>
+              <a:t>Each application or claim, newest first. Select one to open it.</a:t>
+            </a:r>
+            <a:endParaRPr lang="en-US" sz="1350" dirty="0"/>
+          </a:p>
+        </p:txBody>
+      </p:sp>
+      <p:sp>
+        <p:nvSpPr>
+          <p:cNvPr id="8" name="Step 2 marker"/>
           <p:cNvSpPr/>
-          <p:nvPr>
-            <p:ph idx="101" type="title" hasCustomPrompt="1"/>
-          </p:nvPr>
-        </p:nvSpPr>
-        <p:spPr>
-          <a:xfrm>
-            <a:off x="731520" y="2743200"/>
-            <a:ext cx="10058400" cy="1005840"/>
+          <p:nvPr/>
+        </p:nvSpPr>
+        <p:spPr>
+          <a:xfrm>
+            <a:off x="8503920" y="2395728"/>
+            <a:ext cx="347472" cy="347472"/>
+          </a:xfrm>
+          <a:prstGeom prst="ellipse">
+            <a:avLst/>
+          </a:prstGeom>
+          <a:solidFill>
+            <a:schemeClr val="accent3"/>
+          </a:solidFill>
+          <a:ln w="12700">
+            <a:solidFill>
+              <a:schemeClr val="accent3"/>
+            </a:solidFill>
+            <a:prstDash val="solid"/>
+          </a:ln>
+        </p:spPr>
+      </p:sp>
+      <p:sp>
+        <p:nvSpPr>
+          <p:cNvPr id="9" name="Step 2 number"/>
+          <p:cNvSpPr txBox="1"/>
+          <p:nvPr/>
+        </p:nvSpPr>
+        <p:spPr>
+          <a:xfrm>
+            <a:off x="8503920" y="2395728"/>
+            <a:ext cx="347472" cy="347472"/>
+          </a:xfrm>
+          <a:prstGeom prst="rect">
+            <a:avLst/>
+          </a:prstGeom>
+          <a:noFill/>
+          <a:ln/>
+        </p:spPr>
+        <p:txBody>
+          <a:bodyPr wrap="square" lIns="0" tIns="0" rIns="0" bIns="0" rtlCol="0" anchor="ctr"/>
+          <a:lstStyle/>
+          <a:p>
+            <a:pPr algn="ctr" indent="0" marL="0">
+              <a:buNone/>
+            </a:pPr>
+            <a:r>
+              <a:rPr lang="en-US" sz="1300" b="1" dirty="0">
+                <a:solidFill>
+                  <a:schemeClr val="bg1"/>
+                </a:solidFill>
+              </a:rPr>
+              <a:t>2</a:t>
+            </a:r>
+            <a:endParaRPr lang="en-US" sz="1300" dirty="0"/>
+          </a:p>
+        </p:txBody>
+      </p:sp>
+      <p:sp>
+        <p:nvSpPr>
+          <p:cNvPr id="10" name="Step 2 text"/>
+          <p:cNvSpPr txBox="1"/>
+          <p:nvPr/>
+        </p:nvSpPr>
+        <p:spPr>
+          <a:xfrm>
+            <a:off x="8979408" y="2377440"/>
+            <a:ext cx="2770632" cy="1115568"/>
           </a:xfrm>
           <a:prstGeom prst="rect">
             <a:avLst/>
@@ -5538,56 +5739,18 @@
           <a:bodyPr wrap="square" lIns="0" tIns="0" rIns="0" bIns="0" rtlCol="0" anchor="t"/>
           <a:lstStyle/>
           <a:p>
-            <a:pPr algn="l" indent="0" marL="0">
-              <a:buNone/>
-            </a:pPr>
-            <a:r>
-              <a:rPr lang="en-US" sz="4000" b="1" dirty="0">
-                <a:solidFill>
-                  <a:schemeClr val="bg1"/>
-                </a:solidFill>
-              </a:rPr>
-              <a:t>Enquiries and brokers</a:t>
-            </a:r>
-            <a:endParaRPr lang="en-US" sz="4000" dirty="0"/>
-          </a:p>
-        </p:txBody>
-      </p:sp>
-      <p:sp>
-        <p:nvSpPr>
-          <p:cNvPr id="4" name="Text 0"/>
-          <p:cNvSpPr/>
-          <p:nvPr>
-            <p:ph idx="102" type="body" hasCustomPrompt="1"/>
-          </p:nvPr>
-        </p:nvSpPr>
-        <p:spPr>
-          <a:xfrm>
-            <a:off x="731520" y="3794760"/>
-            <a:ext cx="8686800" cy="1097280"/>
-          </a:xfrm>
-          <a:prstGeom prst="rect">
-            <a:avLst/>
-          </a:prstGeom>
-          <a:noFill/>
-          <a:ln/>
-        </p:spPr>
-        <p:txBody>
-          <a:bodyPr wrap="square" lIns="0" tIns="0" rIns="0" bIns="0" rtlCol="0" anchor="t"/>
-          <a:lstStyle/>
-          <a:p>
-            <a:pPr algn="l" indent="0" marL="0">
-              <a:buNone/>
-            </a:pPr>
-            <a:r>
-              <a:rPr lang="en-US" sz="2000" dirty="0">
-                <a:solidFill>
-                  <a:schemeClr val="bg1"/>
-                </a:solidFill>
-              </a:rPr>
-              <a:t>Website enquiries, new broker sign ups and the brokerages we work with.</a:t>
-            </a:r>
-            <a:endParaRPr lang="en-US" sz="2000" dirty="0"/>
+            <a:pPr indent="0" marL="0">
+              <a:buNone/>
+            </a:pPr>
+            <a:r>
+              <a:rPr lang="en-US" sz="1350" dirty="0">
+                <a:solidFill>
+                  <a:schemeClr val="tx1"/>
+                </a:solidFill>
+              </a:rPr>
+              <a:t>Its status: new, in review, quoted and so on.</a:t>
+            </a:r>
+            <a:endParaRPr lang="en-US" sz="1350" dirty="0"/>
           </a:p>
         </p:txBody>
       </p:sp>
@@ -5603,7 +5766,7 @@
         </p:nvSpPr>
         <p:spPr>
           <a:xfrm>
-            <a:off x="11155680" y="6263640"/>
+            <a:off x="11201400" y="6446520"/>
             <a:ext cx="548640" cy="274320"/>
           </a:xfrm>
           <a:prstGeom prst="rect">
@@ -5621,7 +5784,7 @@
             <a:lvl1pPr>
               <a:defRPr sz="1000">
                 <a:solidFill>
-                  <a:srgbClr val="FFFFFF"/>
+                  <a:srgbClr val="6B6E72"/>
                 </a:solidFill>
               </a:defRPr>
             </a:lvl1pPr>
@@ -5693,7 +5856,7 @@
                   <a:schemeClr val="tx2"/>
                 </a:solidFill>
               </a:rPr>
-              <a:t>Website enquiries</a:t>
+              <a:t>Opening an application</a:t>
             </a:r>
             <a:endParaRPr lang="en-US" sz="2800" dirty="0"/>
           </a:p>
@@ -5733,7 +5896,7 @@
       </p:sp>
       <p:pic>
         <p:nvPicPr>
-          <p:cNvPr id="4" name="Screenshot" descr="Website enquiries: screenshot with numbered callouts">    </p:cNvPr>
+          <p:cNvPr id="4" name="Screenshot" descr="Opening an application: screenshot with numbered callouts">    </p:cNvPr>
           <p:cNvPicPr>
             <a:picLocks noChangeAspect="1"/>
           </p:cNvPicPr>
@@ -5846,7 +6009,7 @@
                   <a:schemeClr val="tx1"/>
                 </a:solidFill>
               </a:rPr>
-              <a:t>Each enquiry from the Contact Us page, with the message and contact details.</a:t>
+              <a:t>The insured and the reference.</a:t>
             </a:r>
             <a:endParaRPr lang="en-US" sz="1350" dirty="0"/>
           </a:p>
@@ -5943,7 +6106,104 @@
                   <a:schemeClr val="tx1"/>
                 </a:solidFill>
               </a:rPr>
-              <a:t>Mark handled once you've replied.</a:t>
+              <a:t>V13 worksheet downloads the spreadsheet, already filled in.</a:t>
+            </a:r>
+            <a:endParaRPr lang="en-US" sz="1350" dirty="0"/>
+          </a:p>
+        </p:txBody>
+      </p:sp>
+      <p:sp>
+        <p:nvSpPr>
+          <p:cNvPr id="11" name="Step 3 marker"/>
+          <p:cNvSpPr/>
+          <p:nvPr/>
+        </p:nvSpPr>
+        <p:spPr>
+          <a:xfrm>
+            <a:off x="8503920" y="3584448"/>
+            <a:ext cx="347472" cy="347472"/>
+          </a:xfrm>
+          <a:prstGeom prst="ellipse">
+            <a:avLst/>
+          </a:prstGeom>
+          <a:solidFill>
+            <a:schemeClr val="accent3"/>
+          </a:solidFill>
+          <a:ln w="12700">
+            <a:solidFill>
+              <a:schemeClr val="accent3"/>
+            </a:solidFill>
+            <a:prstDash val="solid"/>
+          </a:ln>
+        </p:spPr>
+      </p:sp>
+      <p:sp>
+        <p:nvSpPr>
+          <p:cNvPr id="12" name="Step 3 number"/>
+          <p:cNvSpPr txBox="1"/>
+          <p:nvPr/>
+        </p:nvSpPr>
+        <p:spPr>
+          <a:xfrm>
+            <a:off x="8503920" y="3584448"/>
+            <a:ext cx="347472" cy="347472"/>
+          </a:xfrm>
+          <a:prstGeom prst="rect">
+            <a:avLst/>
+          </a:prstGeom>
+          <a:noFill/>
+          <a:ln/>
+        </p:spPr>
+        <p:txBody>
+          <a:bodyPr wrap="square" lIns="0" tIns="0" rIns="0" bIns="0" rtlCol="0" anchor="ctr"/>
+          <a:lstStyle/>
+          <a:p>
+            <a:pPr algn="ctr" indent="0" marL="0">
+              <a:buNone/>
+            </a:pPr>
+            <a:r>
+              <a:rPr lang="en-US" sz="1300" b="1" dirty="0">
+                <a:solidFill>
+                  <a:schemeClr val="bg1"/>
+                </a:solidFill>
+              </a:rPr>
+              <a:t>3</a:t>
+            </a:r>
+            <a:endParaRPr lang="en-US" sz="1300" dirty="0"/>
+          </a:p>
+        </p:txBody>
+      </p:sp>
+      <p:sp>
+        <p:nvSpPr>
+          <p:cNvPr id="13" name="Step 3 text"/>
+          <p:cNvSpPr txBox="1"/>
+          <p:nvPr/>
+        </p:nvSpPr>
+        <p:spPr>
+          <a:xfrm>
+            <a:off x="8979408" y="3566160"/>
+            <a:ext cx="2770632" cy="1115568"/>
+          </a:xfrm>
+          <a:prstGeom prst="rect">
+            <a:avLst/>
+          </a:prstGeom>
+          <a:noFill/>
+          <a:ln/>
+        </p:spPr>
+        <p:txBody>
+          <a:bodyPr wrap="square" lIns="0" tIns="0" rIns="0" bIns="0" rtlCol="0" anchor="t"/>
+          <a:lstStyle/>
+          <a:p>
+            <a:pPr indent="0" marL="0">
+              <a:buNone/>
+            </a:pPr>
+            <a:r>
+              <a:rPr lang="en-US" sz="1350" dirty="0">
+                <a:solidFill>
+                  <a:schemeClr val="tx1"/>
+                </a:solidFill>
+              </a:rPr>
+              <a:t>Download PDF saves the application as submitted.</a:t>
             </a:r>
             <a:endParaRPr lang="en-US" sz="1350" dirty="0"/>
           </a:p>
@@ -6051,7 +6311,7 @@
                   <a:schemeClr val="tx2"/>
                 </a:solidFill>
               </a:rPr>
-              <a:t>Approving broker portal access</a:t>
+              <a:t>The underwriting assistant</a:t>
             </a:r>
             <a:endParaRPr lang="en-US" sz="2800" dirty="0"/>
           </a:p>
@@ -6091,7 +6351,7 @@
       </p:sp>
       <p:pic>
         <p:nvPicPr>
-          <p:cNvPr id="4" name="Screenshot" descr="Approving broker portal access: screenshot with numbered callouts">    </p:cNvPr>
+          <p:cNvPr id="4" name="Screenshot" descr="The underwriting assistant: screenshot with numbered callouts">    </p:cNvPr>
           <p:cNvPicPr>
             <a:picLocks noChangeAspect="1"/>
           </p:cNvPicPr>
@@ -6204,7 +6464,7 @@
                   <a:schemeClr val="tx1"/>
                 </a:solidFill>
               </a:rPr>
-              <a:t>A broker who has asked to join the portal.</a:t>
+              <a:t>The headline: accept, refer or decline, with the main reason.</a:t>
             </a:r>
             <a:endParaRPr lang="en-US" sz="1350" dirty="0"/>
           </a:p>
@@ -6301,7 +6561,7 @@
                   <a:schemeClr val="tx1"/>
                 </a:solidFill>
               </a:rPr>
-              <a:t>Choose their brokerage, or create a new one.</a:t>
+              <a:t>Red flags against the Property and Landlord Underwriting Guide.</a:t>
             </a:r>
             <a:endParaRPr lang="en-US" sz="1350" dirty="0"/>
           </a:p>
@@ -6398,7 +6658,7 @@
                   <a:schemeClr val="tx1"/>
                 </a:solidFill>
               </a:rPr>
-              <a:t>Approve and send invite emails them a welcome link to set a password.</a:t>
+              <a:t>Suggested terms, each linked to the section of the guide it comes from.</a:t>
             </a:r>
             <a:endParaRPr lang="en-US" sz="1350" dirty="0"/>
           </a:p>
@@ -6495,7 +6755,7 @@
                   <a:schemeClr val="tx1"/>
                 </a:solidFill>
               </a:rPr>
-              <a:t>Or invite a broker yourself.</a:t>
+              <a:t>Write again refreshes the brief after changes.</a:t>
             </a:r>
             <a:endParaRPr lang="en-US" sz="1350" dirty="0"/>
           </a:p>
@@ -6603,7 +6863,7 @@
                   <a:schemeClr val="tx2"/>
                 </a:solidFill>
               </a:rPr>
-              <a:t>Brokers</a:t>
+              <a:t>Following up with the broker</a:t>
             </a:r>
             <a:endParaRPr lang="en-US" sz="2800" dirty="0"/>
           </a:p>
@@ -6643,7 +6903,7 @@
       </p:sp>
       <p:pic>
         <p:nvPicPr>
-          <p:cNvPr id="4" name="Screenshot" descr="Brokers: screenshot with numbered callouts">    </p:cNvPr>
+          <p:cNvPr id="4" name="Screenshot" descr="Following up with the broker: screenshot with numbered callouts">    </p:cNvPr>
           <p:cNvPicPr>
             <a:picLocks noChangeAspect="1"/>
           </p:cNvPicPr>
@@ -6756,7 +7016,7 @@
                   <a:schemeClr val="tx1"/>
                 </a:solidFill>
               </a:rPr>
-              <a:t>Search brokerages and brokers.</a:t>
+              <a:t>A draft email to the broker, asking for anything still missing.</a:t>
             </a:r>
             <a:endParaRPr lang="en-US" sz="1350" dirty="0"/>
           </a:p>
@@ -6853,7 +7113,7 @@
                   <a:schemeClr val="tx1"/>
                 </a:solidFill>
               </a:rPr>
-              <a:t>Broker view shows the portal exactly as that broker sees it.</a:t>
+              <a:t>Copy email to paste it into your own email.</a:t>
             </a:r>
             <a:endParaRPr lang="en-US" sz="1350" dirty="0"/>
           </a:p>
@@ -6950,7 +7210,7 @@
                   <a:schemeClr val="tx1"/>
                 </a:solidFill>
               </a:rPr>
-              <a:t>Open a brokerage to see its people, quotes and policies.</a:t>
+              <a:t>Open in email starts a new message with it filled in.</a:t>
             </a:r>
             <a:endParaRPr lang="en-US" sz="1350" dirty="0"/>
           </a:p>
@@ -7028,14 +7288,133 @@
       </p:grpSpPr>
       <p:sp>
         <p:nvSpPr>
-          <p:cNvPr id="2" name="Section number"/>
+          <p:cNvPr id="2" name="Text 0"/>
+          <p:cNvSpPr/>
+          <p:nvPr>
+            <p:ph idx="101" type="title" hasCustomPrompt="1"/>
+          </p:nvPr>
+        </p:nvSpPr>
+        <p:spPr>
+          <a:xfrm>
+            <a:off x="457200" y="274320"/>
+            <a:ext cx="10058400" cy="685800"/>
+          </a:xfrm>
+          <a:prstGeom prst="rect">
+            <a:avLst/>
+          </a:prstGeom>
+          <a:noFill/>
+          <a:ln/>
+        </p:spPr>
+        <p:txBody>
+          <a:bodyPr wrap="square" lIns="0" tIns="0" rIns="0" bIns="0" rtlCol="0" anchor="ctr"/>
+          <a:lstStyle/>
+          <a:p>
+            <a:pPr algn="l" indent="0" marL="0">
+              <a:buNone/>
+            </a:pPr>
+            <a:r>
+              <a:rPr lang="en-US" sz="2800" b="1" dirty="0">
+                <a:solidFill>
+                  <a:schemeClr val="tx2"/>
+                </a:solidFill>
+              </a:rPr>
+              <a:t>Copying into the V13 worksheet</a:t>
+            </a:r>
+            <a:endParaRPr lang="en-US" sz="2800" dirty="0"/>
+          </a:p>
+        </p:txBody>
+      </p:sp>
+      <p:sp>
+        <p:nvSpPr>
+          <p:cNvPr id="3" name="Screenshot frame"/>
+          <p:cNvSpPr/>
+          <p:nvPr/>
+        </p:nvSpPr>
+        <p:spPr>
+          <a:xfrm>
+            <a:off x="402336" y="1133856"/>
+            <a:ext cx="7790688" cy="4910328"/>
+          </a:xfrm>
+          <a:prstGeom prst="rect">
+            <a:avLst/>
+          </a:prstGeom>
+          <a:solidFill>
+            <a:schemeClr val="bg1"/>
+          </a:solidFill>
+          <a:ln w="12700">
+            <a:solidFill>
+              <a:srgbClr val="D5DFDD"/>
+            </a:solidFill>
+            <a:prstDash val="solid"/>
+          </a:ln>
+          <a:effectLst>
+            <a:outerShdw sx="100000" sy="100000" kx="0" ky="0" algn="bl" rotWithShape="0" blurRad="76200" dist="25400" dir="5400000">
+              <a:srgbClr val="000000">
+                <a:alpha val="12000"/>
+              </a:srgbClr>
+            </a:outerShdw>
+          </a:effectLst>
+        </p:spPr>
+      </p:sp>
+      <p:pic>
+        <p:nvPicPr>
+          <p:cNvPr id="4" name="Screenshot" descr="Copying into the V13 worksheet: screenshot with numbered callouts">    </p:cNvPr>
+          <p:cNvPicPr>
+            <a:picLocks noChangeAspect="1"/>
+          </p:cNvPicPr>
+          <p:nvPr/>
+        </p:nvPicPr>
+        <p:blipFill>
+          <a:blip r:embed="rId1"/>
+          <a:stretch>
+            <a:fillRect/>
+          </a:stretch>
+        </p:blipFill>
+        <p:spPr>
+          <a:xfrm>
+            <a:off x="457200" y="1188720"/>
+            <a:ext cx="7680960" cy="4800600"/>
+          </a:xfrm>
+          <a:prstGeom prst="rect">
+            <a:avLst/>
+          </a:prstGeom>
+        </p:spPr>
+      </p:pic>
+      <p:sp>
+        <p:nvSpPr>
+          <p:cNvPr id="5" name="Step 1 marker"/>
+          <p:cNvSpPr/>
+          <p:nvPr/>
+        </p:nvSpPr>
+        <p:spPr>
+          <a:xfrm>
+            <a:off x="8503920" y="1207008"/>
+            <a:ext cx="347472" cy="347472"/>
+          </a:xfrm>
+          <a:prstGeom prst="ellipse">
+            <a:avLst/>
+          </a:prstGeom>
+          <a:solidFill>
+            <a:schemeClr val="accent3"/>
+          </a:solidFill>
+          <a:ln w="12700">
+            <a:solidFill>
+              <a:schemeClr val="accent3"/>
+            </a:solidFill>
+            <a:prstDash val="solid"/>
+          </a:ln>
+        </p:spPr>
+      </p:sp>
+      <p:sp>
+        <p:nvSpPr>
+          <p:cNvPr id="6" name="Step 1 number"/>
           <p:cNvSpPr txBox="1"/>
           <p:nvPr/>
         </p:nvSpPr>
         <p:spPr>
           <a:xfrm>
-            <a:off x="731520" y="1463040"/>
-            <a:ext cx="1828800" cy="1097280"/>
+            <a:off x="8503920" y="1207008"/>
+            <a:ext cx="347472" cy="347472"/>
           </a:xfrm>
           <a:prstGeom prst="rect">
             <a:avLst/>
@@ -7047,33 +7426,128 @@
           <a:bodyPr wrap="square" lIns="0" tIns="0" rIns="0" bIns="0" rtlCol="0" anchor="ctr"/>
           <a:lstStyle/>
           <a:p>
+            <a:pPr algn="ctr" indent="0" marL="0">
+              <a:buNone/>
+            </a:pPr>
+            <a:r>
+              <a:rPr lang="en-US" sz="1300" b="1" dirty="0">
+                <a:solidFill>
+                  <a:schemeClr val="bg1"/>
+                </a:solidFill>
+              </a:rPr>
+              <a:t>1</a:t>
+            </a:r>
+            <a:endParaRPr lang="en-US" sz="1300" dirty="0"/>
+          </a:p>
+        </p:txBody>
+      </p:sp>
+      <p:sp>
+        <p:nvSpPr>
+          <p:cNvPr id="7" name="Step 1 text"/>
+          <p:cNvSpPr txBox="1"/>
+          <p:nvPr/>
+        </p:nvSpPr>
+        <p:spPr>
+          <a:xfrm>
+            <a:off x="8979408" y="1188720"/>
+            <a:ext cx="2770632" cy="1115568"/>
+          </a:xfrm>
+          <a:prstGeom prst="rect">
+            <a:avLst/>
+          </a:prstGeom>
+          <a:noFill/>
+          <a:ln/>
+        </p:spPr>
+        <p:txBody>
+          <a:bodyPr wrap="square" lIns="0" tIns="0" rIns="0" bIns="0" rtlCol="0" anchor="t"/>
+          <a:lstStyle/>
+          <a:p>
             <a:pPr indent="0" marL="0">
               <a:buNone/>
             </a:pPr>
             <a:r>
-              <a:rPr lang="en-US" sz="6600" b="1" dirty="0">
-                <a:solidFill>
-                  <a:schemeClr val="accent2"/>
-                </a:solidFill>
-              </a:rPr>
-              <a:t>04</a:t>
-            </a:r>
-            <a:endParaRPr lang="en-US" sz="6600" dirty="0"/>
-          </a:p>
-        </p:txBody>
-      </p:sp>
-      <p:sp>
-        <p:nvSpPr>
-          <p:cNvPr id="3" name="Text 0"/>
+              <a:rPr lang="en-US" sz="1350" dirty="0">
+                <a:solidFill>
+                  <a:schemeClr val="tx1"/>
+                </a:solidFill>
+              </a:rPr>
+              <a:t>Choose the rating region. The suggested one comes from the suburb or town.</a:t>
+            </a:r>
+            <a:endParaRPr lang="en-US" sz="1350" dirty="0"/>
+          </a:p>
+        </p:txBody>
+      </p:sp>
+      <p:sp>
+        <p:nvSpPr>
+          <p:cNvPr id="8" name="Step 2 marker"/>
           <p:cNvSpPr/>
-          <p:nvPr>
-            <p:ph idx="101" type="title" hasCustomPrompt="1"/>
-          </p:nvPr>
-        </p:nvSpPr>
-        <p:spPr>
-          <a:xfrm>
-            <a:off x="731520" y="2743200"/>
-            <a:ext cx="10058400" cy="1005840"/>
+          <p:nvPr/>
+        </p:nvSpPr>
+        <p:spPr>
+          <a:xfrm>
+            <a:off x="8503920" y="2395728"/>
+            <a:ext cx="347472" cy="347472"/>
+          </a:xfrm>
+          <a:prstGeom prst="ellipse">
+            <a:avLst/>
+          </a:prstGeom>
+          <a:solidFill>
+            <a:schemeClr val="accent3"/>
+          </a:solidFill>
+          <a:ln w="12700">
+            <a:solidFill>
+              <a:schemeClr val="accent3"/>
+            </a:solidFill>
+            <a:prstDash val="solid"/>
+          </a:ln>
+        </p:spPr>
+      </p:sp>
+      <p:sp>
+        <p:nvSpPr>
+          <p:cNvPr id="9" name="Step 2 number"/>
+          <p:cNvSpPr txBox="1"/>
+          <p:nvPr/>
+        </p:nvSpPr>
+        <p:spPr>
+          <a:xfrm>
+            <a:off x="8503920" y="2395728"/>
+            <a:ext cx="347472" cy="347472"/>
+          </a:xfrm>
+          <a:prstGeom prst="rect">
+            <a:avLst/>
+          </a:prstGeom>
+          <a:noFill/>
+          <a:ln/>
+        </p:spPr>
+        <p:txBody>
+          <a:bodyPr wrap="square" lIns="0" tIns="0" rIns="0" bIns="0" rtlCol="0" anchor="ctr"/>
+          <a:lstStyle/>
+          <a:p>
+            <a:pPr algn="ctr" indent="0" marL="0">
+              <a:buNone/>
+            </a:pPr>
+            <a:r>
+              <a:rPr lang="en-US" sz="1300" b="1" dirty="0">
+                <a:solidFill>
+                  <a:schemeClr val="bg1"/>
+                </a:solidFill>
+              </a:rPr>
+              <a:t>2</a:t>
+            </a:r>
+            <a:endParaRPr lang="en-US" sz="1300" dirty="0"/>
+          </a:p>
+        </p:txBody>
+      </p:sp>
+      <p:sp>
+        <p:nvSpPr>
+          <p:cNvPr id="10" name="Step 2 text"/>
+          <p:cNvSpPr txBox="1"/>
+          <p:nvPr/>
+        </p:nvSpPr>
+        <p:spPr>
+          <a:xfrm>
+            <a:off x="8979408" y="2377440"/>
+            <a:ext cx="2770632" cy="1115568"/>
           </a:xfrm>
           <a:prstGeom prst="rect">
             <a:avLst/>
@@ -7085,33 +7559,92 @@
           <a:bodyPr wrap="square" lIns="0" tIns="0" rIns="0" bIns="0" rtlCol="0" anchor="t"/>
           <a:lstStyle/>
           <a:p>
-            <a:pPr algn="l" indent="0" marL="0">
-              <a:buNone/>
-            </a:pPr>
-            <a:r>
-              <a:rPr lang="en-US" sz="4000" b="1" dirty="0">
+            <a:pPr indent="0" marL="0">
+              <a:buNone/>
+            </a:pPr>
+            <a:r>
+              <a:rPr lang="en-US" sz="1350" dirty="0">
+                <a:solidFill>
+                  <a:schemeClr val="tx1"/>
+                </a:solidFill>
+              </a:rPr>
+              <a:t>Each block lines up with the yellow boxes in V13.</a:t>
+            </a:r>
+            <a:endParaRPr lang="en-US" sz="1350" dirty="0"/>
+          </a:p>
+        </p:txBody>
+      </p:sp>
+      <p:sp>
+        <p:nvSpPr>
+          <p:cNvPr id="11" name="Step 3 marker"/>
+          <p:cNvSpPr/>
+          <p:nvPr/>
+        </p:nvSpPr>
+        <p:spPr>
+          <a:xfrm>
+            <a:off x="8503920" y="3584448"/>
+            <a:ext cx="347472" cy="347472"/>
+          </a:xfrm>
+          <a:prstGeom prst="ellipse">
+            <a:avLst/>
+          </a:prstGeom>
+          <a:solidFill>
+            <a:schemeClr val="accent3"/>
+          </a:solidFill>
+          <a:ln w="12700">
+            <a:solidFill>
+              <a:schemeClr val="accent3"/>
+            </a:solidFill>
+            <a:prstDash val="solid"/>
+          </a:ln>
+        </p:spPr>
+      </p:sp>
+      <p:sp>
+        <p:nvSpPr>
+          <p:cNvPr id="12" name="Step 3 number"/>
+          <p:cNvSpPr txBox="1"/>
+          <p:nvPr/>
+        </p:nvSpPr>
+        <p:spPr>
+          <a:xfrm>
+            <a:off x="8503920" y="3584448"/>
+            <a:ext cx="347472" cy="347472"/>
+          </a:xfrm>
+          <a:prstGeom prst="rect">
+            <a:avLst/>
+          </a:prstGeom>
+          <a:noFill/>
+          <a:ln/>
+        </p:spPr>
+        <p:txBody>
+          <a:bodyPr wrap="square" lIns="0" tIns="0" rIns="0" bIns="0" rtlCol="0" anchor="ctr"/>
+          <a:lstStyle/>
+          <a:p>
+            <a:pPr algn="ctr" indent="0" marL="0">
+              <a:buNone/>
+            </a:pPr>
+            <a:r>
+              <a:rPr lang="en-US" sz="1300" b="1" dirty="0">
                 <a:solidFill>
                   <a:schemeClr val="bg1"/>
                 </a:solidFill>
               </a:rPr>
-              <a:t>Quotes, policies and email</a:t>
-            </a:r>
-            <a:endParaRPr lang="en-US" sz="4000" dirty="0"/>
-          </a:p>
-        </p:txBody>
-      </p:sp>
-      <p:sp>
-        <p:nvSpPr>
-          <p:cNvPr id="4" name="Text 0"/>
-          <p:cNvSpPr/>
-          <p:nvPr>
-            <p:ph idx="102" type="body" hasCustomPrompt="1"/>
-          </p:nvPr>
-        </p:nvSpPr>
-        <p:spPr>
-          <a:xfrm>
-            <a:off x="731520" y="3794760"/>
-            <a:ext cx="8686800" cy="1097280"/>
+              <a:t>3</a:t>
+            </a:r>
+            <a:endParaRPr lang="en-US" sz="1300" dirty="0"/>
+          </a:p>
+        </p:txBody>
+      </p:sp>
+      <p:sp>
+        <p:nvSpPr>
+          <p:cNvPr id="13" name="Step 3 text"/>
+          <p:cNvSpPr txBox="1"/>
+          <p:nvPr/>
+        </p:nvSpPr>
+        <p:spPr>
+          <a:xfrm>
+            <a:off x="8979408" y="3566160"/>
+            <a:ext cx="2770632" cy="1115568"/>
           </a:xfrm>
           <a:prstGeom prst="rect">
             <a:avLst/>
@@ -7123,18 +7656,18 @@
           <a:bodyPr wrap="square" lIns="0" tIns="0" rIns="0" bIns="0" rtlCol="0" anchor="t"/>
           <a:lstStyle/>
           <a:p>
-            <a:pPr algn="l" indent="0" marL="0">
-              <a:buNone/>
-            </a:pPr>
-            <a:r>
-              <a:rPr lang="en-US" sz="2000" dirty="0">
-                <a:solidFill>
-                  <a:schemeClr val="bg1"/>
-                </a:solidFill>
-              </a:rPr>
-              <a:t>From quote to bound policy, and making sure our emails arrive.</a:t>
-            </a:r>
-            <a:endParaRPr lang="en-US" sz="2000" dirty="0"/>
+            <a:pPr indent="0" marL="0">
+              <a:buNone/>
+            </a:pPr>
+            <a:r>
+              <a:rPr lang="en-US" sz="1350" dirty="0">
+                <a:solidFill>
+                  <a:schemeClr val="tx1"/>
+                </a:solidFill>
+              </a:rPr>
+              <a:t>Copy, then click the first cell in V13 and paste.</a:t>
+            </a:r>
+            <a:endParaRPr lang="en-US" sz="1350" dirty="0"/>
           </a:p>
         </p:txBody>
       </p:sp>
@@ -7150,7 +7683,7 @@
         </p:nvSpPr>
         <p:spPr>
           <a:xfrm>
-            <a:off x="11155680" y="6263640"/>
+            <a:off x="11201400" y="6446520"/>
             <a:ext cx="548640" cy="274320"/>
           </a:xfrm>
           <a:prstGeom prst="rect">
@@ -7168,7 +7701,7 @@
             <a:lvl1pPr>
               <a:defRPr sz="1000">
                 <a:solidFill>
-                  <a:srgbClr val="FFFFFF"/>
+                  <a:srgbClr val="6B6E72"/>
                 </a:solidFill>
               </a:defRPr>
             </a:lvl1pPr>
@@ -7210,7 +7743,43 @@
       </p:grpSpPr>
       <p:sp>
         <p:nvSpPr>
-          <p:cNvPr id="2" name="Text 0"/>
+          <p:cNvPr id="2" name="Section number"/>
+          <p:cNvSpPr txBox="1"/>
+          <p:nvPr/>
+        </p:nvSpPr>
+        <p:spPr>
+          <a:xfrm>
+            <a:off x="731520" y="1463040"/>
+            <a:ext cx="1828800" cy="1097280"/>
+          </a:xfrm>
+          <a:prstGeom prst="rect">
+            <a:avLst/>
+          </a:prstGeom>
+          <a:noFill/>
+          <a:ln/>
+        </p:spPr>
+        <p:txBody>
+          <a:bodyPr wrap="square" lIns="0" tIns="0" rIns="0" bIns="0" rtlCol="0" anchor="ctr"/>
+          <a:lstStyle/>
+          <a:p>
+            <a:pPr indent="0" marL="0">
+              <a:buNone/>
+            </a:pPr>
+            <a:r>
+              <a:rPr lang="en-US" sz="6600" b="1" dirty="0">
+                <a:solidFill>
+                  <a:schemeClr val="accent2"/>
+                </a:solidFill>
+              </a:rPr>
+              <a:t>04</a:t>
+            </a:r>
+            <a:endParaRPr lang="en-US" sz="6600" dirty="0"/>
+          </a:p>
+        </p:txBody>
+      </p:sp>
+      <p:sp>
+        <p:nvSpPr>
+          <p:cNvPr id="3" name="Text 0"/>
           <p:cNvSpPr/>
           <p:nvPr>
             <p:ph idx="101" type="title" hasCustomPrompt="1"/>
@@ -7218,281 +7787,69 @@
         </p:nvSpPr>
         <p:spPr>
           <a:xfrm>
-            <a:off x="457200" y="274320"/>
-            <a:ext cx="10058400" cy="685800"/>
-          </a:xfrm>
-          <a:prstGeom prst="rect">
-            <a:avLst/>
-          </a:prstGeom>
-          <a:noFill/>
-          <a:ln/>
-        </p:spPr>
-        <p:txBody>
-          <a:bodyPr wrap="square" lIns="0" tIns="0" rIns="0" bIns="0" rtlCol="0" anchor="ctr"/>
+            <a:off x="731520" y="2743200"/>
+            <a:ext cx="10058400" cy="1005840"/>
+          </a:xfrm>
+          <a:prstGeom prst="rect">
+            <a:avLst/>
+          </a:prstGeom>
+          <a:noFill/>
+          <a:ln/>
+        </p:spPr>
+        <p:txBody>
+          <a:bodyPr wrap="square" lIns="0" tIns="0" rIns="0" bIns="0" rtlCol="0" anchor="t"/>
           <a:lstStyle/>
           <a:p>
             <a:pPr algn="l" indent="0" marL="0">
               <a:buNone/>
             </a:pPr>
             <a:r>
-              <a:rPr lang="en-US" sz="2800" b="1" dirty="0">
-                <a:solidFill>
-                  <a:schemeClr val="tx2"/>
-                </a:solidFill>
-              </a:rPr>
-              <a:t>A bind instruction</a:t>
-            </a:r>
-            <a:endParaRPr lang="en-US" sz="2800" dirty="0"/>
-          </a:p>
-        </p:txBody>
-      </p:sp>
-      <p:sp>
-        <p:nvSpPr>
-          <p:cNvPr id="3" name="Screenshot frame"/>
+              <a:rPr lang="en-US" sz="4000" b="1" dirty="0">
+                <a:solidFill>
+                  <a:schemeClr val="bg1"/>
+                </a:solidFill>
+              </a:rPr>
+              <a:t>Enquiries and brokers</a:t>
+            </a:r>
+            <a:endParaRPr lang="en-US" sz="4000" dirty="0"/>
+          </a:p>
+        </p:txBody>
+      </p:sp>
+      <p:sp>
+        <p:nvSpPr>
+          <p:cNvPr id="4" name="Text 0"/>
           <p:cNvSpPr/>
-          <p:nvPr/>
-        </p:nvSpPr>
-        <p:spPr>
-          <a:xfrm>
-            <a:off x="402336" y="1133856"/>
-            <a:ext cx="7790688" cy="4910328"/>
-          </a:xfrm>
-          <a:prstGeom prst="rect">
-            <a:avLst/>
-          </a:prstGeom>
-          <a:solidFill>
-            <a:schemeClr val="bg1"/>
-          </a:solidFill>
-          <a:ln w="12700">
-            <a:solidFill>
-              <a:srgbClr val="D5DFDD"/>
-            </a:solidFill>
-            <a:prstDash val="solid"/>
-          </a:ln>
-          <a:effectLst>
-            <a:outerShdw sx="100000" sy="100000" kx="0" ky="0" algn="bl" rotWithShape="0" blurRad="76200" dist="25400" dir="5400000">
-              <a:srgbClr val="000000">
-                <a:alpha val="12000"/>
-              </a:srgbClr>
-            </a:outerShdw>
-          </a:effectLst>
-        </p:spPr>
-      </p:sp>
-      <p:pic>
-        <p:nvPicPr>
-          <p:cNvPr id="4" name="Screenshot" descr="A bind instruction: screenshot with numbered callouts">    </p:cNvPr>
-          <p:cNvPicPr>
-            <a:picLocks noChangeAspect="1"/>
-          </p:cNvPicPr>
-          <p:nvPr/>
-        </p:nvPicPr>
-        <p:blipFill>
-          <a:blip r:embed="rId1"/>
-          <a:stretch>
-            <a:fillRect/>
-          </a:stretch>
-        </p:blipFill>
-        <p:spPr>
-          <a:xfrm>
-            <a:off x="457200" y="1188720"/>
-            <a:ext cx="7680960" cy="4800600"/>
-          </a:xfrm>
-          <a:prstGeom prst="rect">
-            <a:avLst/>
-          </a:prstGeom>
-        </p:spPr>
-      </p:pic>
-      <p:sp>
-        <p:nvSpPr>
-          <p:cNvPr id="5" name="Step 1 marker"/>
-          <p:cNvSpPr/>
-          <p:nvPr/>
-        </p:nvSpPr>
-        <p:spPr>
-          <a:xfrm>
-            <a:off x="8503920" y="1207008"/>
-            <a:ext cx="347472" cy="347472"/>
-          </a:xfrm>
-          <a:prstGeom prst="ellipse">
-            <a:avLst/>
-          </a:prstGeom>
-          <a:solidFill>
-            <a:schemeClr val="accent3"/>
-          </a:solidFill>
-          <a:ln w="12700">
-            <a:solidFill>
-              <a:schemeClr val="accent3"/>
-            </a:solidFill>
-            <a:prstDash val="solid"/>
-          </a:ln>
-        </p:spPr>
-      </p:sp>
-      <p:sp>
-        <p:nvSpPr>
-          <p:cNvPr id="6" name="Step 1 number"/>
-          <p:cNvSpPr txBox="1"/>
-          <p:nvPr/>
-        </p:nvSpPr>
-        <p:spPr>
-          <a:xfrm>
-            <a:off x="8503920" y="1207008"/>
-            <a:ext cx="347472" cy="347472"/>
-          </a:xfrm>
-          <a:prstGeom prst="rect">
-            <a:avLst/>
-          </a:prstGeom>
-          <a:noFill/>
-          <a:ln/>
-        </p:spPr>
-        <p:txBody>
-          <a:bodyPr wrap="square" lIns="0" tIns="0" rIns="0" bIns="0" rtlCol="0" anchor="ctr"/>
-          <a:lstStyle/>
-          <a:p>
-            <a:pPr algn="ctr" indent="0" marL="0">
-              <a:buNone/>
-            </a:pPr>
-            <a:r>
-              <a:rPr lang="en-US" sz="1300" b="1" dirty="0">
+          <p:nvPr>
+            <p:ph idx="102" type="body" hasCustomPrompt="1"/>
+          </p:nvPr>
+        </p:nvSpPr>
+        <p:spPr>
+          <a:xfrm>
+            <a:off x="731520" y="3794760"/>
+            <a:ext cx="8686800" cy="1097280"/>
+          </a:xfrm>
+          <a:prstGeom prst="rect">
+            <a:avLst/>
+          </a:prstGeom>
+          <a:noFill/>
+          <a:ln/>
+        </p:spPr>
+        <p:txBody>
+          <a:bodyPr wrap="square" lIns="0" tIns="0" rIns="0" bIns="0" rtlCol="0" anchor="t"/>
+          <a:lstStyle/>
+          <a:p>
+            <a:pPr algn="l" indent="0" marL="0">
+              <a:buNone/>
+            </a:pPr>
+            <a:r>
+              <a:rPr lang="en-US" sz="2000" dirty="0">
                 <a:solidFill>
                   <a:schemeClr val="bg1"/>
                 </a:solidFill>
               </a:rPr>
-              <a:t>1</a:t>
-            </a:r>
-            <a:endParaRPr lang="en-US" sz="1300" dirty="0"/>
-          </a:p>
-        </p:txBody>
-      </p:sp>
-      <p:sp>
-        <p:nvSpPr>
-          <p:cNvPr id="7" name="Step 1 text"/>
-          <p:cNvSpPr txBox="1"/>
-          <p:nvPr/>
-        </p:nvSpPr>
-        <p:spPr>
-          <a:xfrm>
-            <a:off x="8979408" y="1188720"/>
-            <a:ext cx="2770632" cy="1115568"/>
-          </a:xfrm>
-          <a:prstGeom prst="rect">
-            <a:avLst/>
-          </a:prstGeom>
-          <a:noFill/>
-          <a:ln/>
-        </p:spPr>
-        <p:txBody>
-          <a:bodyPr wrap="square" lIns="0" tIns="0" rIns="0" bIns="0" rtlCol="0" anchor="t"/>
-          <a:lstStyle/>
-          <a:p>
-            <a:pPr indent="0" marL="0">
-              <a:buNone/>
-            </a:pPr>
-            <a:r>
-              <a:rPr lang="en-US" sz="1350" dirty="0">
-                <a:solidFill>
-                  <a:schemeClr val="tx1"/>
-                </a:solidFill>
-              </a:rPr>
-              <a:t>The broker's instruction to bind, with the inception date and any notes.</a:t>
-            </a:r>
-            <a:endParaRPr lang="en-US" sz="1350" dirty="0"/>
-          </a:p>
-        </p:txBody>
-      </p:sp>
-      <p:sp>
-        <p:nvSpPr>
-          <p:cNvPr id="8" name="Step 2 marker"/>
-          <p:cNvSpPr/>
-          <p:nvPr/>
-        </p:nvSpPr>
-        <p:spPr>
-          <a:xfrm>
-            <a:off x="8503920" y="2395728"/>
-            <a:ext cx="347472" cy="347472"/>
-          </a:xfrm>
-          <a:prstGeom prst="ellipse">
-            <a:avLst/>
-          </a:prstGeom>
-          <a:solidFill>
-            <a:schemeClr val="accent3"/>
-          </a:solidFill>
-          <a:ln w="12700">
-            <a:solidFill>
-              <a:schemeClr val="accent3"/>
-            </a:solidFill>
-            <a:prstDash val="solid"/>
-          </a:ln>
-        </p:spPr>
-      </p:sp>
-      <p:sp>
-        <p:nvSpPr>
-          <p:cNvPr id="9" name="Step 2 number"/>
-          <p:cNvSpPr txBox="1"/>
-          <p:nvPr/>
-        </p:nvSpPr>
-        <p:spPr>
-          <a:xfrm>
-            <a:off x="8503920" y="2395728"/>
-            <a:ext cx="347472" cy="347472"/>
-          </a:xfrm>
-          <a:prstGeom prst="rect">
-            <a:avLst/>
-          </a:prstGeom>
-          <a:noFill/>
-          <a:ln/>
-        </p:spPr>
-        <p:txBody>
-          <a:bodyPr wrap="square" lIns="0" tIns="0" rIns="0" bIns="0" rtlCol="0" anchor="ctr"/>
-          <a:lstStyle/>
-          <a:p>
-            <a:pPr algn="ctr" indent="0" marL="0">
-              <a:buNone/>
-            </a:pPr>
-            <a:r>
-              <a:rPr lang="en-US" sz="1300" b="1" dirty="0">
-                <a:solidFill>
-                  <a:schemeClr val="bg1"/>
-                </a:solidFill>
-              </a:rPr>
-              <a:t>2</a:t>
-            </a:r>
-            <a:endParaRPr lang="en-US" sz="1300" dirty="0"/>
-          </a:p>
-        </p:txBody>
-      </p:sp>
-      <p:sp>
-        <p:nvSpPr>
-          <p:cNvPr id="10" name="Step 2 text"/>
-          <p:cNvSpPr txBox="1"/>
-          <p:nvPr/>
-        </p:nvSpPr>
-        <p:spPr>
-          <a:xfrm>
-            <a:off x="8979408" y="2377440"/>
-            <a:ext cx="2770632" cy="1115568"/>
-          </a:xfrm>
-          <a:prstGeom prst="rect">
-            <a:avLst/>
-          </a:prstGeom>
-          <a:noFill/>
-          <a:ln/>
-        </p:spPr>
-        <p:txBody>
-          <a:bodyPr wrap="square" lIns="0" tIns="0" rIns="0" bIns="0" rtlCol="0" anchor="t"/>
-          <a:lstStyle/>
-          <a:p>
-            <a:pPr indent="0" marL="0">
-              <a:buNone/>
-            </a:pPr>
-            <a:r>
-              <a:rPr lang="en-US" sz="1350" dirty="0">
-                <a:solidFill>
-                  <a:schemeClr val="tx1"/>
-                </a:solidFill>
-              </a:rPr>
-              <a:t>The original request details.</a:t>
-            </a:r>
-            <a:endParaRPr lang="en-US" sz="1350" dirty="0"/>
+              <a:t>Website enquiries, new broker sign ups and the brokerages we work with.</a:t>
+            </a:r>
+            <a:endParaRPr lang="en-US" sz="2000" dirty="0"/>
           </a:p>
         </p:txBody>
       </p:sp>
@@ -7508,7 +7865,7 @@
         </p:nvSpPr>
         <p:spPr>
           <a:xfrm>
-            <a:off x="11201400" y="6446520"/>
+            <a:off x="11155680" y="6263640"/>
             <a:ext cx="548640" cy="274320"/>
           </a:xfrm>
           <a:prstGeom prst="rect">
@@ -7526,7 +7883,7 @@
             <a:lvl1pPr>
               <a:defRPr sz="1000">
                 <a:solidFill>
-                  <a:srgbClr val="6B6E72"/>
+                  <a:srgbClr val="FFFFFF"/>
                 </a:solidFill>
               </a:defRPr>
             </a:lvl1pPr>
@@ -7613,7 +7970,7 @@
         <p:spPr>
           <a:xfrm>
             <a:off x="457200" y="1280160"/>
-            <a:ext cx="5486400" cy="2331720"/>
+            <a:ext cx="3566160" cy="2331720"/>
           </a:xfrm>
           <a:prstGeom prst="roundRect">
             <a:avLst>
@@ -7701,7 +8058,7 @@
         <p:spPr>
           <a:xfrm>
             <a:off x="1463040" y="1554480"/>
-            <a:ext cx="4206240" cy="594360"/>
+            <a:ext cx="2286000" cy="594360"/>
           </a:xfrm>
           <a:prstGeom prst="rect">
             <a:avLst/>
@@ -7737,7 +8094,7 @@
         <p:spPr>
           <a:xfrm>
             <a:off x="1463040" y="2194560"/>
-            <a:ext cx="4206240" cy="1188720"/>
+            <a:ext cx="2286000" cy="1188720"/>
           </a:xfrm>
           <a:prstGeom prst="rect">
             <a:avLst/>
@@ -7772,8 +8129,8 @@
         </p:nvSpPr>
         <p:spPr>
           <a:xfrm>
-            <a:off x="6217920" y="1280160"/>
-            <a:ext cx="5486400" cy="2331720"/>
+            <a:off x="4297680" y="1280160"/>
+            <a:ext cx="3566160" cy="2331720"/>
           </a:xfrm>
           <a:prstGeom prst="roundRect">
             <a:avLst>
@@ -7799,7 +8156,7 @@
         </p:nvSpPr>
         <p:spPr>
           <a:xfrm>
-            <a:off x="6537960" y="1600200"/>
+            <a:off x="4617720" y="1600200"/>
             <a:ext cx="502920" cy="502920"/>
           </a:xfrm>
           <a:prstGeom prst="ellipse">
@@ -7824,7 +8181,7 @@
         </p:nvSpPr>
         <p:spPr>
           <a:xfrm>
-            <a:off x="6537960" y="1600200"/>
+            <a:off x="4617720" y="1600200"/>
             <a:ext cx="502920" cy="502920"/>
           </a:xfrm>
           <a:prstGeom prst="rect">
@@ -7860,8 +8217,8 @@
         </p:nvSpPr>
         <p:spPr>
           <a:xfrm>
-            <a:off x="7223760" y="1554480"/>
-            <a:ext cx="4206240" cy="594360"/>
+            <a:off x="5303520" y="1554480"/>
+            <a:ext cx="2286000" cy="594360"/>
           </a:xfrm>
           <a:prstGeom prst="rect">
             <a:avLst/>
@@ -7882,7 +8239,7 @@
                   <a:schemeClr val="tx2"/>
                 </a:solidFill>
               </a:rPr>
-              <a:t>Applications and underwriting</a:t>
+              <a:t>Reporting</a:t>
             </a:r>
             <a:endParaRPr lang="en-US" sz="1900" dirty="0"/>
           </a:p>
@@ -7896,8 +8253,8 @@
         </p:nvSpPr>
         <p:spPr>
           <a:xfrm>
-            <a:off x="7223760" y="2194560"/>
-            <a:ext cx="4206240" cy="1188720"/>
+            <a:off x="5303520" y="2194560"/>
+            <a:ext cx="2286000" cy="1188720"/>
           </a:xfrm>
           <a:prstGeom prst="rect">
             <a:avLst/>
@@ -7918,7 +8275,7 @@
                   <a:schemeClr val="tx1"/>
                 </a:solidFill>
               </a:rPr>
-              <a:t>Reading an application with the underwriting assistant and filling the V13 worksheet.</a:t>
+              <a:t>Premium in force by product, quote conversion and renewal retention.</a:t>
             </a:r>
             <a:endParaRPr lang="en-US" sz="1500" dirty="0"/>
           </a:p>
@@ -7932,8 +8289,8 @@
         </p:nvSpPr>
         <p:spPr>
           <a:xfrm>
-            <a:off x="457200" y="3886200"/>
-            <a:ext cx="5486400" cy="2331720"/>
+            <a:off x="8138160" y="1280160"/>
+            <a:ext cx="3566160" cy="2331720"/>
           </a:xfrm>
           <a:prstGeom prst="roundRect">
             <a:avLst>
@@ -7959,7 +8316,7 @@
         </p:nvSpPr>
         <p:spPr>
           <a:xfrm>
-            <a:off x="777240" y="4206240"/>
+            <a:off x="8458200" y="1600200"/>
             <a:ext cx="502920" cy="502920"/>
           </a:xfrm>
           <a:prstGeom prst="ellipse">
@@ -7984,7 +8341,7 @@
         </p:nvSpPr>
         <p:spPr>
           <a:xfrm>
-            <a:off x="777240" y="4206240"/>
+            <a:off x="8458200" y="1600200"/>
             <a:ext cx="502920" cy="502920"/>
           </a:xfrm>
           <a:prstGeom prst="rect">
@@ -8020,8 +8377,8 @@
         </p:nvSpPr>
         <p:spPr>
           <a:xfrm>
-            <a:off x="1463040" y="4160520"/>
-            <a:ext cx="4206240" cy="594360"/>
+            <a:off x="9144000" y="1554480"/>
+            <a:ext cx="2286000" cy="594360"/>
           </a:xfrm>
           <a:prstGeom prst="rect">
             <a:avLst/>
@@ -8042,7 +8399,7 @@
                   <a:schemeClr val="tx2"/>
                 </a:solidFill>
               </a:rPr>
-              <a:t>Enquiries and brokers</a:t>
+              <a:t>Applications and underwriting</a:t>
             </a:r>
             <a:endParaRPr lang="en-US" sz="1900" dirty="0"/>
           </a:p>
@@ -8056,8 +8413,8 @@
         </p:nvSpPr>
         <p:spPr>
           <a:xfrm>
-            <a:off x="1463040" y="4800600"/>
-            <a:ext cx="4206240" cy="1188720"/>
+            <a:off x="9144000" y="2194560"/>
+            <a:ext cx="2286000" cy="1188720"/>
           </a:xfrm>
           <a:prstGeom prst="rect">
             <a:avLst/>
@@ -8078,7 +8435,7 @@
                   <a:schemeClr val="tx1"/>
                 </a:solidFill>
               </a:rPr>
-              <a:t>Website enquiries, approving portal access and managing brokers.</a:t>
+              <a:t>Reading an application with the underwriting assistant and filling the V13 worksheet.</a:t>
             </a:r>
             <a:endParaRPr lang="en-US" sz="1500" dirty="0"/>
           </a:p>
@@ -8092,8 +8449,8 @@
         </p:nvSpPr>
         <p:spPr>
           <a:xfrm>
-            <a:off x="6217920" y="3886200"/>
-            <a:ext cx="5486400" cy="2331720"/>
+            <a:off x="457200" y="3886200"/>
+            <a:ext cx="3566160" cy="2331720"/>
           </a:xfrm>
           <a:prstGeom prst="roundRect">
             <a:avLst>
@@ -8119,7 +8476,7 @@
         </p:nvSpPr>
         <p:spPr>
           <a:xfrm>
-            <a:off x="6537960" y="4206240"/>
+            <a:off x="777240" y="4206240"/>
             <a:ext cx="502920" cy="502920"/>
           </a:xfrm>
           <a:prstGeom prst="ellipse">
@@ -8144,7 +8501,7 @@
         </p:nvSpPr>
         <p:spPr>
           <a:xfrm>
-            <a:off x="6537960" y="4206240"/>
+            <a:off x="777240" y="4206240"/>
             <a:ext cx="502920" cy="502920"/>
           </a:xfrm>
           <a:prstGeom prst="rect">
@@ -8180,8 +8537,8 @@
         </p:nvSpPr>
         <p:spPr>
           <a:xfrm>
-            <a:off x="7223760" y="4160520"/>
-            <a:ext cx="4206240" cy="594360"/>
+            <a:off x="1463040" y="4160520"/>
+            <a:ext cx="2286000" cy="594360"/>
           </a:xfrm>
           <a:prstGeom prst="rect">
             <a:avLst/>
@@ -8202,7 +8559,7 @@
                   <a:schemeClr val="tx2"/>
                 </a:solidFill>
               </a:rPr>
-              <a:t>Quotes, policies and email</a:t>
+              <a:t>Enquiries and brokers</a:t>
             </a:r>
             <a:endParaRPr lang="en-US" sz="1900" dirty="0"/>
           </a:p>
@@ -8216,8 +8573,168 @@
         </p:nvSpPr>
         <p:spPr>
           <a:xfrm>
-            <a:off x="7223760" y="4800600"/>
-            <a:ext cx="4206240" cy="1188720"/>
+            <a:off x="1463040" y="4800600"/>
+            <a:ext cx="2286000" cy="1188720"/>
+          </a:xfrm>
+          <a:prstGeom prst="rect">
+            <a:avLst/>
+          </a:prstGeom>
+          <a:noFill/>
+          <a:ln/>
+        </p:spPr>
+        <p:txBody>
+          <a:bodyPr wrap="square" lIns="0" tIns="0" rIns="0" bIns="0" rtlCol="0" anchor="t"/>
+          <a:lstStyle/>
+          <a:p>
+            <a:pPr indent="0" marL="0">
+              <a:buNone/>
+            </a:pPr>
+            <a:r>
+              <a:rPr lang="en-US" sz="1500" dirty="0">
+                <a:solidFill>
+                  <a:schemeClr val="tx1"/>
+                </a:solidFill>
+              </a:rPr>
+              <a:t>Website enquiries, approving portal access and managing brokers.</a:t>
+            </a:r>
+            <a:endParaRPr lang="en-US" sz="1500" dirty="0"/>
+          </a:p>
+        </p:txBody>
+      </p:sp>
+      <p:sp>
+        <p:nvSpPr>
+          <p:cNvPr id="23" name="Card 5"/>
+          <p:cNvSpPr/>
+          <p:nvPr/>
+        </p:nvSpPr>
+        <p:spPr>
+          <a:xfrm>
+            <a:off x="4297680" y="3886200"/>
+            <a:ext cx="3566160" cy="2331720"/>
+          </a:xfrm>
+          <a:prstGeom prst="roundRect">
+            <a:avLst>
+              <a:gd name="adj" fmla="val 3137"/>
+            </a:avLst>
+          </a:prstGeom>
+          <a:solidFill>
+            <a:schemeClr val="bg1"/>
+          </a:solidFill>
+          <a:ln w="12700">
+            <a:solidFill>
+              <a:srgbClr val="DDE7E5"/>
+            </a:solidFill>
+            <a:prstDash val="solid"/>
+          </a:ln>
+        </p:spPr>
+      </p:sp>
+      <p:sp>
+        <p:nvSpPr>
+          <p:cNvPr id="24" name="Card 5 marker"/>
+          <p:cNvSpPr/>
+          <p:nvPr/>
+        </p:nvSpPr>
+        <p:spPr>
+          <a:xfrm>
+            <a:off x="4617720" y="4206240"/>
+            <a:ext cx="502920" cy="502920"/>
+          </a:xfrm>
+          <a:prstGeom prst="ellipse">
+            <a:avLst/>
+          </a:prstGeom>
+          <a:solidFill>
+            <a:schemeClr val="accent1"/>
+          </a:solidFill>
+          <a:ln w="12700">
+            <a:solidFill>
+              <a:schemeClr val="accent1"/>
+            </a:solidFill>
+            <a:prstDash val="solid"/>
+          </a:ln>
+        </p:spPr>
+      </p:sp>
+      <p:sp>
+        <p:nvSpPr>
+          <p:cNvPr id="25" name="Card 5 number"/>
+          <p:cNvSpPr txBox="1"/>
+          <p:nvPr/>
+        </p:nvSpPr>
+        <p:spPr>
+          <a:xfrm>
+            <a:off x="4617720" y="4206240"/>
+            <a:ext cx="502920" cy="502920"/>
+          </a:xfrm>
+          <a:prstGeom prst="rect">
+            <a:avLst/>
+          </a:prstGeom>
+          <a:noFill/>
+          <a:ln/>
+        </p:spPr>
+        <p:txBody>
+          <a:bodyPr wrap="square" lIns="0" tIns="0" rIns="0" bIns="0" rtlCol="0" anchor="ctr"/>
+          <a:lstStyle/>
+          <a:p>
+            <a:pPr algn="ctr" indent="0" marL="0">
+              <a:buNone/>
+            </a:pPr>
+            <a:r>
+              <a:rPr lang="en-US" sz="1800" b="1" dirty="0">
+                <a:solidFill>
+                  <a:schemeClr val="bg1"/>
+                </a:solidFill>
+              </a:rPr>
+              <a:t>5</a:t>
+            </a:r>
+            <a:endParaRPr lang="en-US" sz="1800" dirty="0"/>
+          </a:p>
+        </p:txBody>
+      </p:sp>
+      <p:sp>
+        <p:nvSpPr>
+          <p:cNvPr id="26" name="Card 5 heading"/>
+          <p:cNvSpPr txBox="1"/>
+          <p:nvPr/>
+        </p:nvSpPr>
+        <p:spPr>
+          <a:xfrm>
+            <a:off x="5303520" y="4160520"/>
+            <a:ext cx="2286000" cy="594360"/>
+          </a:xfrm>
+          <a:prstGeom prst="rect">
+            <a:avLst/>
+          </a:prstGeom>
+          <a:noFill/>
+          <a:ln/>
+        </p:spPr>
+        <p:txBody>
+          <a:bodyPr wrap="square" lIns="0" tIns="0" rIns="0" bIns="0" rtlCol="0" anchor="ctr"/>
+          <a:lstStyle/>
+          <a:p>
+            <a:pPr indent="0" marL="0">
+              <a:buNone/>
+            </a:pPr>
+            <a:r>
+              <a:rPr lang="en-US" sz="1900" b="1" dirty="0">
+                <a:solidFill>
+                  <a:schemeClr val="tx2"/>
+                </a:solidFill>
+              </a:rPr>
+              <a:t>Quotes, policies and email</a:t>
+            </a:r>
+            <a:endParaRPr lang="en-US" sz="1900" dirty="0"/>
+          </a:p>
+        </p:txBody>
+      </p:sp>
+      <p:sp>
+        <p:nvSpPr>
+          <p:cNvPr id="27" name="Card 5 text"/>
+          <p:cNvSpPr txBox="1"/>
+          <p:nvPr/>
+        </p:nvSpPr>
+        <p:spPr>
+          <a:xfrm>
+            <a:off x="5303520" y="4800600"/>
+            <a:ext cx="2286000" cy="1188720"/>
           </a:xfrm>
           <a:prstGeom prst="rect">
             <a:avLst/>
@@ -8346,7 +8863,7 @@
                   <a:schemeClr val="tx2"/>
                 </a:solidFill>
               </a:rPr>
-              <a:t>Policies</a:t>
+              <a:t>Website enquiries</a:t>
             </a:r>
             <a:endParaRPr lang="en-US" sz="2800" dirty="0"/>
           </a:p>
@@ -8386,7 +8903,7 @@
       </p:sp>
       <p:pic>
         <p:nvPicPr>
-          <p:cNvPr id="4" name="Screenshot" descr="Policies: screenshot with numbered callouts">    </p:cNvPr>
+          <p:cNvPr id="4" name="Screenshot" descr="Website enquiries: screenshot with numbered callouts">    </p:cNvPr>
           <p:cNvPicPr>
             <a:picLocks noChangeAspect="1"/>
           </p:cNvPicPr>
@@ -8499,7 +9016,7 @@
                   <a:schemeClr val="tx1"/>
                 </a:solidFill>
               </a:rPr>
-              <a:t>Search by insured, policy number, broker or InsuredHQ reference.</a:t>
+              <a:t>Each enquiry from the Contact Us page, with the message and contact details.</a:t>
             </a:r>
             <a:endParaRPr lang="en-US" sz="1350" dirty="0"/>
           </a:p>
@@ -8596,104 +9113,7 @@
                   <a:schemeClr val="tx1"/>
                 </a:solidFill>
               </a:rPr>
-              <a:t>Filter by product.</a:t>
-            </a:r>
-            <a:endParaRPr lang="en-US" sz="1350" dirty="0"/>
-          </a:p>
-        </p:txBody>
-      </p:sp>
-      <p:sp>
-        <p:nvSpPr>
-          <p:cNvPr id="11" name="Step 3 marker"/>
-          <p:cNvSpPr/>
-          <p:nvPr/>
-        </p:nvSpPr>
-        <p:spPr>
-          <a:xfrm>
-            <a:off x="8503920" y="3584448"/>
-            <a:ext cx="347472" cy="347472"/>
-          </a:xfrm>
-          <a:prstGeom prst="ellipse">
-            <a:avLst/>
-          </a:prstGeom>
-          <a:solidFill>
-            <a:schemeClr val="accent3"/>
-          </a:solidFill>
-          <a:ln w="12700">
-            <a:solidFill>
-              <a:schemeClr val="accent3"/>
-            </a:solidFill>
-            <a:prstDash val="solid"/>
-          </a:ln>
-        </p:spPr>
-      </p:sp>
-      <p:sp>
-        <p:nvSpPr>
-          <p:cNvPr id="12" name="Step 3 number"/>
-          <p:cNvSpPr txBox="1"/>
-          <p:nvPr/>
-        </p:nvSpPr>
-        <p:spPr>
-          <a:xfrm>
-            <a:off x="8503920" y="3584448"/>
-            <a:ext cx="347472" cy="347472"/>
-          </a:xfrm>
-          <a:prstGeom prst="rect">
-            <a:avLst/>
-          </a:prstGeom>
-          <a:noFill/>
-          <a:ln/>
-        </p:spPr>
-        <p:txBody>
-          <a:bodyPr wrap="square" lIns="0" tIns="0" rIns="0" bIns="0" rtlCol="0" anchor="ctr"/>
-          <a:lstStyle/>
-          <a:p>
-            <a:pPr algn="ctr" indent="0" marL="0">
-              <a:buNone/>
-            </a:pPr>
-            <a:r>
-              <a:rPr lang="en-US" sz="1300" b="1" dirty="0">
-                <a:solidFill>
-                  <a:schemeClr val="bg1"/>
-                </a:solidFill>
-              </a:rPr>
-              <a:t>3</a:t>
-            </a:r>
-            <a:endParaRPr lang="en-US" sz="1300" dirty="0"/>
-          </a:p>
-        </p:txBody>
-      </p:sp>
-      <p:sp>
-        <p:nvSpPr>
-          <p:cNvPr id="13" name="Step 3 text"/>
-          <p:cNvSpPr txBox="1"/>
-          <p:nvPr/>
-        </p:nvSpPr>
-        <p:spPr>
-          <a:xfrm>
-            <a:off x="8979408" y="3566160"/>
-            <a:ext cx="2770632" cy="1115568"/>
-          </a:xfrm>
-          <a:prstGeom prst="rect">
-            <a:avLst/>
-          </a:prstGeom>
-          <a:noFill/>
-          <a:ln/>
-        </p:spPr>
-        <p:txBody>
-          <a:bodyPr wrap="square" lIns="0" tIns="0" rIns="0" bIns="0" rtlCol="0" anchor="t"/>
-          <a:lstStyle/>
-          <a:p>
-            <a:pPr indent="0" marL="0">
-              <a:buNone/>
-            </a:pPr>
-            <a:r>
-              <a:rPr lang="en-US" sz="1350" dirty="0">
-                <a:solidFill>
-                  <a:schemeClr val="tx1"/>
-                </a:solidFill>
-              </a:rPr>
-              <a:t>Select a policy to see its details.</a:t>
+              <a:t>Mark handled once you've replied.</a:t>
             </a:r>
             <a:endParaRPr lang="en-US" sz="1350" dirty="0"/>
           </a:p>
@@ -8801,7 +9221,7 @@
                   <a:schemeClr val="tx2"/>
                 </a:solidFill>
               </a:rPr>
-              <a:t>Email check</a:t>
+              <a:t>Approving broker portal access</a:t>
             </a:r>
             <a:endParaRPr lang="en-US" sz="2800" dirty="0"/>
           </a:p>
@@ -8841,7 +9261,7 @@
       </p:sp>
       <p:pic>
         <p:nvPicPr>
-          <p:cNvPr id="4" name="Screenshot" descr="Email check: screenshot with numbered callouts">    </p:cNvPr>
+          <p:cNvPr id="4" name="Screenshot" descr="Approving broker portal access: screenshot with numbered callouts">    </p:cNvPr>
           <p:cNvPicPr>
             <a:picLocks noChangeAspect="1"/>
           </p:cNvPicPr>
@@ -8954,7 +9374,7 @@
                   <a:schemeClr val="tx1"/>
                 </a:solidFill>
               </a:rPr>
-              <a:t>Set up: whether email sending is switched on.</a:t>
+              <a:t>A broker who has asked to join the portal.</a:t>
             </a:r>
             <a:endParaRPr lang="en-US" sz="1350" dirty="0"/>
           </a:p>
@@ -9051,7 +9471,7 @@
                   <a:schemeClr val="tx1"/>
                 </a:solidFill>
               </a:rPr>
-              <a:t>Send test email to check delivery end to end.</a:t>
+              <a:t>Choose their brokerage, or create a new one.</a:t>
             </a:r>
             <a:endParaRPr lang="en-US" sz="1350" dirty="0"/>
           </a:p>
@@ -9148,7 +9568,104 @@
                   <a:schemeClr val="tx1"/>
                 </a:solidFill>
               </a:rPr>
-              <a:t>The senders that must be verified in Brevo.</a:t>
+              <a:t>Approve and send invite emails them a welcome link to set a password.</a:t>
+            </a:r>
+            <a:endParaRPr lang="en-US" sz="1350" dirty="0"/>
+          </a:p>
+        </p:txBody>
+      </p:sp>
+      <p:sp>
+        <p:nvSpPr>
+          <p:cNvPr id="14" name="Step 4 marker"/>
+          <p:cNvSpPr/>
+          <p:nvPr/>
+        </p:nvSpPr>
+        <p:spPr>
+          <a:xfrm>
+            <a:off x="8503920" y="4773168"/>
+            <a:ext cx="347472" cy="347472"/>
+          </a:xfrm>
+          <a:prstGeom prst="ellipse">
+            <a:avLst/>
+          </a:prstGeom>
+          <a:solidFill>
+            <a:schemeClr val="accent3"/>
+          </a:solidFill>
+          <a:ln w="12700">
+            <a:solidFill>
+              <a:schemeClr val="accent3"/>
+            </a:solidFill>
+            <a:prstDash val="solid"/>
+          </a:ln>
+        </p:spPr>
+      </p:sp>
+      <p:sp>
+        <p:nvSpPr>
+          <p:cNvPr id="15" name="Step 4 number"/>
+          <p:cNvSpPr txBox="1"/>
+          <p:nvPr/>
+        </p:nvSpPr>
+        <p:spPr>
+          <a:xfrm>
+            <a:off x="8503920" y="4773168"/>
+            <a:ext cx="347472" cy="347472"/>
+          </a:xfrm>
+          <a:prstGeom prst="rect">
+            <a:avLst/>
+          </a:prstGeom>
+          <a:noFill/>
+          <a:ln/>
+        </p:spPr>
+        <p:txBody>
+          <a:bodyPr wrap="square" lIns="0" tIns="0" rIns="0" bIns="0" rtlCol="0" anchor="ctr"/>
+          <a:lstStyle/>
+          <a:p>
+            <a:pPr algn="ctr" indent="0" marL="0">
+              <a:buNone/>
+            </a:pPr>
+            <a:r>
+              <a:rPr lang="en-US" sz="1300" b="1" dirty="0">
+                <a:solidFill>
+                  <a:schemeClr val="bg1"/>
+                </a:solidFill>
+              </a:rPr>
+              <a:t>4</a:t>
+            </a:r>
+            <a:endParaRPr lang="en-US" sz="1300" dirty="0"/>
+          </a:p>
+        </p:txBody>
+      </p:sp>
+      <p:sp>
+        <p:nvSpPr>
+          <p:cNvPr id="16" name="Step 4 text"/>
+          <p:cNvSpPr txBox="1"/>
+          <p:nvPr/>
+        </p:nvSpPr>
+        <p:spPr>
+          <a:xfrm>
+            <a:off x="8979408" y="4754880"/>
+            <a:ext cx="2770632" cy="1115568"/>
+          </a:xfrm>
+          <a:prstGeom prst="rect">
+            <a:avLst/>
+          </a:prstGeom>
+          <a:noFill/>
+          <a:ln/>
+        </p:spPr>
+        <p:txBody>
+          <a:bodyPr wrap="square" lIns="0" tIns="0" rIns="0" bIns="0" rtlCol="0" anchor="t"/>
+          <a:lstStyle/>
+          <a:p>
+            <a:pPr indent="0" marL="0">
+              <a:buNone/>
+            </a:pPr>
+            <a:r>
+              <a:rPr lang="en-US" sz="1350" dirty="0">
+                <a:solidFill>
+                  <a:schemeClr val="tx1"/>
+                </a:solidFill>
+              </a:rPr>
+              <a:t>Or invite a broker yourself.</a:t>
             </a:r>
             <a:endParaRPr lang="en-US" sz="1350" dirty="0"/>
           </a:p>
@@ -9256,6 +9773,1911 @@
                   <a:schemeClr val="tx2"/>
                 </a:solidFill>
               </a:rPr>
+              <a:t>Brokers</a:t>
+            </a:r>
+            <a:endParaRPr lang="en-US" sz="2800" dirty="0"/>
+          </a:p>
+        </p:txBody>
+      </p:sp>
+      <p:sp>
+        <p:nvSpPr>
+          <p:cNvPr id="3" name="Screenshot frame"/>
+          <p:cNvSpPr/>
+          <p:nvPr/>
+        </p:nvSpPr>
+        <p:spPr>
+          <a:xfrm>
+            <a:off x="402336" y="1133856"/>
+            <a:ext cx="7790688" cy="4910328"/>
+          </a:xfrm>
+          <a:prstGeom prst="rect">
+            <a:avLst/>
+          </a:prstGeom>
+          <a:solidFill>
+            <a:schemeClr val="bg1"/>
+          </a:solidFill>
+          <a:ln w="12700">
+            <a:solidFill>
+              <a:srgbClr val="D5DFDD"/>
+            </a:solidFill>
+            <a:prstDash val="solid"/>
+          </a:ln>
+          <a:effectLst>
+            <a:outerShdw sx="100000" sy="100000" kx="0" ky="0" algn="bl" rotWithShape="0" blurRad="76200" dist="25400" dir="5400000">
+              <a:srgbClr val="000000">
+                <a:alpha val="12000"/>
+              </a:srgbClr>
+            </a:outerShdw>
+          </a:effectLst>
+        </p:spPr>
+      </p:sp>
+      <p:pic>
+        <p:nvPicPr>
+          <p:cNvPr id="4" name="Screenshot" descr="Brokers: screenshot with numbered callouts">    </p:cNvPr>
+          <p:cNvPicPr>
+            <a:picLocks noChangeAspect="1"/>
+          </p:cNvPicPr>
+          <p:nvPr/>
+        </p:nvPicPr>
+        <p:blipFill>
+          <a:blip r:embed="rId1"/>
+          <a:stretch>
+            <a:fillRect/>
+          </a:stretch>
+        </p:blipFill>
+        <p:spPr>
+          <a:xfrm>
+            <a:off x="457200" y="1188720"/>
+            <a:ext cx="7680960" cy="4800600"/>
+          </a:xfrm>
+          <a:prstGeom prst="rect">
+            <a:avLst/>
+          </a:prstGeom>
+        </p:spPr>
+      </p:pic>
+      <p:sp>
+        <p:nvSpPr>
+          <p:cNvPr id="5" name="Step 1 marker"/>
+          <p:cNvSpPr/>
+          <p:nvPr/>
+        </p:nvSpPr>
+        <p:spPr>
+          <a:xfrm>
+            <a:off x="8503920" y="1207008"/>
+            <a:ext cx="347472" cy="347472"/>
+          </a:xfrm>
+          <a:prstGeom prst="ellipse">
+            <a:avLst/>
+          </a:prstGeom>
+          <a:solidFill>
+            <a:schemeClr val="accent3"/>
+          </a:solidFill>
+          <a:ln w="12700">
+            <a:solidFill>
+              <a:schemeClr val="accent3"/>
+            </a:solidFill>
+            <a:prstDash val="solid"/>
+          </a:ln>
+        </p:spPr>
+      </p:sp>
+      <p:sp>
+        <p:nvSpPr>
+          <p:cNvPr id="6" name="Step 1 number"/>
+          <p:cNvSpPr txBox="1"/>
+          <p:nvPr/>
+        </p:nvSpPr>
+        <p:spPr>
+          <a:xfrm>
+            <a:off x="8503920" y="1207008"/>
+            <a:ext cx="347472" cy="347472"/>
+          </a:xfrm>
+          <a:prstGeom prst="rect">
+            <a:avLst/>
+          </a:prstGeom>
+          <a:noFill/>
+          <a:ln/>
+        </p:spPr>
+        <p:txBody>
+          <a:bodyPr wrap="square" lIns="0" tIns="0" rIns="0" bIns="0" rtlCol="0" anchor="ctr"/>
+          <a:lstStyle/>
+          <a:p>
+            <a:pPr algn="ctr" indent="0" marL="0">
+              <a:buNone/>
+            </a:pPr>
+            <a:r>
+              <a:rPr lang="en-US" sz="1300" b="1" dirty="0">
+                <a:solidFill>
+                  <a:schemeClr val="bg1"/>
+                </a:solidFill>
+              </a:rPr>
+              <a:t>1</a:t>
+            </a:r>
+            <a:endParaRPr lang="en-US" sz="1300" dirty="0"/>
+          </a:p>
+        </p:txBody>
+      </p:sp>
+      <p:sp>
+        <p:nvSpPr>
+          <p:cNvPr id="7" name="Step 1 text"/>
+          <p:cNvSpPr txBox="1"/>
+          <p:nvPr/>
+        </p:nvSpPr>
+        <p:spPr>
+          <a:xfrm>
+            <a:off x="8979408" y="1188720"/>
+            <a:ext cx="2770632" cy="1115568"/>
+          </a:xfrm>
+          <a:prstGeom prst="rect">
+            <a:avLst/>
+          </a:prstGeom>
+          <a:noFill/>
+          <a:ln/>
+        </p:spPr>
+        <p:txBody>
+          <a:bodyPr wrap="square" lIns="0" tIns="0" rIns="0" bIns="0" rtlCol="0" anchor="t"/>
+          <a:lstStyle/>
+          <a:p>
+            <a:pPr indent="0" marL="0">
+              <a:buNone/>
+            </a:pPr>
+            <a:r>
+              <a:rPr lang="en-US" sz="1350" dirty="0">
+                <a:solidFill>
+                  <a:schemeClr val="tx1"/>
+                </a:solidFill>
+              </a:rPr>
+              <a:t>Search brokerages and brokers.</a:t>
+            </a:r>
+            <a:endParaRPr lang="en-US" sz="1350" dirty="0"/>
+          </a:p>
+        </p:txBody>
+      </p:sp>
+      <p:sp>
+        <p:nvSpPr>
+          <p:cNvPr id="8" name="Step 2 marker"/>
+          <p:cNvSpPr/>
+          <p:nvPr/>
+        </p:nvSpPr>
+        <p:spPr>
+          <a:xfrm>
+            <a:off x="8503920" y="2395728"/>
+            <a:ext cx="347472" cy="347472"/>
+          </a:xfrm>
+          <a:prstGeom prst="ellipse">
+            <a:avLst/>
+          </a:prstGeom>
+          <a:solidFill>
+            <a:schemeClr val="accent3"/>
+          </a:solidFill>
+          <a:ln w="12700">
+            <a:solidFill>
+              <a:schemeClr val="accent3"/>
+            </a:solidFill>
+            <a:prstDash val="solid"/>
+          </a:ln>
+        </p:spPr>
+      </p:sp>
+      <p:sp>
+        <p:nvSpPr>
+          <p:cNvPr id="9" name="Step 2 number"/>
+          <p:cNvSpPr txBox="1"/>
+          <p:nvPr/>
+        </p:nvSpPr>
+        <p:spPr>
+          <a:xfrm>
+            <a:off x="8503920" y="2395728"/>
+            <a:ext cx="347472" cy="347472"/>
+          </a:xfrm>
+          <a:prstGeom prst="rect">
+            <a:avLst/>
+          </a:prstGeom>
+          <a:noFill/>
+          <a:ln/>
+        </p:spPr>
+        <p:txBody>
+          <a:bodyPr wrap="square" lIns="0" tIns="0" rIns="0" bIns="0" rtlCol="0" anchor="ctr"/>
+          <a:lstStyle/>
+          <a:p>
+            <a:pPr algn="ctr" indent="0" marL="0">
+              <a:buNone/>
+            </a:pPr>
+            <a:r>
+              <a:rPr lang="en-US" sz="1300" b="1" dirty="0">
+                <a:solidFill>
+                  <a:schemeClr val="bg1"/>
+                </a:solidFill>
+              </a:rPr>
+              <a:t>2</a:t>
+            </a:r>
+            <a:endParaRPr lang="en-US" sz="1300" dirty="0"/>
+          </a:p>
+        </p:txBody>
+      </p:sp>
+      <p:sp>
+        <p:nvSpPr>
+          <p:cNvPr id="10" name="Step 2 text"/>
+          <p:cNvSpPr txBox="1"/>
+          <p:nvPr/>
+        </p:nvSpPr>
+        <p:spPr>
+          <a:xfrm>
+            <a:off x="8979408" y="2377440"/>
+            <a:ext cx="2770632" cy="1115568"/>
+          </a:xfrm>
+          <a:prstGeom prst="rect">
+            <a:avLst/>
+          </a:prstGeom>
+          <a:noFill/>
+          <a:ln/>
+        </p:spPr>
+        <p:txBody>
+          <a:bodyPr wrap="square" lIns="0" tIns="0" rIns="0" bIns="0" rtlCol="0" anchor="t"/>
+          <a:lstStyle/>
+          <a:p>
+            <a:pPr indent="0" marL="0">
+              <a:buNone/>
+            </a:pPr>
+            <a:r>
+              <a:rPr lang="en-US" sz="1350" dirty="0">
+                <a:solidFill>
+                  <a:schemeClr val="tx1"/>
+                </a:solidFill>
+              </a:rPr>
+              <a:t>Broker view shows the portal exactly as that broker sees it.</a:t>
+            </a:r>
+            <a:endParaRPr lang="en-US" sz="1350" dirty="0"/>
+          </a:p>
+        </p:txBody>
+      </p:sp>
+      <p:sp>
+        <p:nvSpPr>
+          <p:cNvPr id="11" name="Step 3 marker"/>
+          <p:cNvSpPr/>
+          <p:nvPr/>
+        </p:nvSpPr>
+        <p:spPr>
+          <a:xfrm>
+            <a:off x="8503920" y="3584448"/>
+            <a:ext cx="347472" cy="347472"/>
+          </a:xfrm>
+          <a:prstGeom prst="ellipse">
+            <a:avLst/>
+          </a:prstGeom>
+          <a:solidFill>
+            <a:schemeClr val="accent3"/>
+          </a:solidFill>
+          <a:ln w="12700">
+            <a:solidFill>
+              <a:schemeClr val="accent3"/>
+            </a:solidFill>
+            <a:prstDash val="solid"/>
+          </a:ln>
+        </p:spPr>
+      </p:sp>
+      <p:sp>
+        <p:nvSpPr>
+          <p:cNvPr id="12" name="Step 3 number"/>
+          <p:cNvSpPr txBox="1"/>
+          <p:nvPr/>
+        </p:nvSpPr>
+        <p:spPr>
+          <a:xfrm>
+            <a:off x="8503920" y="3584448"/>
+            <a:ext cx="347472" cy="347472"/>
+          </a:xfrm>
+          <a:prstGeom prst="rect">
+            <a:avLst/>
+          </a:prstGeom>
+          <a:noFill/>
+          <a:ln/>
+        </p:spPr>
+        <p:txBody>
+          <a:bodyPr wrap="square" lIns="0" tIns="0" rIns="0" bIns="0" rtlCol="0" anchor="ctr"/>
+          <a:lstStyle/>
+          <a:p>
+            <a:pPr algn="ctr" indent="0" marL="0">
+              <a:buNone/>
+            </a:pPr>
+            <a:r>
+              <a:rPr lang="en-US" sz="1300" b="1" dirty="0">
+                <a:solidFill>
+                  <a:schemeClr val="bg1"/>
+                </a:solidFill>
+              </a:rPr>
+              <a:t>3</a:t>
+            </a:r>
+            <a:endParaRPr lang="en-US" sz="1300" dirty="0"/>
+          </a:p>
+        </p:txBody>
+      </p:sp>
+      <p:sp>
+        <p:nvSpPr>
+          <p:cNvPr id="13" name="Step 3 text"/>
+          <p:cNvSpPr txBox="1"/>
+          <p:nvPr/>
+        </p:nvSpPr>
+        <p:spPr>
+          <a:xfrm>
+            <a:off x="8979408" y="3566160"/>
+            <a:ext cx="2770632" cy="1115568"/>
+          </a:xfrm>
+          <a:prstGeom prst="rect">
+            <a:avLst/>
+          </a:prstGeom>
+          <a:noFill/>
+          <a:ln/>
+        </p:spPr>
+        <p:txBody>
+          <a:bodyPr wrap="square" lIns="0" tIns="0" rIns="0" bIns="0" rtlCol="0" anchor="t"/>
+          <a:lstStyle/>
+          <a:p>
+            <a:pPr indent="0" marL="0">
+              <a:buNone/>
+            </a:pPr>
+            <a:r>
+              <a:rPr lang="en-US" sz="1350" dirty="0">
+                <a:solidFill>
+                  <a:schemeClr val="tx1"/>
+                </a:solidFill>
+              </a:rPr>
+              <a:t>Open a brokerage to see its people, quotes and policies.</a:t>
+            </a:r>
+            <a:endParaRPr lang="en-US" sz="1350" dirty="0"/>
+          </a:p>
+        </p:txBody>
+      </p:sp>
+      <p:sp>
+        <p:nvSpPr>
+          <p:cNvPr id="25" name="Slide Number Placeholder 0"/>
+          <p:cNvSpPr>
+            <a:spLocks noGrp="1"/>
+          </p:cNvSpPr>
+          <p:nvPr>
+            <p:ph type="sldNum" sz="quarter" idx="4294967295"/>
+          </p:nvPr>
+        </p:nvSpPr>
+        <p:spPr>
+          <a:xfrm>
+            <a:off x="11201400" y="6446520"/>
+            <a:ext cx="548640" cy="274320"/>
+          </a:xfrm>
+          <a:prstGeom prst="rect">
+            <a:avLst/>
+          </a:prstGeom>
+          <a:extLst>
+            <a:ext uri="{C572A759-6A51-4108-AA02-DFA0A04FC94B}">
+              <ma14:wrappingTextBoxFlag xmlns:ma14="http://schemas.microsoft.com/office/mac/drawingml/2011/main" val="0"/>
+            </a:ext>
+          </a:extLst>
+        </p:spPr>
+        <p:txBody>
+          <a:bodyPr/>
+          <a:lstStyle>
+            <a:lvl1pPr>
+              <a:defRPr sz="1000">
+                <a:solidFill>
+                  <a:srgbClr val="6B6E72"/>
+                </a:solidFill>
+              </a:defRPr>
+            </a:lvl1pPr>
+          </a:lstStyle>
+          <a:p>
+            <a:pPr algn="r"/>
+            <a:fld id="{F7021451-1387-4CA6-816F-3879F97B5CBC}" type="slidenum">
+              <a:rPr b="0" lang="en-US"/>
+              <a:t>22</a:t>
+            </a:fld>
+            <a:endParaRPr lang="en-US"/>
+          </a:p>
+        </p:txBody>
+      </p:sp>
+    </p:spTree>
+  </p:cSld>
+  <p:clrMapOvr>
+    <a:masterClrMapping/>
+  </p:clrMapOvr>
+</p:sld>
+</file>
+
+<file path=ppt/slides/slide23.xml><?xml version="1.0" encoding="utf-8"?>
+<p:sld xmlns:a="http://schemas.openxmlformats.org/drawingml/2006/main" xmlns:r="http://schemas.openxmlformats.org/officeDocument/2006/relationships" xmlns:p="http://schemas.openxmlformats.org/presentationml/2006/main">
+  <p:cSld name="Slide 23">
+    <p:spTree>
+      <p:nvGrpSpPr>
+        <p:cNvPr id="1" name=""/>
+        <p:cNvGrpSpPr/>
+        <p:nvPr/>
+      </p:nvGrpSpPr>
+      <p:grpSpPr>
+        <a:xfrm>
+          <a:off x="0" y="0"/>
+          <a:ext cx="0" cy="0"/>
+          <a:chOff x="0" y="0"/>
+          <a:chExt cx="0" cy="0"/>
+        </a:xfrm>
+      </p:grpSpPr>
+      <p:sp>
+        <p:nvSpPr>
+          <p:cNvPr id="2" name="Section number"/>
+          <p:cNvSpPr txBox="1"/>
+          <p:nvPr/>
+        </p:nvSpPr>
+        <p:spPr>
+          <a:xfrm>
+            <a:off x="731520" y="1463040"/>
+            <a:ext cx="1828800" cy="1097280"/>
+          </a:xfrm>
+          <a:prstGeom prst="rect">
+            <a:avLst/>
+          </a:prstGeom>
+          <a:noFill/>
+          <a:ln/>
+        </p:spPr>
+        <p:txBody>
+          <a:bodyPr wrap="square" lIns="0" tIns="0" rIns="0" bIns="0" rtlCol="0" anchor="ctr"/>
+          <a:lstStyle/>
+          <a:p>
+            <a:pPr indent="0" marL="0">
+              <a:buNone/>
+            </a:pPr>
+            <a:r>
+              <a:rPr lang="en-US" sz="6600" b="1" dirty="0">
+                <a:solidFill>
+                  <a:schemeClr val="accent2"/>
+                </a:solidFill>
+              </a:rPr>
+              <a:t>05</a:t>
+            </a:r>
+            <a:endParaRPr lang="en-US" sz="6600" dirty="0"/>
+          </a:p>
+        </p:txBody>
+      </p:sp>
+      <p:sp>
+        <p:nvSpPr>
+          <p:cNvPr id="3" name="Text 0"/>
+          <p:cNvSpPr/>
+          <p:nvPr>
+            <p:ph idx="101" type="title" hasCustomPrompt="1"/>
+          </p:nvPr>
+        </p:nvSpPr>
+        <p:spPr>
+          <a:xfrm>
+            <a:off x="731520" y="2743200"/>
+            <a:ext cx="10058400" cy="1005840"/>
+          </a:xfrm>
+          <a:prstGeom prst="rect">
+            <a:avLst/>
+          </a:prstGeom>
+          <a:noFill/>
+          <a:ln/>
+        </p:spPr>
+        <p:txBody>
+          <a:bodyPr wrap="square" lIns="0" tIns="0" rIns="0" bIns="0" rtlCol="0" anchor="t"/>
+          <a:lstStyle/>
+          <a:p>
+            <a:pPr algn="l" indent="0" marL="0">
+              <a:buNone/>
+            </a:pPr>
+            <a:r>
+              <a:rPr lang="en-US" sz="4000" b="1" dirty="0">
+                <a:solidFill>
+                  <a:schemeClr val="bg1"/>
+                </a:solidFill>
+              </a:rPr>
+              <a:t>Quotes, policies and email</a:t>
+            </a:r>
+            <a:endParaRPr lang="en-US" sz="4000" dirty="0"/>
+          </a:p>
+        </p:txBody>
+      </p:sp>
+      <p:sp>
+        <p:nvSpPr>
+          <p:cNvPr id="4" name="Text 0"/>
+          <p:cNvSpPr/>
+          <p:nvPr>
+            <p:ph idx="102" type="body" hasCustomPrompt="1"/>
+          </p:nvPr>
+        </p:nvSpPr>
+        <p:spPr>
+          <a:xfrm>
+            <a:off x="731520" y="3794760"/>
+            <a:ext cx="8686800" cy="1097280"/>
+          </a:xfrm>
+          <a:prstGeom prst="rect">
+            <a:avLst/>
+          </a:prstGeom>
+          <a:noFill/>
+          <a:ln/>
+        </p:spPr>
+        <p:txBody>
+          <a:bodyPr wrap="square" lIns="0" tIns="0" rIns="0" bIns="0" rtlCol="0" anchor="t"/>
+          <a:lstStyle/>
+          <a:p>
+            <a:pPr algn="l" indent="0" marL="0">
+              <a:buNone/>
+            </a:pPr>
+            <a:r>
+              <a:rPr lang="en-US" sz="2000" dirty="0">
+                <a:solidFill>
+                  <a:schemeClr val="bg1"/>
+                </a:solidFill>
+              </a:rPr>
+              <a:t>From quote to bound policy, and making sure our emails arrive.</a:t>
+            </a:r>
+            <a:endParaRPr lang="en-US" sz="2000" dirty="0"/>
+          </a:p>
+        </p:txBody>
+      </p:sp>
+      <p:sp>
+        <p:nvSpPr>
+          <p:cNvPr id="25" name="Slide Number Placeholder 0"/>
+          <p:cNvSpPr>
+            <a:spLocks noGrp="1"/>
+          </p:cNvSpPr>
+          <p:nvPr>
+            <p:ph type="sldNum" sz="quarter" idx="4294967295"/>
+          </p:nvPr>
+        </p:nvSpPr>
+        <p:spPr>
+          <a:xfrm>
+            <a:off x="11155680" y="6263640"/>
+            <a:ext cx="548640" cy="274320"/>
+          </a:xfrm>
+          <a:prstGeom prst="rect">
+            <a:avLst/>
+          </a:prstGeom>
+          <a:extLst>
+            <a:ext uri="{C572A759-6A51-4108-AA02-DFA0A04FC94B}">
+              <ma14:wrappingTextBoxFlag xmlns:ma14="http://schemas.microsoft.com/office/mac/drawingml/2011/main" val="0"/>
+            </a:ext>
+          </a:extLst>
+        </p:spPr>
+        <p:txBody>
+          <a:bodyPr/>
+          <a:lstStyle>
+            <a:lvl1pPr>
+              <a:defRPr sz="1000">
+                <a:solidFill>
+                  <a:srgbClr val="FFFFFF"/>
+                </a:solidFill>
+              </a:defRPr>
+            </a:lvl1pPr>
+          </a:lstStyle>
+          <a:p>
+            <a:pPr algn="r"/>
+            <a:fld id="{F7021451-1387-4CA6-816F-3879F97B5CBC}" type="slidenum">
+              <a:rPr b="0" lang="en-US"/>
+              <a:t>23</a:t>
+            </a:fld>
+            <a:endParaRPr lang="en-US"/>
+          </a:p>
+        </p:txBody>
+      </p:sp>
+    </p:spTree>
+  </p:cSld>
+  <p:clrMapOvr>
+    <a:masterClrMapping/>
+  </p:clrMapOvr>
+</p:sld>
+</file>
+
+<file path=ppt/slides/slide24.xml><?xml version="1.0" encoding="utf-8"?>
+<p:sld xmlns:a="http://schemas.openxmlformats.org/drawingml/2006/main" xmlns:r="http://schemas.openxmlformats.org/officeDocument/2006/relationships" xmlns:p="http://schemas.openxmlformats.org/presentationml/2006/main">
+  <p:cSld name="Slide 24">
+    <p:spTree>
+      <p:nvGrpSpPr>
+        <p:cNvPr id="1" name=""/>
+        <p:cNvGrpSpPr/>
+        <p:nvPr/>
+      </p:nvGrpSpPr>
+      <p:grpSpPr>
+        <a:xfrm>
+          <a:off x="0" y="0"/>
+          <a:ext cx="0" cy="0"/>
+          <a:chOff x="0" y="0"/>
+          <a:chExt cx="0" cy="0"/>
+        </a:xfrm>
+      </p:grpSpPr>
+      <p:sp>
+        <p:nvSpPr>
+          <p:cNvPr id="2" name="Text 0"/>
+          <p:cNvSpPr/>
+          <p:nvPr>
+            <p:ph idx="101" type="title" hasCustomPrompt="1"/>
+          </p:nvPr>
+        </p:nvSpPr>
+        <p:spPr>
+          <a:xfrm>
+            <a:off x="457200" y="274320"/>
+            <a:ext cx="10058400" cy="685800"/>
+          </a:xfrm>
+          <a:prstGeom prst="rect">
+            <a:avLst/>
+          </a:prstGeom>
+          <a:noFill/>
+          <a:ln/>
+        </p:spPr>
+        <p:txBody>
+          <a:bodyPr wrap="square" lIns="0" tIns="0" rIns="0" bIns="0" rtlCol="0" anchor="ctr"/>
+          <a:lstStyle/>
+          <a:p>
+            <a:pPr algn="l" indent="0" marL="0">
+              <a:buNone/>
+            </a:pPr>
+            <a:r>
+              <a:rPr lang="en-US" sz="2800" b="1" dirty="0">
+                <a:solidFill>
+                  <a:schemeClr val="tx2"/>
+                </a:solidFill>
+              </a:rPr>
+              <a:t>A bind instruction</a:t>
+            </a:r>
+            <a:endParaRPr lang="en-US" sz="2800" dirty="0"/>
+          </a:p>
+        </p:txBody>
+      </p:sp>
+      <p:sp>
+        <p:nvSpPr>
+          <p:cNvPr id="3" name="Screenshot frame"/>
+          <p:cNvSpPr/>
+          <p:nvPr/>
+        </p:nvSpPr>
+        <p:spPr>
+          <a:xfrm>
+            <a:off x="402336" y="1133856"/>
+            <a:ext cx="7790688" cy="4910328"/>
+          </a:xfrm>
+          <a:prstGeom prst="rect">
+            <a:avLst/>
+          </a:prstGeom>
+          <a:solidFill>
+            <a:schemeClr val="bg1"/>
+          </a:solidFill>
+          <a:ln w="12700">
+            <a:solidFill>
+              <a:srgbClr val="D5DFDD"/>
+            </a:solidFill>
+            <a:prstDash val="solid"/>
+          </a:ln>
+          <a:effectLst>
+            <a:outerShdw sx="100000" sy="100000" kx="0" ky="0" algn="bl" rotWithShape="0" blurRad="76200" dist="25400" dir="5400000">
+              <a:srgbClr val="000000">
+                <a:alpha val="12000"/>
+              </a:srgbClr>
+            </a:outerShdw>
+          </a:effectLst>
+        </p:spPr>
+      </p:sp>
+      <p:pic>
+        <p:nvPicPr>
+          <p:cNvPr id="4" name="Screenshot" descr="A bind instruction: screenshot with numbered callouts">    </p:cNvPr>
+          <p:cNvPicPr>
+            <a:picLocks noChangeAspect="1"/>
+          </p:cNvPicPr>
+          <p:nvPr/>
+        </p:nvPicPr>
+        <p:blipFill>
+          <a:blip r:embed="rId1"/>
+          <a:stretch>
+            <a:fillRect/>
+          </a:stretch>
+        </p:blipFill>
+        <p:spPr>
+          <a:xfrm>
+            <a:off x="457200" y="1188720"/>
+            <a:ext cx="7680960" cy="4800600"/>
+          </a:xfrm>
+          <a:prstGeom prst="rect">
+            <a:avLst/>
+          </a:prstGeom>
+        </p:spPr>
+      </p:pic>
+      <p:sp>
+        <p:nvSpPr>
+          <p:cNvPr id="5" name="Step 1 marker"/>
+          <p:cNvSpPr/>
+          <p:nvPr/>
+        </p:nvSpPr>
+        <p:spPr>
+          <a:xfrm>
+            <a:off x="8503920" y="1207008"/>
+            <a:ext cx="347472" cy="347472"/>
+          </a:xfrm>
+          <a:prstGeom prst="ellipse">
+            <a:avLst/>
+          </a:prstGeom>
+          <a:solidFill>
+            <a:schemeClr val="accent3"/>
+          </a:solidFill>
+          <a:ln w="12700">
+            <a:solidFill>
+              <a:schemeClr val="accent3"/>
+            </a:solidFill>
+            <a:prstDash val="solid"/>
+          </a:ln>
+        </p:spPr>
+      </p:sp>
+      <p:sp>
+        <p:nvSpPr>
+          <p:cNvPr id="6" name="Step 1 number"/>
+          <p:cNvSpPr txBox="1"/>
+          <p:nvPr/>
+        </p:nvSpPr>
+        <p:spPr>
+          <a:xfrm>
+            <a:off x="8503920" y="1207008"/>
+            <a:ext cx="347472" cy="347472"/>
+          </a:xfrm>
+          <a:prstGeom prst="rect">
+            <a:avLst/>
+          </a:prstGeom>
+          <a:noFill/>
+          <a:ln/>
+        </p:spPr>
+        <p:txBody>
+          <a:bodyPr wrap="square" lIns="0" tIns="0" rIns="0" bIns="0" rtlCol="0" anchor="ctr"/>
+          <a:lstStyle/>
+          <a:p>
+            <a:pPr algn="ctr" indent="0" marL="0">
+              <a:buNone/>
+            </a:pPr>
+            <a:r>
+              <a:rPr lang="en-US" sz="1300" b="1" dirty="0">
+                <a:solidFill>
+                  <a:schemeClr val="bg1"/>
+                </a:solidFill>
+              </a:rPr>
+              <a:t>1</a:t>
+            </a:r>
+            <a:endParaRPr lang="en-US" sz="1300" dirty="0"/>
+          </a:p>
+        </p:txBody>
+      </p:sp>
+      <p:sp>
+        <p:nvSpPr>
+          <p:cNvPr id="7" name="Step 1 text"/>
+          <p:cNvSpPr txBox="1"/>
+          <p:nvPr/>
+        </p:nvSpPr>
+        <p:spPr>
+          <a:xfrm>
+            <a:off x="8979408" y="1188720"/>
+            <a:ext cx="2770632" cy="1115568"/>
+          </a:xfrm>
+          <a:prstGeom prst="rect">
+            <a:avLst/>
+          </a:prstGeom>
+          <a:noFill/>
+          <a:ln/>
+        </p:spPr>
+        <p:txBody>
+          <a:bodyPr wrap="square" lIns="0" tIns="0" rIns="0" bIns="0" rtlCol="0" anchor="t"/>
+          <a:lstStyle/>
+          <a:p>
+            <a:pPr indent="0" marL="0">
+              <a:buNone/>
+            </a:pPr>
+            <a:r>
+              <a:rPr lang="en-US" sz="1350" dirty="0">
+                <a:solidFill>
+                  <a:schemeClr val="tx1"/>
+                </a:solidFill>
+              </a:rPr>
+              <a:t>The broker's instruction to bind, with the inception date and any notes.</a:t>
+            </a:r>
+            <a:endParaRPr lang="en-US" sz="1350" dirty="0"/>
+          </a:p>
+        </p:txBody>
+      </p:sp>
+      <p:sp>
+        <p:nvSpPr>
+          <p:cNvPr id="8" name="Step 2 marker"/>
+          <p:cNvSpPr/>
+          <p:nvPr/>
+        </p:nvSpPr>
+        <p:spPr>
+          <a:xfrm>
+            <a:off x="8503920" y="2395728"/>
+            <a:ext cx="347472" cy="347472"/>
+          </a:xfrm>
+          <a:prstGeom prst="ellipse">
+            <a:avLst/>
+          </a:prstGeom>
+          <a:solidFill>
+            <a:schemeClr val="accent3"/>
+          </a:solidFill>
+          <a:ln w="12700">
+            <a:solidFill>
+              <a:schemeClr val="accent3"/>
+            </a:solidFill>
+            <a:prstDash val="solid"/>
+          </a:ln>
+        </p:spPr>
+      </p:sp>
+      <p:sp>
+        <p:nvSpPr>
+          <p:cNvPr id="9" name="Step 2 number"/>
+          <p:cNvSpPr txBox="1"/>
+          <p:nvPr/>
+        </p:nvSpPr>
+        <p:spPr>
+          <a:xfrm>
+            <a:off x="8503920" y="2395728"/>
+            <a:ext cx="347472" cy="347472"/>
+          </a:xfrm>
+          <a:prstGeom prst="rect">
+            <a:avLst/>
+          </a:prstGeom>
+          <a:noFill/>
+          <a:ln/>
+        </p:spPr>
+        <p:txBody>
+          <a:bodyPr wrap="square" lIns="0" tIns="0" rIns="0" bIns="0" rtlCol="0" anchor="ctr"/>
+          <a:lstStyle/>
+          <a:p>
+            <a:pPr algn="ctr" indent="0" marL="0">
+              <a:buNone/>
+            </a:pPr>
+            <a:r>
+              <a:rPr lang="en-US" sz="1300" b="1" dirty="0">
+                <a:solidFill>
+                  <a:schemeClr val="bg1"/>
+                </a:solidFill>
+              </a:rPr>
+              <a:t>2</a:t>
+            </a:r>
+            <a:endParaRPr lang="en-US" sz="1300" dirty="0"/>
+          </a:p>
+        </p:txBody>
+      </p:sp>
+      <p:sp>
+        <p:nvSpPr>
+          <p:cNvPr id="10" name="Step 2 text"/>
+          <p:cNvSpPr txBox="1"/>
+          <p:nvPr/>
+        </p:nvSpPr>
+        <p:spPr>
+          <a:xfrm>
+            <a:off x="8979408" y="2377440"/>
+            <a:ext cx="2770632" cy="1115568"/>
+          </a:xfrm>
+          <a:prstGeom prst="rect">
+            <a:avLst/>
+          </a:prstGeom>
+          <a:noFill/>
+          <a:ln/>
+        </p:spPr>
+        <p:txBody>
+          <a:bodyPr wrap="square" lIns="0" tIns="0" rIns="0" bIns="0" rtlCol="0" anchor="t"/>
+          <a:lstStyle/>
+          <a:p>
+            <a:pPr indent="0" marL="0">
+              <a:buNone/>
+            </a:pPr>
+            <a:r>
+              <a:rPr lang="en-US" sz="1350" dirty="0">
+                <a:solidFill>
+                  <a:schemeClr val="tx1"/>
+                </a:solidFill>
+              </a:rPr>
+              <a:t>The original request details.</a:t>
+            </a:r>
+            <a:endParaRPr lang="en-US" sz="1350" dirty="0"/>
+          </a:p>
+        </p:txBody>
+      </p:sp>
+      <p:sp>
+        <p:nvSpPr>
+          <p:cNvPr id="25" name="Slide Number Placeholder 0"/>
+          <p:cNvSpPr>
+            <a:spLocks noGrp="1"/>
+          </p:cNvSpPr>
+          <p:nvPr>
+            <p:ph type="sldNum" sz="quarter" idx="4294967295"/>
+          </p:nvPr>
+        </p:nvSpPr>
+        <p:spPr>
+          <a:xfrm>
+            <a:off x="11201400" y="6446520"/>
+            <a:ext cx="548640" cy="274320"/>
+          </a:xfrm>
+          <a:prstGeom prst="rect">
+            <a:avLst/>
+          </a:prstGeom>
+          <a:extLst>
+            <a:ext uri="{C572A759-6A51-4108-AA02-DFA0A04FC94B}">
+              <ma14:wrappingTextBoxFlag xmlns:ma14="http://schemas.microsoft.com/office/mac/drawingml/2011/main" val="0"/>
+            </a:ext>
+          </a:extLst>
+        </p:spPr>
+        <p:txBody>
+          <a:bodyPr/>
+          <a:lstStyle>
+            <a:lvl1pPr>
+              <a:defRPr sz="1000">
+                <a:solidFill>
+                  <a:srgbClr val="6B6E72"/>
+                </a:solidFill>
+              </a:defRPr>
+            </a:lvl1pPr>
+          </a:lstStyle>
+          <a:p>
+            <a:pPr algn="r"/>
+            <a:fld id="{F7021451-1387-4CA6-816F-3879F97B5CBC}" type="slidenum">
+              <a:rPr b="0" lang="en-US"/>
+              <a:t>24</a:t>
+            </a:fld>
+            <a:endParaRPr lang="en-US"/>
+          </a:p>
+        </p:txBody>
+      </p:sp>
+    </p:spTree>
+  </p:cSld>
+  <p:clrMapOvr>
+    <a:masterClrMapping/>
+  </p:clrMapOvr>
+</p:sld>
+</file>
+
+<file path=ppt/slides/slide25.xml><?xml version="1.0" encoding="utf-8"?>
+<p:sld xmlns:a="http://schemas.openxmlformats.org/drawingml/2006/main" xmlns:r="http://schemas.openxmlformats.org/officeDocument/2006/relationships" xmlns:p="http://schemas.openxmlformats.org/presentationml/2006/main">
+  <p:cSld name="Slide 25">
+    <p:spTree>
+      <p:nvGrpSpPr>
+        <p:cNvPr id="1" name=""/>
+        <p:cNvGrpSpPr/>
+        <p:nvPr/>
+      </p:nvGrpSpPr>
+      <p:grpSpPr>
+        <a:xfrm>
+          <a:off x="0" y="0"/>
+          <a:ext cx="0" cy="0"/>
+          <a:chOff x="0" y="0"/>
+          <a:chExt cx="0" cy="0"/>
+        </a:xfrm>
+      </p:grpSpPr>
+      <p:sp>
+        <p:nvSpPr>
+          <p:cNvPr id="2" name="Text 0"/>
+          <p:cNvSpPr/>
+          <p:nvPr>
+            <p:ph idx="101" type="title" hasCustomPrompt="1"/>
+          </p:nvPr>
+        </p:nvSpPr>
+        <p:spPr>
+          <a:xfrm>
+            <a:off x="457200" y="274320"/>
+            <a:ext cx="10058400" cy="685800"/>
+          </a:xfrm>
+          <a:prstGeom prst="rect">
+            <a:avLst/>
+          </a:prstGeom>
+          <a:noFill/>
+          <a:ln/>
+        </p:spPr>
+        <p:txBody>
+          <a:bodyPr wrap="square" lIns="0" tIns="0" rIns="0" bIns="0" rtlCol="0" anchor="ctr"/>
+          <a:lstStyle/>
+          <a:p>
+            <a:pPr algn="l" indent="0" marL="0">
+              <a:buNone/>
+            </a:pPr>
+            <a:r>
+              <a:rPr lang="en-US" sz="2800" b="1" dirty="0">
+                <a:solidFill>
+                  <a:schemeClr val="tx2"/>
+                </a:solidFill>
+              </a:rPr>
+              <a:t>Policies</a:t>
+            </a:r>
+            <a:endParaRPr lang="en-US" sz="2800" dirty="0"/>
+          </a:p>
+        </p:txBody>
+      </p:sp>
+      <p:sp>
+        <p:nvSpPr>
+          <p:cNvPr id="3" name="Screenshot frame"/>
+          <p:cNvSpPr/>
+          <p:nvPr/>
+        </p:nvSpPr>
+        <p:spPr>
+          <a:xfrm>
+            <a:off x="402336" y="1133856"/>
+            <a:ext cx="7790688" cy="4910328"/>
+          </a:xfrm>
+          <a:prstGeom prst="rect">
+            <a:avLst/>
+          </a:prstGeom>
+          <a:solidFill>
+            <a:schemeClr val="bg1"/>
+          </a:solidFill>
+          <a:ln w="12700">
+            <a:solidFill>
+              <a:srgbClr val="D5DFDD"/>
+            </a:solidFill>
+            <a:prstDash val="solid"/>
+          </a:ln>
+          <a:effectLst>
+            <a:outerShdw sx="100000" sy="100000" kx="0" ky="0" algn="bl" rotWithShape="0" blurRad="76200" dist="25400" dir="5400000">
+              <a:srgbClr val="000000">
+                <a:alpha val="12000"/>
+              </a:srgbClr>
+            </a:outerShdw>
+          </a:effectLst>
+        </p:spPr>
+      </p:sp>
+      <p:pic>
+        <p:nvPicPr>
+          <p:cNvPr id="4" name="Screenshot" descr="Policies: screenshot with numbered callouts">    </p:cNvPr>
+          <p:cNvPicPr>
+            <a:picLocks noChangeAspect="1"/>
+          </p:cNvPicPr>
+          <p:nvPr/>
+        </p:nvPicPr>
+        <p:blipFill>
+          <a:blip r:embed="rId1"/>
+          <a:stretch>
+            <a:fillRect/>
+          </a:stretch>
+        </p:blipFill>
+        <p:spPr>
+          <a:xfrm>
+            <a:off x="457200" y="1188720"/>
+            <a:ext cx="7680960" cy="4800600"/>
+          </a:xfrm>
+          <a:prstGeom prst="rect">
+            <a:avLst/>
+          </a:prstGeom>
+        </p:spPr>
+      </p:pic>
+      <p:sp>
+        <p:nvSpPr>
+          <p:cNvPr id="5" name="Step 1 marker"/>
+          <p:cNvSpPr/>
+          <p:nvPr/>
+        </p:nvSpPr>
+        <p:spPr>
+          <a:xfrm>
+            <a:off x="8503920" y="1207008"/>
+            <a:ext cx="347472" cy="347472"/>
+          </a:xfrm>
+          <a:prstGeom prst="ellipse">
+            <a:avLst/>
+          </a:prstGeom>
+          <a:solidFill>
+            <a:schemeClr val="accent3"/>
+          </a:solidFill>
+          <a:ln w="12700">
+            <a:solidFill>
+              <a:schemeClr val="accent3"/>
+            </a:solidFill>
+            <a:prstDash val="solid"/>
+          </a:ln>
+        </p:spPr>
+      </p:sp>
+      <p:sp>
+        <p:nvSpPr>
+          <p:cNvPr id="6" name="Step 1 number"/>
+          <p:cNvSpPr txBox="1"/>
+          <p:nvPr/>
+        </p:nvSpPr>
+        <p:spPr>
+          <a:xfrm>
+            <a:off x="8503920" y="1207008"/>
+            <a:ext cx="347472" cy="347472"/>
+          </a:xfrm>
+          <a:prstGeom prst="rect">
+            <a:avLst/>
+          </a:prstGeom>
+          <a:noFill/>
+          <a:ln/>
+        </p:spPr>
+        <p:txBody>
+          <a:bodyPr wrap="square" lIns="0" tIns="0" rIns="0" bIns="0" rtlCol="0" anchor="ctr"/>
+          <a:lstStyle/>
+          <a:p>
+            <a:pPr algn="ctr" indent="0" marL="0">
+              <a:buNone/>
+            </a:pPr>
+            <a:r>
+              <a:rPr lang="en-US" sz="1300" b="1" dirty="0">
+                <a:solidFill>
+                  <a:schemeClr val="bg1"/>
+                </a:solidFill>
+              </a:rPr>
+              <a:t>1</a:t>
+            </a:r>
+            <a:endParaRPr lang="en-US" sz="1300" dirty="0"/>
+          </a:p>
+        </p:txBody>
+      </p:sp>
+      <p:sp>
+        <p:nvSpPr>
+          <p:cNvPr id="7" name="Step 1 text"/>
+          <p:cNvSpPr txBox="1"/>
+          <p:nvPr/>
+        </p:nvSpPr>
+        <p:spPr>
+          <a:xfrm>
+            <a:off x="8979408" y="1188720"/>
+            <a:ext cx="2770632" cy="1115568"/>
+          </a:xfrm>
+          <a:prstGeom prst="rect">
+            <a:avLst/>
+          </a:prstGeom>
+          <a:noFill/>
+          <a:ln/>
+        </p:spPr>
+        <p:txBody>
+          <a:bodyPr wrap="square" lIns="0" tIns="0" rIns="0" bIns="0" rtlCol="0" anchor="t"/>
+          <a:lstStyle/>
+          <a:p>
+            <a:pPr indent="0" marL="0">
+              <a:buNone/>
+            </a:pPr>
+            <a:r>
+              <a:rPr lang="en-US" sz="1350" dirty="0">
+                <a:solidFill>
+                  <a:schemeClr val="tx1"/>
+                </a:solidFill>
+              </a:rPr>
+              <a:t>Search by insured, policy number, broker or InsuredHQ reference.</a:t>
+            </a:r>
+            <a:endParaRPr lang="en-US" sz="1350" dirty="0"/>
+          </a:p>
+        </p:txBody>
+      </p:sp>
+      <p:sp>
+        <p:nvSpPr>
+          <p:cNvPr id="8" name="Step 2 marker"/>
+          <p:cNvSpPr/>
+          <p:nvPr/>
+        </p:nvSpPr>
+        <p:spPr>
+          <a:xfrm>
+            <a:off x="8503920" y="2395728"/>
+            <a:ext cx="347472" cy="347472"/>
+          </a:xfrm>
+          <a:prstGeom prst="ellipse">
+            <a:avLst/>
+          </a:prstGeom>
+          <a:solidFill>
+            <a:schemeClr val="accent3"/>
+          </a:solidFill>
+          <a:ln w="12700">
+            <a:solidFill>
+              <a:schemeClr val="accent3"/>
+            </a:solidFill>
+            <a:prstDash val="solid"/>
+          </a:ln>
+        </p:spPr>
+      </p:sp>
+      <p:sp>
+        <p:nvSpPr>
+          <p:cNvPr id="9" name="Step 2 number"/>
+          <p:cNvSpPr txBox="1"/>
+          <p:nvPr/>
+        </p:nvSpPr>
+        <p:spPr>
+          <a:xfrm>
+            <a:off x="8503920" y="2395728"/>
+            <a:ext cx="347472" cy="347472"/>
+          </a:xfrm>
+          <a:prstGeom prst="rect">
+            <a:avLst/>
+          </a:prstGeom>
+          <a:noFill/>
+          <a:ln/>
+        </p:spPr>
+        <p:txBody>
+          <a:bodyPr wrap="square" lIns="0" tIns="0" rIns="0" bIns="0" rtlCol="0" anchor="ctr"/>
+          <a:lstStyle/>
+          <a:p>
+            <a:pPr algn="ctr" indent="0" marL="0">
+              <a:buNone/>
+            </a:pPr>
+            <a:r>
+              <a:rPr lang="en-US" sz="1300" b="1" dirty="0">
+                <a:solidFill>
+                  <a:schemeClr val="bg1"/>
+                </a:solidFill>
+              </a:rPr>
+              <a:t>2</a:t>
+            </a:r>
+            <a:endParaRPr lang="en-US" sz="1300" dirty="0"/>
+          </a:p>
+        </p:txBody>
+      </p:sp>
+      <p:sp>
+        <p:nvSpPr>
+          <p:cNvPr id="10" name="Step 2 text"/>
+          <p:cNvSpPr txBox="1"/>
+          <p:nvPr/>
+        </p:nvSpPr>
+        <p:spPr>
+          <a:xfrm>
+            <a:off x="8979408" y="2377440"/>
+            <a:ext cx="2770632" cy="1115568"/>
+          </a:xfrm>
+          <a:prstGeom prst="rect">
+            <a:avLst/>
+          </a:prstGeom>
+          <a:noFill/>
+          <a:ln/>
+        </p:spPr>
+        <p:txBody>
+          <a:bodyPr wrap="square" lIns="0" tIns="0" rIns="0" bIns="0" rtlCol="0" anchor="t"/>
+          <a:lstStyle/>
+          <a:p>
+            <a:pPr indent="0" marL="0">
+              <a:buNone/>
+            </a:pPr>
+            <a:r>
+              <a:rPr lang="en-US" sz="1350" dirty="0">
+                <a:solidFill>
+                  <a:schemeClr val="tx1"/>
+                </a:solidFill>
+              </a:rPr>
+              <a:t>Filter by product.</a:t>
+            </a:r>
+            <a:endParaRPr lang="en-US" sz="1350" dirty="0"/>
+          </a:p>
+        </p:txBody>
+      </p:sp>
+      <p:sp>
+        <p:nvSpPr>
+          <p:cNvPr id="11" name="Step 3 marker"/>
+          <p:cNvSpPr/>
+          <p:nvPr/>
+        </p:nvSpPr>
+        <p:spPr>
+          <a:xfrm>
+            <a:off x="8503920" y="3584448"/>
+            <a:ext cx="347472" cy="347472"/>
+          </a:xfrm>
+          <a:prstGeom prst="ellipse">
+            <a:avLst/>
+          </a:prstGeom>
+          <a:solidFill>
+            <a:schemeClr val="accent3"/>
+          </a:solidFill>
+          <a:ln w="12700">
+            <a:solidFill>
+              <a:schemeClr val="accent3"/>
+            </a:solidFill>
+            <a:prstDash val="solid"/>
+          </a:ln>
+        </p:spPr>
+      </p:sp>
+      <p:sp>
+        <p:nvSpPr>
+          <p:cNvPr id="12" name="Step 3 number"/>
+          <p:cNvSpPr txBox="1"/>
+          <p:nvPr/>
+        </p:nvSpPr>
+        <p:spPr>
+          <a:xfrm>
+            <a:off x="8503920" y="3584448"/>
+            <a:ext cx="347472" cy="347472"/>
+          </a:xfrm>
+          <a:prstGeom prst="rect">
+            <a:avLst/>
+          </a:prstGeom>
+          <a:noFill/>
+          <a:ln/>
+        </p:spPr>
+        <p:txBody>
+          <a:bodyPr wrap="square" lIns="0" tIns="0" rIns="0" bIns="0" rtlCol="0" anchor="ctr"/>
+          <a:lstStyle/>
+          <a:p>
+            <a:pPr algn="ctr" indent="0" marL="0">
+              <a:buNone/>
+            </a:pPr>
+            <a:r>
+              <a:rPr lang="en-US" sz="1300" b="1" dirty="0">
+                <a:solidFill>
+                  <a:schemeClr val="bg1"/>
+                </a:solidFill>
+              </a:rPr>
+              <a:t>3</a:t>
+            </a:r>
+            <a:endParaRPr lang="en-US" sz="1300" dirty="0"/>
+          </a:p>
+        </p:txBody>
+      </p:sp>
+      <p:sp>
+        <p:nvSpPr>
+          <p:cNvPr id="13" name="Step 3 text"/>
+          <p:cNvSpPr txBox="1"/>
+          <p:nvPr/>
+        </p:nvSpPr>
+        <p:spPr>
+          <a:xfrm>
+            <a:off x="8979408" y="3566160"/>
+            <a:ext cx="2770632" cy="1115568"/>
+          </a:xfrm>
+          <a:prstGeom prst="rect">
+            <a:avLst/>
+          </a:prstGeom>
+          <a:noFill/>
+          <a:ln/>
+        </p:spPr>
+        <p:txBody>
+          <a:bodyPr wrap="square" lIns="0" tIns="0" rIns="0" bIns="0" rtlCol="0" anchor="t"/>
+          <a:lstStyle/>
+          <a:p>
+            <a:pPr indent="0" marL="0">
+              <a:buNone/>
+            </a:pPr>
+            <a:r>
+              <a:rPr lang="en-US" sz="1350" dirty="0">
+                <a:solidFill>
+                  <a:schemeClr val="tx1"/>
+                </a:solidFill>
+              </a:rPr>
+              <a:t>Select a policy to see its details.</a:t>
+            </a:r>
+            <a:endParaRPr lang="en-US" sz="1350" dirty="0"/>
+          </a:p>
+        </p:txBody>
+      </p:sp>
+      <p:sp>
+        <p:nvSpPr>
+          <p:cNvPr id="25" name="Slide Number Placeholder 0"/>
+          <p:cNvSpPr>
+            <a:spLocks noGrp="1"/>
+          </p:cNvSpPr>
+          <p:nvPr>
+            <p:ph type="sldNum" sz="quarter" idx="4294967295"/>
+          </p:nvPr>
+        </p:nvSpPr>
+        <p:spPr>
+          <a:xfrm>
+            <a:off x="11201400" y="6446520"/>
+            <a:ext cx="548640" cy="274320"/>
+          </a:xfrm>
+          <a:prstGeom prst="rect">
+            <a:avLst/>
+          </a:prstGeom>
+          <a:extLst>
+            <a:ext uri="{C572A759-6A51-4108-AA02-DFA0A04FC94B}">
+              <ma14:wrappingTextBoxFlag xmlns:ma14="http://schemas.microsoft.com/office/mac/drawingml/2011/main" val="0"/>
+            </a:ext>
+          </a:extLst>
+        </p:spPr>
+        <p:txBody>
+          <a:bodyPr/>
+          <a:lstStyle>
+            <a:lvl1pPr>
+              <a:defRPr sz="1000">
+                <a:solidFill>
+                  <a:srgbClr val="6B6E72"/>
+                </a:solidFill>
+              </a:defRPr>
+            </a:lvl1pPr>
+          </a:lstStyle>
+          <a:p>
+            <a:pPr algn="r"/>
+            <a:fld id="{F7021451-1387-4CA6-816F-3879F97B5CBC}" type="slidenum">
+              <a:rPr b="0" lang="en-US"/>
+              <a:t>25</a:t>
+            </a:fld>
+            <a:endParaRPr lang="en-US"/>
+          </a:p>
+        </p:txBody>
+      </p:sp>
+    </p:spTree>
+  </p:cSld>
+  <p:clrMapOvr>
+    <a:masterClrMapping/>
+  </p:clrMapOvr>
+</p:sld>
+</file>
+
+<file path=ppt/slides/slide26.xml><?xml version="1.0" encoding="utf-8"?>
+<p:sld xmlns:a="http://schemas.openxmlformats.org/drawingml/2006/main" xmlns:r="http://schemas.openxmlformats.org/officeDocument/2006/relationships" xmlns:p="http://schemas.openxmlformats.org/presentationml/2006/main">
+  <p:cSld name="Slide 26">
+    <p:spTree>
+      <p:nvGrpSpPr>
+        <p:cNvPr id="1" name=""/>
+        <p:cNvGrpSpPr/>
+        <p:nvPr/>
+      </p:nvGrpSpPr>
+      <p:grpSpPr>
+        <a:xfrm>
+          <a:off x="0" y="0"/>
+          <a:ext cx="0" cy="0"/>
+          <a:chOff x="0" y="0"/>
+          <a:chExt cx="0" cy="0"/>
+        </a:xfrm>
+      </p:grpSpPr>
+      <p:sp>
+        <p:nvSpPr>
+          <p:cNvPr id="2" name="Text 0"/>
+          <p:cNvSpPr/>
+          <p:nvPr>
+            <p:ph idx="101" type="title" hasCustomPrompt="1"/>
+          </p:nvPr>
+        </p:nvSpPr>
+        <p:spPr>
+          <a:xfrm>
+            <a:off x="457200" y="274320"/>
+            <a:ext cx="10058400" cy="685800"/>
+          </a:xfrm>
+          <a:prstGeom prst="rect">
+            <a:avLst/>
+          </a:prstGeom>
+          <a:noFill/>
+          <a:ln/>
+        </p:spPr>
+        <p:txBody>
+          <a:bodyPr wrap="square" lIns="0" tIns="0" rIns="0" bIns="0" rtlCol="0" anchor="ctr"/>
+          <a:lstStyle/>
+          <a:p>
+            <a:pPr algn="l" indent="0" marL="0">
+              <a:buNone/>
+            </a:pPr>
+            <a:r>
+              <a:rPr lang="en-US" sz="2800" b="1" dirty="0">
+                <a:solidFill>
+                  <a:schemeClr val="tx2"/>
+                </a:solidFill>
+              </a:rPr>
+              <a:t>Email check</a:t>
+            </a:r>
+            <a:endParaRPr lang="en-US" sz="2800" dirty="0"/>
+          </a:p>
+        </p:txBody>
+      </p:sp>
+      <p:sp>
+        <p:nvSpPr>
+          <p:cNvPr id="3" name="Screenshot frame"/>
+          <p:cNvSpPr/>
+          <p:nvPr/>
+        </p:nvSpPr>
+        <p:spPr>
+          <a:xfrm>
+            <a:off x="402336" y="1133856"/>
+            <a:ext cx="7790688" cy="4910328"/>
+          </a:xfrm>
+          <a:prstGeom prst="rect">
+            <a:avLst/>
+          </a:prstGeom>
+          <a:solidFill>
+            <a:schemeClr val="bg1"/>
+          </a:solidFill>
+          <a:ln w="12700">
+            <a:solidFill>
+              <a:srgbClr val="D5DFDD"/>
+            </a:solidFill>
+            <a:prstDash val="solid"/>
+          </a:ln>
+          <a:effectLst>
+            <a:outerShdw sx="100000" sy="100000" kx="0" ky="0" algn="bl" rotWithShape="0" blurRad="76200" dist="25400" dir="5400000">
+              <a:srgbClr val="000000">
+                <a:alpha val="12000"/>
+              </a:srgbClr>
+            </a:outerShdw>
+          </a:effectLst>
+        </p:spPr>
+      </p:sp>
+      <p:pic>
+        <p:nvPicPr>
+          <p:cNvPr id="4" name="Screenshot" descr="Email check: screenshot with numbered callouts">    </p:cNvPr>
+          <p:cNvPicPr>
+            <a:picLocks noChangeAspect="1"/>
+          </p:cNvPicPr>
+          <p:nvPr/>
+        </p:nvPicPr>
+        <p:blipFill>
+          <a:blip r:embed="rId1"/>
+          <a:stretch>
+            <a:fillRect/>
+          </a:stretch>
+        </p:blipFill>
+        <p:spPr>
+          <a:xfrm>
+            <a:off x="457200" y="1188720"/>
+            <a:ext cx="7680960" cy="4800600"/>
+          </a:xfrm>
+          <a:prstGeom prst="rect">
+            <a:avLst/>
+          </a:prstGeom>
+        </p:spPr>
+      </p:pic>
+      <p:sp>
+        <p:nvSpPr>
+          <p:cNvPr id="5" name="Step 1 marker"/>
+          <p:cNvSpPr/>
+          <p:nvPr/>
+        </p:nvSpPr>
+        <p:spPr>
+          <a:xfrm>
+            <a:off x="8503920" y="1207008"/>
+            <a:ext cx="347472" cy="347472"/>
+          </a:xfrm>
+          <a:prstGeom prst="ellipse">
+            <a:avLst/>
+          </a:prstGeom>
+          <a:solidFill>
+            <a:schemeClr val="accent3"/>
+          </a:solidFill>
+          <a:ln w="12700">
+            <a:solidFill>
+              <a:schemeClr val="accent3"/>
+            </a:solidFill>
+            <a:prstDash val="solid"/>
+          </a:ln>
+        </p:spPr>
+      </p:sp>
+      <p:sp>
+        <p:nvSpPr>
+          <p:cNvPr id="6" name="Step 1 number"/>
+          <p:cNvSpPr txBox="1"/>
+          <p:nvPr/>
+        </p:nvSpPr>
+        <p:spPr>
+          <a:xfrm>
+            <a:off x="8503920" y="1207008"/>
+            <a:ext cx="347472" cy="347472"/>
+          </a:xfrm>
+          <a:prstGeom prst="rect">
+            <a:avLst/>
+          </a:prstGeom>
+          <a:noFill/>
+          <a:ln/>
+        </p:spPr>
+        <p:txBody>
+          <a:bodyPr wrap="square" lIns="0" tIns="0" rIns="0" bIns="0" rtlCol="0" anchor="ctr"/>
+          <a:lstStyle/>
+          <a:p>
+            <a:pPr algn="ctr" indent="0" marL="0">
+              <a:buNone/>
+            </a:pPr>
+            <a:r>
+              <a:rPr lang="en-US" sz="1300" b="1" dirty="0">
+                <a:solidFill>
+                  <a:schemeClr val="bg1"/>
+                </a:solidFill>
+              </a:rPr>
+              <a:t>1</a:t>
+            </a:r>
+            <a:endParaRPr lang="en-US" sz="1300" dirty="0"/>
+          </a:p>
+        </p:txBody>
+      </p:sp>
+      <p:sp>
+        <p:nvSpPr>
+          <p:cNvPr id="7" name="Step 1 text"/>
+          <p:cNvSpPr txBox="1"/>
+          <p:nvPr/>
+        </p:nvSpPr>
+        <p:spPr>
+          <a:xfrm>
+            <a:off x="8979408" y="1188720"/>
+            <a:ext cx="2770632" cy="1115568"/>
+          </a:xfrm>
+          <a:prstGeom prst="rect">
+            <a:avLst/>
+          </a:prstGeom>
+          <a:noFill/>
+          <a:ln/>
+        </p:spPr>
+        <p:txBody>
+          <a:bodyPr wrap="square" lIns="0" tIns="0" rIns="0" bIns="0" rtlCol="0" anchor="t"/>
+          <a:lstStyle/>
+          <a:p>
+            <a:pPr indent="0" marL="0">
+              <a:buNone/>
+            </a:pPr>
+            <a:r>
+              <a:rPr lang="en-US" sz="1350" dirty="0">
+                <a:solidFill>
+                  <a:schemeClr val="tx1"/>
+                </a:solidFill>
+              </a:rPr>
+              <a:t>Set up: whether email sending is switched on.</a:t>
+            </a:r>
+            <a:endParaRPr lang="en-US" sz="1350" dirty="0"/>
+          </a:p>
+        </p:txBody>
+      </p:sp>
+      <p:sp>
+        <p:nvSpPr>
+          <p:cNvPr id="8" name="Step 2 marker"/>
+          <p:cNvSpPr/>
+          <p:nvPr/>
+        </p:nvSpPr>
+        <p:spPr>
+          <a:xfrm>
+            <a:off x="8503920" y="2395728"/>
+            <a:ext cx="347472" cy="347472"/>
+          </a:xfrm>
+          <a:prstGeom prst="ellipse">
+            <a:avLst/>
+          </a:prstGeom>
+          <a:solidFill>
+            <a:schemeClr val="accent3"/>
+          </a:solidFill>
+          <a:ln w="12700">
+            <a:solidFill>
+              <a:schemeClr val="accent3"/>
+            </a:solidFill>
+            <a:prstDash val="solid"/>
+          </a:ln>
+        </p:spPr>
+      </p:sp>
+      <p:sp>
+        <p:nvSpPr>
+          <p:cNvPr id="9" name="Step 2 number"/>
+          <p:cNvSpPr txBox="1"/>
+          <p:nvPr/>
+        </p:nvSpPr>
+        <p:spPr>
+          <a:xfrm>
+            <a:off x="8503920" y="2395728"/>
+            <a:ext cx="347472" cy="347472"/>
+          </a:xfrm>
+          <a:prstGeom prst="rect">
+            <a:avLst/>
+          </a:prstGeom>
+          <a:noFill/>
+          <a:ln/>
+        </p:spPr>
+        <p:txBody>
+          <a:bodyPr wrap="square" lIns="0" tIns="0" rIns="0" bIns="0" rtlCol="0" anchor="ctr"/>
+          <a:lstStyle/>
+          <a:p>
+            <a:pPr algn="ctr" indent="0" marL="0">
+              <a:buNone/>
+            </a:pPr>
+            <a:r>
+              <a:rPr lang="en-US" sz="1300" b="1" dirty="0">
+                <a:solidFill>
+                  <a:schemeClr val="bg1"/>
+                </a:solidFill>
+              </a:rPr>
+              <a:t>2</a:t>
+            </a:r>
+            <a:endParaRPr lang="en-US" sz="1300" dirty="0"/>
+          </a:p>
+        </p:txBody>
+      </p:sp>
+      <p:sp>
+        <p:nvSpPr>
+          <p:cNvPr id="10" name="Step 2 text"/>
+          <p:cNvSpPr txBox="1"/>
+          <p:nvPr/>
+        </p:nvSpPr>
+        <p:spPr>
+          <a:xfrm>
+            <a:off x="8979408" y="2377440"/>
+            <a:ext cx="2770632" cy="1115568"/>
+          </a:xfrm>
+          <a:prstGeom prst="rect">
+            <a:avLst/>
+          </a:prstGeom>
+          <a:noFill/>
+          <a:ln/>
+        </p:spPr>
+        <p:txBody>
+          <a:bodyPr wrap="square" lIns="0" tIns="0" rIns="0" bIns="0" rtlCol="0" anchor="t"/>
+          <a:lstStyle/>
+          <a:p>
+            <a:pPr indent="0" marL="0">
+              <a:buNone/>
+            </a:pPr>
+            <a:r>
+              <a:rPr lang="en-US" sz="1350" dirty="0">
+                <a:solidFill>
+                  <a:schemeClr val="tx1"/>
+                </a:solidFill>
+              </a:rPr>
+              <a:t>Send test email to check delivery end to end.</a:t>
+            </a:r>
+            <a:endParaRPr lang="en-US" sz="1350" dirty="0"/>
+          </a:p>
+        </p:txBody>
+      </p:sp>
+      <p:sp>
+        <p:nvSpPr>
+          <p:cNvPr id="11" name="Step 3 marker"/>
+          <p:cNvSpPr/>
+          <p:nvPr/>
+        </p:nvSpPr>
+        <p:spPr>
+          <a:xfrm>
+            <a:off x="8503920" y="3584448"/>
+            <a:ext cx="347472" cy="347472"/>
+          </a:xfrm>
+          <a:prstGeom prst="ellipse">
+            <a:avLst/>
+          </a:prstGeom>
+          <a:solidFill>
+            <a:schemeClr val="accent3"/>
+          </a:solidFill>
+          <a:ln w="12700">
+            <a:solidFill>
+              <a:schemeClr val="accent3"/>
+            </a:solidFill>
+            <a:prstDash val="solid"/>
+          </a:ln>
+        </p:spPr>
+      </p:sp>
+      <p:sp>
+        <p:nvSpPr>
+          <p:cNvPr id="12" name="Step 3 number"/>
+          <p:cNvSpPr txBox="1"/>
+          <p:nvPr/>
+        </p:nvSpPr>
+        <p:spPr>
+          <a:xfrm>
+            <a:off x="8503920" y="3584448"/>
+            <a:ext cx="347472" cy="347472"/>
+          </a:xfrm>
+          <a:prstGeom prst="rect">
+            <a:avLst/>
+          </a:prstGeom>
+          <a:noFill/>
+          <a:ln/>
+        </p:spPr>
+        <p:txBody>
+          <a:bodyPr wrap="square" lIns="0" tIns="0" rIns="0" bIns="0" rtlCol="0" anchor="ctr"/>
+          <a:lstStyle/>
+          <a:p>
+            <a:pPr algn="ctr" indent="0" marL="0">
+              <a:buNone/>
+            </a:pPr>
+            <a:r>
+              <a:rPr lang="en-US" sz="1300" b="1" dirty="0">
+                <a:solidFill>
+                  <a:schemeClr val="bg1"/>
+                </a:solidFill>
+              </a:rPr>
+              <a:t>3</a:t>
+            </a:r>
+            <a:endParaRPr lang="en-US" sz="1300" dirty="0"/>
+          </a:p>
+        </p:txBody>
+      </p:sp>
+      <p:sp>
+        <p:nvSpPr>
+          <p:cNvPr id="13" name="Step 3 text"/>
+          <p:cNvSpPr txBox="1"/>
+          <p:nvPr/>
+        </p:nvSpPr>
+        <p:spPr>
+          <a:xfrm>
+            <a:off x="8979408" y="3566160"/>
+            <a:ext cx="2770632" cy="1115568"/>
+          </a:xfrm>
+          <a:prstGeom prst="rect">
+            <a:avLst/>
+          </a:prstGeom>
+          <a:noFill/>
+          <a:ln/>
+        </p:spPr>
+        <p:txBody>
+          <a:bodyPr wrap="square" lIns="0" tIns="0" rIns="0" bIns="0" rtlCol="0" anchor="t"/>
+          <a:lstStyle/>
+          <a:p>
+            <a:pPr indent="0" marL="0">
+              <a:buNone/>
+            </a:pPr>
+            <a:r>
+              <a:rPr lang="en-US" sz="1350" dirty="0">
+                <a:solidFill>
+                  <a:schemeClr val="tx1"/>
+                </a:solidFill>
+              </a:rPr>
+              <a:t>The senders that must be verified in Brevo.</a:t>
+            </a:r>
+            <a:endParaRPr lang="en-US" sz="1350" dirty="0"/>
+          </a:p>
+        </p:txBody>
+      </p:sp>
+      <p:sp>
+        <p:nvSpPr>
+          <p:cNvPr id="25" name="Slide Number Placeholder 0"/>
+          <p:cNvSpPr>
+            <a:spLocks noGrp="1"/>
+          </p:cNvSpPr>
+          <p:nvPr>
+            <p:ph type="sldNum" sz="quarter" idx="4294967295"/>
+          </p:nvPr>
+        </p:nvSpPr>
+        <p:spPr>
+          <a:xfrm>
+            <a:off x="11201400" y="6446520"/>
+            <a:ext cx="548640" cy="274320"/>
+          </a:xfrm>
+          <a:prstGeom prst="rect">
+            <a:avLst/>
+          </a:prstGeom>
+          <a:extLst>
+            <a:ext uri="{C572A759-6A51-4108-AA02-DFA0A04FC94B}">
+              <ma14:wrappingTextBoxFlag xmlns:ma14="http://schemas.microsoft.com/office/mac/drawingml/2011/main" val="0"/>
+            </a:ext>
+          </a:extLst>
+        </p:spPr>
+        <p:txBody>
+          <a:bodyPr/>
+          <a:lstStyle>
+            <a:lvl1pPr>
+              <a:defRPr sz="1000">
+                <a:solidFill>
+                  <a:srgbClr val="6B6E72"/>
+                </a:solidFill>
+              </a:defRPr>
+            </a:lvl1pPr>
+          </a:lstStyle>
+          <a:p>
+            <a:pPr algn="r"/>
+            <a:fld id="{F7021451-1387-4CA6-816F-3879F97B5CBC}" type="slidenum">
+              <a:rPr b="0" lang="en-US"/>
+              <a:t>26</a:t>
+            </a:fld>
+            <a:endParaRPr lang="en-US"/>
+          </a:p>
+        </p:txBody>
+      </p:sp>
+    </p:spTree>
+  </p:cSld>
+  <p:clrMapOvr>
+    <a:masterClrMapping/>
+  </p:clrMapOvr>
+</p:sld>
+</file>
+
+<file path=ppt/slides/slide27.xml><?xml version="1.0" encoding="utf-8"?>
+<p:sld xmlns:a="http://schemas.openxmlformats.org/drawingml/2006/main" xmlns:r="http://schemas.openxmlformats.org/officeDocument/2006/relationships" xmlns:p="http://schemas.openxmlformats.org/presentationml/2006/main">
+  <p:cSld name="Slide 27">
+    <p:spTree>
+      <p:nvGrpSpPr>
+        <p:cNvPr id="1" name=""/>
+        <p:cNvGrpSpPr/>
+        <p:nvPr/>
+      </p:nvGrpSpPr>
+      <p:grpSpPr>
+        <a:xfrm>
+          <a:off x="0" y="0"/>
+          <a:ext cx="0" cy="0"/>
+          <a:chOff x="0" y="0"/>
+          <a:chExt cx="0" cy="0"/>
+        </a:xfrm>
+      </p:grpSpPr>
+      <p:sp>
+        <p:nvSpPr>
+          <p:cNvPr id="2" name="Text 0"/>
+          <p:cNvSpPr/>
+          <p:nvPr>
+            <p:ph idx="101" type="title" hasCustomPrompt="1"/>
+          </p:nvPr>
+        </p:nvSpPr>
+        <p:spPr>
+          <a:xfrm>
+            <a:off x="457200" y="274320"/>
+            <a:ext cx="10058400" cy="685800"/>
+          </a:xfrm>
+          <a:prstGeom prst="rect">
+            <a:avLst/>
+          </a:prstGeom>
+          <a:noFill/>
+          <a:ln/>
+        </p:spPr>
+        <p:txBody>
+          <a:bodyPr wrap="square" lIns="0" tIns="0" rIns="0" bIns="0" rtlCol="0" anchor="ctr"/>
+          <a:lstStyle/>
+          <a:p>
+            <a:pPr algn="l" indent="0" marL="0">
+              <a:buNone/>
+            </a:pPr>
+            <a:r>
+              <a:rPr lang="en-US" sz="2800" b="1" dirty="0">
+                <a:solidFill>
+                  <a:schemeClr val="tx2"/>
+                </a:solidFill>
+              </a:rPr>
               <a:t>Key points</a:t>
             </a:r>
             <a:endParaRPr lang="en-US" sz="2800" dirty="0"/>
@@ -9271,11 +11693,11 @@
         <p:spPr>
           <a:xfrm>
             <a:off x="457200" y="1417320"/>
-            <a:ext cx="11247120" cy="960120"/>
+            <a:ext cx="11247120" cy="786384"/>
           </a:xfrm>
           <a:prstGeom prst="roundRect">
             <a:avLst>
-              <a:gd name="adj" fmla="val 7619"/>
+              <a:gd name="adj" fmla="val 9302"/>
             </a:avLst>
           </a:prstGeom>
           <a:solidFill>
@@ -9297,7 +11719,7 @@
         </p:nvSpPr>
         <p:spPr>
           <a:xfrm>
-            <a:off x="731520" y="1664208"/>
+            <a:off x="731520" y="1581912"/>
             <a:ext cx="457200" cy="457200"/>
           </a:xfrm>
           <a:prstGeom prst="ellipse">
@@ -9322,7 +11744,7 @@
         </p:nvSpPr>
         <p:spPr>
           <a:xfrm>
-            <a:off x="731520" y="1664208"/>
+            <a:off x="731520" y="1581912"/>
             <a:ext cx="457200" cy="457200"/>
           </a:xfrm>
           <a:prstGeom prst="rect">
@@ -9359,7 +11781,7 @@
         <p:spPr>
           <a:xfrm>
             <a:off x="1463040" y="1417320"/>
-            <a:ext cx="9966960" cy="960120"/>
+            <a:ext cx="9966960" cy="786384"/>
           </a:xfrm>
           <a:prstGeom prst="rect">
             <a:avLst/>
@@ -9394,12 +11816,12 @@
         </p:nvSpPr>
         <p:spPr>
           <a:xfrm>
-            <a:off x="457200" y="2560320"/>
-            <a:ext cx="11247120" cy="960120"/>
+            <a:off x="457200" y="2386584"/>
+            <a:ext cx="11247120" cy="786384"/>
           </a:xfrm>
           <a:prstGeom prst="roundRect">
             <a:avLst>
-              <a:gd name="adj" fmla="val 7619"/>
+              <a:gd name="adj" fmla="val 9302"/>
             </a:avLst>
           </a:prstGeom>
           <a:solidFill>
@@ -9421,7 +11843,7 @@
         </p:nvSpPr>
         <p:spPr>
           <a:xfrm>
-            <a:off x="731520" y="2807208"/>
+            <a:off x="731520" y="2551176"/>
             <a:ext cx="457200" cy="457200"/>
           </a:xfrm>
           <a:prstGeom prst="ellipse">
@@ -9446,7 +11868,7 @@
         </p:nvSpPr>
         <p:spPr>
           <a:xfrm>
-            <a:off x="731520" y="2807208"/>
+            <a:off x="731520" y="2551176"/>
             <a:ext cx="457200" cy="457200"/>
           </a:xfrm>
           <a:prstGeom prst="rect">
@@ -9482,8 +11904,8 @@
         </p:nvSpPr>
         <p:spPr>
           <a:xfrm>
-            <a:off x="1463040" y="2560320"/>
-            <a:ext cx="9966960" cy="960120"/>
+            <a:off x="1463040" y="2386584"/>
+            <a:ext cx="9966960" cy="786384"/>
           </a:xfrm>
           <a:prstGeom prst="rect">
             <a:avLst/>
@@ -9504,7 +11926,7 @@
                   <a:schemeClr val="tx1"/>
                 </a:solidFill>
               </a:rPr>
-              <a:t>The underwriting assistant gives a first read. The underwriter makes every decision.</a:t>
+              <a:t>Reporting tracks premium in force, quote conversion and renewal retention.</a:t>
             </a:r>
             <a:endParaRPr lang="en-US" sz="1800" dirty="0"/>
           </a:p>
@@ -9518,12 +11940,12 @@
         </p:nvSpPr>
         <p:spPr>
           <a:xfrm>
-            <a:off x="457200" y="3703320"/>
-            <a:ext cx="11247120" cy="960120"/>
+            <a:off x="457200" y="3355848"/>
+            <a:ext cx="11247120" cy="786384"/>
           </a:xfrm>
           <a:prstGeom prst="roundRect">
             <a:avLst>
-              <a:gd name="adj" fmla="val 7619"/>
+              <a:gd name="adj" fmla="val 9302"/>
             </a:avLst>
           </a:prstGeom>
           <a:solidFill>
@@ -9545,7 +11967,7 @@
         </p:nvSpPr>
         <p:spPr>
           <a:xfrm>
-            <a:off x="731520" y="3950208"/>
+            <a:off x="731520" y="3520440"/>
             <a:ext cx="457200" cy="457200"/>
           </a:xfrm>
           <a:prstGeom prst="ellipse">
@@ -9570,7 +11992,7 @@
         </p:nvSpPr>
         <p:spPr>
           <a:xfrm>
-            <a:off x="731520" y="3950208"/>
+            <a:off x="731520" y="3520440"/>
             <a:ext cx="457200" cy="457200"/>
           </a:xfrm>
           <a:prstGeom prst="rect">
@@ -9606,8 +12028,8 @@
         </p:nvSpPr>
         <p:spPr>
           <a:xfrm>
-            <a:off x="1463040" y="3703320"/>
-            <a:ext cx="9966960" cy="960120"/>
+            <a:off x="1463040" y="3355848"/>
+            <a:ext cx="9966960" cy="786384"/>
           </a:xfrm>
           <a:prstGeom prst="rect">
             <a:avLst/>
@@ -9628,7 +12050,7 @@
                   <a:schemeClr val="tx1"/>
                 </a:solidFill>
               </a:rPr>
-              <a:t>Copy into V13 fills the rating worksheet without retyping.</a:t>
+              <a:t>The underwriting assistant gives a first read. The underwriter makes every decision.</a:t>
             </a:r>
             <a:endParaRPr lang="en-US" sz="1800" dirty="0"/>
           </a:p>
@@ -9642,12 +12064,12 @@
         </p:nvSpPr>
         <p:spPr>
           <a:xfrm>
-            <a:off x="457200" y="4846320"/>
-            <a:ext cx="11247120" cy="960120"/>
+            <a:off x="457200" y="4325112"/>
+            <a:ext cx="11247120" cy="786384"/>
           </a:xfrm>
           <a:prstGeom prst="roundRect">
             <a:avLst>
-              <a:gd name="adj" fmla="val 7619"/>
+              <a:gd name="adj" fmla="val 9302"/>
             </a:avLst>
           </a:prstGeom>
           <a:solidFill>
@@ -9669,7 +12091,7 @@
         </p:nvSpPr>
         <p:spPr>
           <a:xfrm>
-            <a:off x="731520" y="5093208"/>
+            <a:off x="731520" y="4489704"/>
             <a:ext cx="457200" cy="457200"/>
           </a:xfrm>
           <a:prstGeom prst="ellipse">
@@ -9694,7 +12116,7 @@
         </p:nvSpPr>
         <p:spPr>
           <a:xfrm>
-            <a:off x="731520" y="5093208"/>
+            <a:off x="731520" y="4489704"/>
             <a:ext cx="457200" cy="457200"/>
           </a:xfrm>
           <a:prstGeom prst="rect">
@@ -9730,8 +12152,132 @@
         </p:nvSpPr>
         <p:spPr>
           <a:xfrm>
-            <a:off x="1463040" y="4846320"/>
-            <a:ext cx="9966960" cy="960120"/>
+            <a:off x="1463040" y="4325112"/>
+            <a:ext cx="9966960" cy="786384"/>
+          </a:xfrm>
+          <a:prstGeom prst="rect">
+            <a:avLst/>
+          </a:prstGeom>
+          <a:noFill/>
+          <a:ln/>
+        </p:spPr>
+        <p:txBody>
+          <a:bodyPr wrap="square" lIns="0" tIns="0" rIns="0" bIns="0" rtlCol="0" anchor="ctr"/>
+          <a:lstStyle/>
+          <a:p>
+            <a:pPr indent="0" marL="0">
+              <a:buNone/>
+            </a:pPr>
+            <a:r>
+              <a:rPr lang="en-US" sz="1800" dirty="0">
+                <a:solidFill>
+                  <a:schemeClr val="tx1"/>
+                </a:solidFill>
+              </a:rPr>
+              <a:t>Copy into V13 fills the rating worksheet without retyping.</a:t>
+            </a:r>
+            <a:endParaRPr lang="en-US" sz="1800" dirty="0"/>
+          </a:p>
+        </p:txBody>
+      </p:sp>
+      <p:sp>
+        <p:nvSpPr>
+          <p:cNvPr id="19" name="Point 5"/>
+          <p:cNvSpPr/>
+          <p:nvPr/>
+        </p:nvSpPr>
+        <p:spPr>
+          <a:xfrm>
+            <a:off x="457200" y="5294376"/>
+            <a:ext cx="11247120" cy="786384"/>
+          </a:xfrm>
+          <a:prstGeom prst="roundRect">
+            <a:avLst>
+              <a:gd name="adj" fmla="val 9302"/>
+            </a:avLst>
+          </a:prstGeom>
+          <a:solidFill>
+            <a:schemeClr val="bg1"/>
+          </a:solidFill>
+          <a:ln w="12700">
+            <a:solidFill>
+              <a:srgbClr val="DDE7E5"/>
+            </a:solidFill>
+            <a:prstDash val="solid"/>
+          </a:ln>
+        </p:spPr>
+      </p:sp>
+      <p:sp>
+        <p:nvSpPr>
+          <p:cNvPr id="20" name="Point 5 marker"/>
+          <p:cNvSpPr/>
+          <p:nvPr/>
+        </p:nvSpPr>
+        <p:spPr>
+          <a:xfrm>
+            <a:off x="731520" y="5458968"/>
+            <a:ext cx="457200" cy="457200"/>
+          </a:xfrm>
+          <a:prstGeom prst="ellipse">
+            <a:avLst/>
+          </a:prstGeom>
+          <a:solidFill>
+            <a:schemeClr val="accent2"/>
+          </a:solidFill>
+          <a:ln w="12700">
+            <a:solidFill>
+              <a:schemeClr val="accent2"/>
+            </a:solidFill>
+            <a:prstDash val="solid"/>
+          </a:ln>
+        </p:spPr>
+      </p:sp>
+      <p:sp>
+        <p:nvSpPr>
+          <p:cNvPr id="21" name="Point 5 tick"/>
+          <p:cNvSpPr txBox="1"/>
+          <p:nvPr/>
+        </p:nvSpPr>
+        <p:spPr>
+          <a:xfrm>
+            <a:off x="731520" y="5458968"/>
+            <a:ext cx="457200" cy="457200"/>
+          </a:xfrm>
+          <a:prstGeom prst="rect">
+            <a:avLst/>
+          </a:prstGeom>
+          <a:noFill/>
+          <a:ln/>
+        </p:spPr>
+        <p:txBody>
+          <a:bodyPr wrap="square" lIns="0" tIns="0" rIns="0" bIns="0" rtlCol="0" anchor="ctr"/>
+          <a:lstStyle/>
+          <a:p>
+            <a:pPr algn="ctr" indent="0" marL="0">
+              <a:buNone/>
+            </a:pPr>
+            <a:r>
+              <a:rPr lang="en-US" sz="1600" b="1" dirty="0">
+                <a:solidFill>
+                  <a:schemeClr val="bg1"/>
+                </a:solidFill>
+              </a:rPr>
+              <a:t>✓</a:t>
+            </a:r>
+            <a:endParaRPr lang="en-US" sz="1600" dirty="0"/>
+          </a:p>
+        </p:txBody>
+      </p:sp>
+      <p:sp>
+        <p:nvSpPr>
+          <p:cNvPr id="22" name="Point 5 text"/>
+          <p:cNvSpPr txBox="1"/>
+          <p:nvPr/>
+        </p:nvSpPr>
+        <p:spPr>
+          <a:xfrm>
+            <a:off x="1463040" y="5294376"/>
+            <a:ext cx="9966960" cy="786384"/>
           </a:xfrm>
           <a:prstGeom prst="rect">
             <a:avLst/>
@@ -9797,7 +12343,7 @@
             <a:pPr algn="r"/>
             <a:fld id="{F7021451-1387-4CA6-816F-3879F97B5CBC}" type="slidenum">
               <a:rPr b="0" lang="en-US"/>
-              <a:t>22</a:t>
+              <a:t>27</a:t>
             </a:fld>
             <a:endParaRPr lang="en-US"/>
           </a:p>
@@ -11407,7 +13953,7 @@
                   <a:schemeClr val="tx2"/>
                 </a:solidFill>
               </a:rPr>
-              <a:t>The book at a glance</a:t>
+              <a:t>Active book by product</a:t>
             </a:r>
             <a:endParaRPr lang="en-US" sz="2800" dirty="0"/>
           </a:p>
@@ -11447,7 +13993,7 @@
       </p:sp>
       <p:pic>
         <p:nvPicPr>
-          <p:cNvPr id="4" name="Screenshot" descr="The book at a glance: screenshot with numbered callouts">    </p:cNvPr>
+          <p:cNvPr id="4" name="Screenshot" descr="Active book by product: screenshot with numbered callouts">    </p:cNvPr>
           <p:cNvPicPr>
             <a:picLocks noChangeAspect="1"/>
           </p:cNvPicPr>
@@ -11560,7 +14106,7 @@
                   <a:schemeClr val="tx1"/>
                 </a:solidFill>
               </a:rPr>
-              <a:t>Headline numbers: active policies, premium and renewals. Select one to see the list.</a:t>
+              <a:t>Headline numbers: active policies, premium in force and renewals. Select one to see the list.</a:t>
             </a:r>
             <a:endParaRPr lang="en-US" sz="1350" dirty="0"/>
           </a:p>
@@ -11657,7 +14203,7 @@
                   <a:schemeClr val="tx1"/>
                 </a:solidFill>
               </a:rPr>
-              <a:t>The book broken down by product.</a:t>
+              <a:t>The active book by product: policies, renewals, open quotes and premium in force.</a:t>
             </a:r>
             <a:endParaRPr lang="en-US" sz="1350" dirty="0"/>
           </a:p>
@@ -11801,7 +14347,7 @@
                   <a:schemeClr val="bg1"/>
                 </a:solidFill>
               </a:rPr>
-              <a:t>Applications and underwriting</a:t>
+              <a:t>Reporting</a:t>
             </a:r>
             <a:endParaRPr lang="en-US" sz="4000" dirty="0"/>
           </a:p>
@@ -11839,7 +14385,7 @@
                   <a:schemeClr val="bg1"/>
                 </a:solidFill>
               </a:rPr>
-              <a:t>Every online application and claim lands here, with a first read from the underwriting assistant.</a:t>
+              <a:t>How the book is growing: premium in force, quotes turned into policies, and renewals kept.</a:t>
             </a:r>
             <a:endParaRPr lang="en-US" sz="2000" dirty="0"/>
           </a:p>
@@ -11947,7 +14493,7 @@
                   <a:schemeClr val="tx2"/>
                 </a:solidFill>
               </a:rPr>
-              <a:t>The applications list</a:t>
+              <a:t>Reporting and the active book</a:t>
             </a:r>
             <a:endParaRPr lang="en-US" sz="2800" dirty="0"/>
           </a:p>
@@ -11987,7 +14533,7 @@
       </p:sp>
       <p:pic>
         <p:nvPicPr>
-          <p:cNvPr id="4" name="Screenshot" descr="The applications list: screenshot with numbered callouts">    </p:cNvPr>
+          <p:cNvPr id="4" name="Screenshot" descr="Reporting and the active book: screenshot with numbered callouts">    </p:cNvPr>
           <p:cNvPicPr>
             <a:picLocks noChangeAspect="1"/>
           </p:cNvPicPr>
@@ -12100,7 +14646,7 @@
                   <a:schemeClr val="tx1"/>
                 </a:solidFill>
               </a:rPr>
-              <a:t>Each application or claim, newest first. Select one to open it.</a:t>
+              <a:t>Filter every figure by product or brokerage.</a:t>
             </a:r>
             <a:endParaRPr lang="en-US" sz="1350" dirty="0"/>
           </a:p>
@@ -12197,7 +14743,104 @@
                   <a:schemeClr val="tx1"/>
                 </a:solidFill>
               </a:rPr>
-              <a:t>Its status: new, in review, quoted and so on.</a:t>
+              <a:t>Headline figures: premium in force, quote conversion, renewal retention and renewals due in 90 days.</a:t>
+            </a:r>
+            <a:endParaRPr lang="en-US" sz="1350" dirty="0"/>
+          </a:p>
+        </p:txBody>
+      </p:sp>
+      <p:sp>
+        <p:nvSpPr>
+          <p:cNvPr id="11" name="Step 3 marker"/>
+          <p:cNvSpPr/>
+          <p:nvPr/>
+        </p:nvSpPr>
+        <p:spPr>
+          <a:xfrm>
+            <a:off x="8503920" y="3584448"/>
+            <a:ext cx="347472" cy="347472"/>
+          </a:xfrm>
+          <a:prstGeom prst="ellipse">
+            <a:avLst/>
+          </a:prstGeom>
+          <a:solidFill>
+            <a:schemeClr val="accent3"/>
+          </a:solidFill>
+          <a:ln w="12700">
+            <a:solidFill>
+              <a:schemeClr val="accent3"/>
+            </a:solidFill>
+            <a:prstDash val="solid"/>
+          </a:ln>
+        </p:spPr>
+      </p:sp>
+      <p:sp>
+        <p:nvSpPr>
+          <p:cNvPr id="12" name="Step 3 number"/>
+          <p:cNvSpPr txBox="1"/>
+          <p:nvPr/>
+        </p:nvSpPr>
+        <p:spPr>
+          <a:xfrm>
+            <a:off x="8503920" y="3584448"/>
+            <a:ext cx="347472" cy="347472"/>
+          </a:xfrm>
+          <a:prstGeom prst="rect">
+            <a:avLst/>
+          </a:prstGeom>
+          <a:noFill/>
+          <a:ln/>
+        </p:spPr>
+        <p:txBody>
+          <a:bodyPr wrap="square" lIns="0" tIns="0" rIns="0" bIns="0" rtlCol="0" anchor="ctr"/>
+          <a:lstStyle/>
+          <a:p>
+            <a:pPr algn="ctr" indent="0" marL="0">
+              <a:buNone/>
+            </a:pPr>
+            <a:r>
+              <a:rPr lang="en-US" sz="1300" b="1" dirty="0">
+                <a:solidFill>
+                  <a:schemeClr val="bg1"/>
+                </a:solidFill>
+              </a:rPr>
+              <a:t>3</a:t>
+            </a:r>
+            <a:endParaRPr lang="en-US" sz="1300" dirty="0"/>
+          </a:p>
+        </p:txBody>
+      </p:sp>
+      <p:sp>
+        <p:nvSpPr>
+          <p:cNvPr id="13" name="Step 3 text"/>
+          <p:cNvSpPr txBox="1"/>
+          <p:nvPr/>
+        </p:nvSpPr>
+        <p:spPr>
+          <a:xfrm>
+            <a:off x="8979408" y="3566160"/>
+            <a:ext cx="2770632" cy="1115568"/>
+          </a:xfrm>
+          <a:prstGeom prst="rect">
+            <a:avLst/>
+          </a:prstGeom>
+          <a:noFill/>
+          <a:ln/>
+        </p:spPr>
+        <p:txBody>
+          <a:bodyPr wrap="square" lIns="0" tIns="0" rIns="0" bIns="0" rtlCol="0" anchor="t"/>
+          <a:lstStyle/>
+          <a:p>
+            <a:pPr indent="0" marL="0">
+              <a:buNone/>
+            </a:pPr>
+            <a:r>
+              <a:rPr lang="en-US" sz="1350" dirty="0">
+                <a:solidFill>
+                  <a:schemeClr val="tx1"/>
+                </a:solidFill>
+              </a:rPr>
+              <a:t>The active book by product and by brokerage.</a:t>
             </a:r>
             <a:endParaRPr lang="en-US" sz="1350" dirty="0"/>
           </a:p>
